--- a/.lessons/19 Fundamental file storage/5 Remove Files from Storage/1.pptx
+++ b/.lessons/19 Fundamental file storage/5 Remove Files from Storage/1.pptx
@@ -7,8 +7,17 @@
   <p:sldIdLst>
     <p:sldId id="401" r:id="rId2"/>
     <p:sldId id="402" r:id="rId3"/>
-    <p:sldId id="403" r:id="rId4"/>
-    <p:sldId id="400" r:id="rId5"/>
+    <p:sldId id="404" r:id="rId4"/>
+    <p:sldId id="405" r:id="rId5"/>
+    <p:sldId id="406" r:id="rId6"/>
+    <p:sldId id="403" r:id="rId7"/>
+    <p:sldId id="400" r:id="rId8"/>
+    <p:sldId id="407" r:id="rId9"/>
+    <p:sldId id="408" r:id="rId10"/>
+    <p:sldId id="409" r:id="rId11"/>
+    <p:sldId id="410" r:id="rId12"/>
+    <p:sldId id="411" r:id="rId13"/>
+    <p:sldId id="412" r:id="rId14"/>
   </p:sldIdLst>
   <p:sldSz cx="12192000" cy="6858000"/>
   <p:notesSz cx="6858000" cy="9144000"/>
@@ -262,7 +271,7 @@
           <a:p>
             <a:fld id="{3E102D2E-813C-461C-9963-687A650C48C0}" type="datetimeFigureOut">
               <a:rPr lang="en-US" smtClean="0"/>
-              <a:t>4/26/2025</a:t>
+              <a:t>5/11/2025</a:t>
             </a:fld>
             <a:endParaRPr lang="en-US"/>
           </a:p>
@@ -460,7 +469,7 @@
           <a:p>
             <a:fld id="{3E102D2E-813C-461C-9963-687A650C48C0}" type="datetimeFigureOut">
               <a:rPr lang="en-US" smtClean="0"/>
-              <a:t>4/26/2025</a:t>
+              <a:t>5/11/2025</a:t>
             </a:fld>
             <a:endParaRPr lang="en-US"/>
           </a:p>
@@ -668,7 +677,7 @@
           <a:p>
             <a:fld id="{3E102D2E-813C-461C-9963-687A650C48C0}" type="datetimeFigureOut">
               <a:rPr lang="en-US" smtClean="0"/>
-              <a:t>4/26/2025</a:t>
+              <a:t>5/11/2025</a:t>
             </a:fld>
             <a:endParaRPr lang="en-US"/>
           </a:p>
@@ -866,7 +875,7 @@
           <a:p>
             <a:fld id="{3E102D2E-813C-461C-9963-687A650C48C0}" type="datetimeFigureOut">
               <a:rPr lang="en-US" smtClean="0"/>
-              <a:t>4/26/2025</a:t>
+              <a:t>5/11/2025</a:t>
             </a:fld>
             <a:endParaRPr lang="en-US"/>
           </a:p>
@@ -1141,7 +1150,7 @@
           <a:p>
             <a:fld id="{3E102D2E-813C-461C-9963-687A650C48C0}" type="datetimeFigureOut">
               <a:rPr lang="en-US" smtClean="0"/>
-              <a:t>4/26/2025</a:t>
+              <a:t>5/11/2025</a:t>
             </a:fld>
             <a:endParaRPr lang="en-US"/>
           </a:p>
@@ -1406,7 +1415,7 @@
           <a:p>
             <a:fld id="{3E102D2E-813C-461C-9963-687A650C48C0}" type="datetimeFigureOut">
               <a:rPr lang="en-US" smtClean="0"/>
-              <a:t>4/26/2025</a:t>
+              <a:t>5/11/2025</a:t>
             </a:fld>
             <a:endParaRPr lang="en-US"/>
           </a:p>
@@ -1818,7 +1827,7 @@
           <a:p>
             <a:fld id="{3E102D2E-813C-461C-9963-687A650C48C0}" type="datetimeFigureOut">
               <a:rPr lang="en-US" smtClean="0"/>
-              <a:t>4/26/2025</a:t>
+              <a:t>5/11/2025</a:t>
             </a:fld>
             <a:endParaRPr lang="en-US"/>
           </a:p>
@@ -1959,7 +1968,7 @@
           <a:p>
             <a:fld id="{3E102D2E-813C-461C-9963-687A650C48C0}" type="datetimeFigureOut">
               <a:rPr lang="en-US" smtClean="0"/>
-              <a:t>4/26/2025</a:t>
+              <a:t>5/11/2025</a:t>
             </a:fld>
             <a:endParaRPr lang="en-US"/>
           </a:p>
@@ -2072,7 +2081,7 @@
           <a:p>
             <a:fld id="{3E102D2E-813C-461C-9963-687A650C48C0}" type="datetimeFigureOut">
               <a:rPr lang="en-US" smtClean="0"/>
-              <a:t>4/26/2025</a:t>
+              <a:t>5/11/2025</a:t>
             </a:fld>
             <a:endParaRPr lang="en-US"/>
           </a:p>
@@ -2383,7 +2392,7 @@
           <a:p>
             <a:fld id="{3E102D2E-813C-461C-9963-687A650C48C0}" type="datetimeFigureOut">
               <a:rPr lang="en-US" smtClean="0"/>
-              <a:t>4/26/2025</a:t>
+              <a:t>5/11/2025</a:t>
             </a:fld>
             <a:endParaRPr lang="en-US"/>
           </a:p>
@@ -2671,7 +2680,7 @@
           <a:p>
             <a:fld id="{3E102D2E-813C-461C-9963-687A650C48C0}" type="datetimeFigureOut">
               <a:rPr lang="en-US" smtClean="0"/>
-              <a:t>4/26/2025</a:t>
+              <a:t>5/11/2025</a:t>
             </a:fld>
             <a:endParaRPr lang="en-US"/>
           </a:p>
@@ -2912,7 +2921,7 @@
           <a:p>
             <a:fld id="{3E102D2E-813C-461C-9963-687A650C48C0}" type="datetimeFigureOut">
               <a:rPr lang="en-US" smtClean="0"/>
-              <a:t>4/26/2025</a:t>
+              <a:t>5/11/2025</a:t>
             </a:fld>
             <a:endParaRPr lang="en-US"/>
           </a:p>
@@ -3349,6 +3358,661 @@
         </p:nvSpPr>
         <p:spPr>
           <a:xfrm>
+            <a:off x="217715" y="255046"/>
+            <a:ext cx="8483226" cy="5139292"/>
+          </a:xfrm>
+          <a:prstGeom prst="rect">
+            <a:avLst/>
+          </a:prstGeom>
+          <a:noFill/>
+        </p:spPr>
+        <p:txBody>
+          <a:bodyPr wrap="square">
+            <a:spAutoFit/>
+          </a:bodyPr>
+          <a:lstStyle/>
+          <a:p>
+            <a:pPr>
+              <a:lnSpc>
+                <a:spcPct val="150000"/>
+              </a:lnSpc>
+              <a:buNone/>
+            </a:pPr>
+            <a:r>
+              <a:rPr lang="az-Latn-AZ" altLang="en-US" sz="1100">
+                <a:latin typeface="Arial" panose="020B0604020202020204" pitchFamily="34" charset="0"/>
+              </a:rPr>
+              <a:t>Bu dərs şəkilləri, faylları necə silə bilərik ona baxaq. İlk öncə manual olaraq eyni şəkli kopyala yapışdır edərək adlarını dəyişdirəcəm. </a:t>
+            </a:r>
+          </a:p>
+          <a:p>
+            <a:pPr>
+              <a:lnSpc>
+                <a:spcPct val="150000"/>
+              </a:lnSpc>
+              <a:buNone/>
+            </a:pPr>
+            <a:endParaRPr kumimoji="0" lang="az-Latn-AZ" altLang="en-US" sz="1100" b="0" i="0" u="none" strike="noStrike" cap="none" normalizeH="0" baseline="0">
+              <a:ln>
+                <a:noFill/>
+              </a:ln>
+              <a:solidFill>
+                <a:schemeClr val="tx1"/>
+              </a:solidFill>
+              <a:effectLst/>
+              <a:latin typeface="Arial" panose="020B0604020202020204" pitchFamily="34" charset="0"/>
+            </a:endParaRPr>
+          </a:p>
+          <a:p>
+            <a:pPr>
+              <a:lnSpc>
+                <a:spcPct val="150000"/>
+              </a:lnSpc>
+              <a:buNone/>
+            </a:pPr>
+            <a:endParaRPr lang="az-Latn-AZ" altLang="en-US" sz="1100">
+              <a:latin typeface="Arial" panose="020B0604020202020204" pitchFamily="34" charset="0"/>
+            </a:endParaRPr>
+          </a:p>
+          <a:p>
+            <a:pPr>
+              <a:lnSpc>
+                <a:spcPct val="150000"/>
+              </a:lnSpc>
+              <a:buNone/>
+            </a:pPr>
+            <a:r>
+              <a:rPr lang="az-Latn-AZ" altLang="en-US" sz="1100">
+                <a:latin typeface="Arial" panose="020B0604020202020204" pitchFamily="34" charset="0"/>
+              </a:rPr>
+              <a:t>Ş</a:t>
+            </a:r>
+            <a:r>
+              <a:rPr kumimoji="0" lang="az-Latn-AZ" altLang="en-US" sz="1100" b="0" i="0" u="none" strike="noStrike" cap="none" normalizeH="0" baseline="0">
+                <a:ln>
+                  <a:noFill/>
+                </a:ln>
+                <a:solidFill>
+                  <a:schemeClr val="tx1"/>
+                </a:solidFill>
+                <a:effectLst/>
+                <a:latin typeface="Arial" panose="020B0604020202020204" pitchFamily="34" charset="0"/>
+              </a:rPr>
+              <a:t>əkillərin adlarını dəyişdirdikdən sonra 3 fərqli əmrə göz gəzdirəcəyik: </a:t>
+            </a:r>
+          </a:p>
+          <a:p>
+            <a:pPr>
+              <a:lnSpc>
+                <a:spcPct val="150000"/>
+              </a:lnSpc>
+              <a:buNone/>
+            </a:pPr>
+            <a:endParaRPr kumimoji="0" lang="az-Latn-AZ" altLang="en-US" sz="1100" b="0" i="0" u="none" strike="noStrike" cap="none" normalizeH="0" baseline="0">
+              <a:ln>
+                <a:noFill/>
+              </a:ln>
+              <a:solidFill>
+                <a:schemeClr val="tx1"/>
+              </a:solidFill>
+              <a:effectLst/>
+              <a:latin typeface="Arial" panose="020B0604020202020204" pitchFamily="34" charset="0"/>
+            </a:endParaRPr>
+          </a:p>
+          <a:p>
+            <a:pPr>
+              <a:lnSpc>
+                <a:spcPct val="150000"/>
+              </a:lnSpc>
+              <a:buNone/>
+            </a:pPr>
+            <a:endParaRPr lang="az-Latn-AZ" altLang="en-US" sz="1100">
+              <a:latin typeface="Arial" panose="020B0604020202020204" pitchFamily="34" charset="0"/>
+            </a:endParaRPr>
+          </a:p>
+          <a:p>
+            <a:pPr>
+              <a:lnSpc>
+                <a:spcPct val="150000"/>
+              </a:lnSpc>
+              <a:buNone/>
+            </a:pPr>
+            <a:endParaRPr kumimoji="0" lang="az-Latn-AZ" altLang="en-US" sz="1100" b="0" i="0" u="none" strike="noStrike" cap="none" normalizeH="0" baseline="0">
+              <a:ln>
+                <a:noFill/>
+              </a:ln>
+              <a:solidFill>
+                <a:schemeClr val="tx1"/>
+              </a:solidFill>
+              <a:effectLst/>
+              <a:latin typeface="Arial" panose="020B0604020202020204" pitchFamily="34" charset="0"/>
+            </a:endParaRPr>
+          </a:p>
+          <a:p>
+            <a:pPr>
+              <a:lnSpc>
+                <a:spcPct val="150000"/>
+              </a:lnSpc>
+              <a:buNone/>
+            </a:pPr>
+            <a:endParaRPr lang="az-Latn-AZ" altLang="en-US" sz="1100">
+              <a:latin typeface="Arial" panose="020B0604020202020204" pitchFamily="34" charset="0"/>
+            </a:endParaRPr>
+          </a:p>
+          <a:p>
+            <a:pPr>
+              <a:lnSpc>
+                <a:spcPct val="150000"/>
+              </a:lnSpc>
+              <a:buNone/>
+            </a:pPr>
+            <a:endParaRPr kumimoji="0" lang="az-Latn-AZ" altLang="en-US" sz="1100" b="0" i="0" u="none" strike="noStrike" cap="none" normalizeH="0" baseline="0">
+              <a:ln>
+                <a:noFill/>
+              </a:ln>
+              <a:solidFill>
+                <a:schemeClr val="tx1"/>
+              </a:solidFill>
+              <a:effectLst/>
+              <a:latin typeface="Arial" panose="020B0604020202020204" pitchFamily="34" charset="0"/>
+            </a:endParaRPr>
+          </a:p>
+          <a:p>
+            <a:pPr>
+              <a:lnSpc>
+                <a:spcPct val="150000"/>
+              </a:lnSpc>
+              <a:buNone/>
+            </a:pPr>
+            <a:endParaRPr lang="az-Latn-AZ" altLang="en-US" sz="1100">
+              <a:latin typeface="Arial" panose="020B0604020202020204" pitchFamily="34" charset="0"/>
+            </a:endParaRPr>
+          </a:p>
+          <a:p>
+            <a:pPr>
+              <a:lnSpc>
+                <a:spcPct val="150000"/>
+              </a:lnSpc>
+              <a:buNone/>
+            </a:pPr>
+            <a:r>
+              <a:rPr kumimoji="0" lang="en-US" altLang="en-US" sz="1100" b="0" i="0" u="none" strike="noStrike" cap="none" normalizeH="0" baseline="0">
+                <a:ln>
+                  <a:noFill/>
+                </a:ln>
+                <a:solidFill>
+                  <a:schemeClr val="tx1"/>
+                </a:solidFill>
+                <a:effectLst/>
+                <a:latin typeface="Arial" panose="020B0604020202020204" pitchFamily="34" charset="0"/>
+              </a:rPr>
+              <a:t>Laravel-də </a:t>
+            </a:r>
+            <a:r>
+              <a:rPr kumimoji="0" lang="en-US" altLang="en-US" sz="1100" b="1" i="0" u="none" strike="noStrike" cap="none" normalizeH="0" baseline="0">
+                <a:ln>
+                  <a:noFill/>
+                </a:ln>
+                <a:solidFill>
+                  <a:srgbClr val="FF0000"/>
+                </a:solidFill>
+                <a:effectLst/>
+                <a:latin typeface="Arial" panose="020B0604020202020204" pitchFamily="34" charset="0"/>
+              </a:rPr>
+              <a:t>Storage</a:t>
+            </a:r>
+            <a:r>
+              <a:rPr kumimoji="0" lang="en-US" altLang="en-US" sz="1100" b="0" i="0" u="none" strike="noStrike" cap="none" normalizeH="0" baseline="0">
+                <a:ln>
+                  <a:noFill/>
+                </a:ln>
+                <a:solidFill>
+                  <a:schemeClr val="tx1"/>
+                </a:solidFill>
+                <a:effectLst/>
+                <a:latin typeface="Arial" panose="020B0604020202020204" pitchFamily="34" charset="0"/>
+              </a:rPr>
+              <a:t> fasadı ilə istifadə olunan bu üç fərqli əmr, faylın hansı "</a:t>
+            </a:r>
+            <a:r>
+              <a:rPr kumimoji="0" lang="en-US" altLang="en-US" sz="1100" b="1" i="0" u="none" strike="noStrike" cap="none" normalizeH="0" baseline="0">
+                <a:ln>
+                  <a:noFill/>
+                </a:ln>
+                <a:solidFill>
+                  <a:schemeClr val="tx1"/>
+                </a:solidFill>
+                <a:effectLst/>
+                <a:latin typeface="Arial" panose="020B0604020202020204" pitchFamily="34" charset="0"/>
+              </a:rPr>
+              <a:t>disk</a:t>
+            </a:r>
+            <a:r>
+              <a:rPr kumimoji="0" lang="en-US" altLang="en-US" sz="1100" b="0" i="0" u="none" strike="noStrike" cap="none" normalizeH="0" baseline="0">
+                <a:ln>
+                  <a:noFill/>
+                </a:ln>
+                <a:solidFill>
+                  <a:schemeClr val="tx1"/>
+                </a:solidFill>
+                <a:effectLst/>
+                <a:latin typeface="Arial" panose="020B0604020202020204" pitchFamily="34" charset="0"/>
+              </a:rPr>
+              <a:t>"dən (yəni konfiqurasiya olunmuş fayl sistemindən) silinəcəyini müəyyən edir. </a:t>
+            </a:r>
+            <a:r>
+              <a:rPr kumimoji="0" lang="az-Latn-AZ" altLang="en-US" sz="1100" b="0" i="0" u="none" strike="noStrike" cap="none" normalizeH="0" baseline="0">
+                <a:ln>
+                  <a:noFill/>
+                </a:ln>
+                <a:solidFill>
+                  <a:schemeClr val="tx1"/>
+                </a:solidFill>
+                <a:effectLst/>
+                <a:latin typeface="Arial" panose="020B0604020202020204" pitchFamily="34" charset="0"/>
+              </a:rPr>
+              <a:t>Yəni, bu üç əmrin arasındakı əsas fərq, faylın hansı yerdə (diskdə) saxlandığına aiddir. Laravel-də Storage istifadə olunanda, fayllar fərqli disklərdə (yəni qovluqlarda) saxlanıla bilər. </a:t>
+            </a:r>
+            <a:r>
+              <a:rPr kumimoji="0" lang="en-US" altLang="en-US" sz="1100" b="0" i="0" u="none" strike="noStrike" cap="none" normalizeH="0" baseline="0">
+                <a:ln>
+                  <a:noFill/>
+                </a:ln>
+                <a:solidFill>
+                  <a:schemeClr val="tx1"/>
+                </a:solidFill>
+                <a:effectLst/>
+                <a:latin typeface="Arial" panose="020B0604020202020204" pitchFamily="34" charset="0"/>
+              </a:rPr>
+              <a:t>Gəlin bu əmrlərin fərqlərinə ətraflı baxaq:</a:t>
+            </a:r>
+            <a:endParaRPr kumimoji="0" lang="az-Latn-AZ" altLang="en-US" sz="1100" b="0" i="0" u="none" strike="noStrike" cap="none" normalizeH="0" baseline="0">
+              <a:ln>
+                <a:noFill/>
+              </a:ln>
+              <a:solidFill>
+                <a:schemeClr val="tx1"/>
+              </a:solidFill>
+              <a:effectLst/>
+              <a:latin typeface="Arial" panose="020B0604020202020204" pitchFamily="34" charset="0"/>
+            </a:endParaRPr>
+          </a:p>
+          <a:p>
+            <a:pPr>
+              <a:lnSpc>
+                <a:spcPct val="150000"/>
+              </a:lnSpc>
+              <a:buNone/>
+            </a:pPr>
+            <a:endParaRPr lang="az-Latn-AZ" altLang="en-US" sz="1100">
+              <a:latin typeface="Arial" panose="020B0604020202020204" pitchFamily="34" charset="0"/>
+            </a:endParaRPr>
+          </a:p>
+          <a:p>
+            <a:pPr>
+              <a:lnSpc>
+                <a:spcPct val="150000"/>
+              </a:lnSpc>
+              <a:buNone/>
+            </a:pPr>
+            <a:r>
+              <a:rPr kumimoji="0" lang="en-US" altLang="en-US" sz="1100" b="0" i="0" u="none" strike="noStrike" cap="none" normalizeH="0" baseline="0">
+                <a:ln>
+                  <a:noFill/>
+                </a:ln>
+                <a:solidFill>
+                  <a:schemeClr val="tx1"/>
+                </a:solidFill>
+                <a:effectLst/>
+                <a:latin typeface="Arial" panose="020B0604020202020204" pitchFamily="34" charset="0"/>
+              </a:rPr>
+              <a:t>1. </a:t>
+            </a:r>
+            <a:r>
+              <a:rPr kumimoji="0" lang="en-US" altLang="en-US" sz="1100" b="1" i="0" u="none" strike="noStrike" cap="none" normalizeH="0" baseline="0">
+                <a:ln>
+                  <a:noFill/>
+                </a:ln>
+                <a:solidFill>
+                  <a:srgbClr val="FF0000"/>
+                </a:solidFill>
+                <a:effectLst/>
+                <a:latin typeface="Arial" panose="020B0604020202020204" pitchFamily="34" charset="0"/>
+              </a:rPr>
+              <a:t>Storage::disk('public')-&gt;delete('/images/image_1.jpg');</a:t>
+            </a:r>
+          </a:p>
+          <a:p>
+            <a:pPr marL="171450" indent="-171450">
+              <a:lnSpc>
+                <a:spcPct val="150000"/>
+              </a:lnSpc>
+              <a:buFont typeface="Arial" panose="020B0604020202020204" pitchFamily="34" charset="0"/>
+              <a:buChar char="•"/>
+            </a:pPr>
+            <a:r>
+              <a:rPr kumimoji="0" lang="en-US" altLang="en-US" sz="1100" u="none" strike="noStrike" cap="none" normalizeH="0" baseline="0">
+                <a:ln>
+                  <a:noFill/>
+                </a:ln>
+                <a:solidFill>
+                  <a:schemeClr val="tx1"/>
+                </a:solidFill>
+                <a:effectLst/>
+                <a:latin typeface="Arial" panose="020B0604020202020204" pitchFamily="34" charset="0"/>
+              </a:rPr>
+              <a:t>Haradan silir?</a:t>
+            </a:r>
+          </a:p>
+          <a:p>
+            <a:pPr marL="171450" indent="-171450">
+              <a:lnSpc>
+                <a:spcPct val="150000"/>
+              </a:lnSpc>
+              <a:buFont typeface="Arial" panose="020B0604020202020204" pitchFamily="34" charset="0"/>
+              <a:buChar char="•"/>
+            </a:pPr>
+            <a:r>
+              <a:rPr kumimoji="0" lang="en-US" altLang="en-US" sz="1100" u="none" strike="noStrike" cap="none" normalizeH="0" baseline="0">
+                <a:ln>
+                  <a:noFill/>
+                </a:ln>
+                <a:solidFill>
+                  <a:schemeClr val="tx1"/>
+                </a:solidFill>
+                <a:effectLst/>
+                <a:latin typeface="Arial" panose="020B0604020202020204" pitchFamily="34" charset="0"/>
+              </a:rPr>
+              <a:t>Faylı bu yerdən silir:</a:t>
+            </a:r>
+          </a:p>
+          <a:p>
+            <a:pPr marL="171450" indent="-171450">
+              <a:lnSpc>
+                <a:spcPct val="150000"/>
+              </a:lnSpc>
+              <a:buFont typeface="Arial" panose="020B0604020202020204" pitchFamily="34" charset="0"/>
+              <a:buChar char="•"/>
+            </a:pPr>
+            <a:r>
+              <a:rPr kumimoji="0" lang="en-US" altLang="en-US" sz="1100" u="none" strike="noStrike" cap="none" normalizeH="0" baseline="0">
+                <a:ln>
+                  <a:noFill/>
+                </a:ln>
+                <a:solidFill>
+                  <a:schemeClr val="tx1"/>
+                </a:solidFill>
+                <a:effectLst/>
+                <a:latin typeface="Arial" panose="020B0604020202020204" pitchFamily="34" charset="0"/>
+              </a:rPr>
+              <a:t>storage/app/public/images/image_1.jpg</a:t>
+            </a:r>
+          </a:p>
+          <a:p>
+            <a:pPr>
+              <a:lnSpc>
+                <a:spcPct val="150000"/>
+              </a:lnSpc>
+            </a:pPr>
+            <a:endParaRPr lang="az-Latn-AZ" altLang="en-US" sz="1100">
+              <a:latin typeface="Arial" panose="020B0604020202020204" pitchFamily="34" charset="0"/>
+            </a:endParaRPr>
+          </a:p>
+          <a:p>
+            <a:pPr>
+              <a:lnSpc>
+                <a:spcPct val="150000"/>
+              </a:lnSpc>
+            </a:pPr>
+            <a:r>
+              <a:rPr kumimoji="0" lang="en-US" altLang="en-US" sz="1100" u="none" strike="noStrike" cap="none" normalizeH="0" baseline="0">
+                <a:ln>
+                  <a:noFill/>
+                </a:ln>
+                <a:solidFill>
+                  <a:schemeClr val="tx1"/>
+                </a:solidFill>
+                <a:effectLst/>
+                <a:latin typeface="Arial" panose="020B0604020202020204" pitchFamily="34" charset="0"/>
+              </a:rPr>
+              <a:t>Bu yerə </a:t>
+            </a:r>
+            <a:r>
+              <a:rPr kumimoji="0" lang="en-US" altLang="en-US" sz="1100" b="1" u="none" strike="noStrike" cap="none" normalizeH="0" baseline="0">
+                <a:ln>
+                  <a:noFill/>
+                </a:ln>
+                <a:solidFill>
+                  <a:schemeClr val="tx1"/>
+                </a:solidFill>
+                <a:effectLst/>
+                <a:latin typeface="Arial" panose="020B0604020202020204" pitchFamily="34" charset="0"/>
+              </a:rPr>
+              <a:t>public disk </a:t>
+            </a:r>
+            <a:r>
+              <a:rPr kumimoji="0" lang="en-US" altLang="en-US" sz="1100" u="none" strike="noStrike" cap="none" normalizeH="0" baseline="0">
+                <a:ln>
+                  <a:noFill/>
+                </a:ln>
+                <a:solidFill>
+                  <a:schemeClr val="tx1"/>
+                </a:solidFill>
+                <a:effectLst/>
+                <a:latin typeface="Arial" panose="020B0604020202020204" pitchFamily="34" charset="0"/>
+              </a:rPr>
+              <a:t>deyilir və bu fayllar veb səhifədən açıq görünə bilər (əgər </a:t>
+            </a:r>
+            <a:r>
+              <a:rPr kumimoji="0" lang="en-US" altLang="en-US" sz="1100" b="1" u="none" strike="noStrike" cap="none" normalizeH="0" baseline="0">
+                <a:ln>
+                  <a:noFill/>
+                </a:ln>
+                <a:solidFill>
+                  <a:schemeClr val="tx1"/>
+                </a:solidFill>
+                <a:effectLst/>
+                <a:latin typeface="Arial" panose="020B0604020202020204" pitchFamily="34" charset="0"/>
+              </a:rPr>
+              <a:t>php artisan storage:link </a:t>
+            </a:r>
+            <a:r>
+              <a:rPr kumimoji="0" lang="en-US" altLang="en-US" sz="1100" u="none" strike="noStrike" cap="none" normalizeH="0" baseline="0">
+                <a:ln>
+                  <a:noFill/>
+                </a:ln>
+                <a:solidFill>
+                  <a:schemeClr val="tx1"/>
+                </a:solidFill>
+                <a:effectLst/>
+                <a:latin typeface="Arial" panose="020B0604020202020204" pitchFamily="34" charset="0"/>
+              </a:rPr>
+              <a:t>işlətmisənsə).</a:t>
+            </a:r>
+          </a:p>
+        </p:txBody>
+      </p:sp>
+      <p:pic>
+        <p:nvPicPr>
+          <p:cNvPr id="4" name="Picture 3">
+            <a:extLst>
+              <a:ext uri="{FF2B5EF4-FFF2-40B4-BE49-F238E27FC236}">
+                <a16:creationId xmlns:a16="http://schemas.microsoft.com/office/drawing/2014/main" id="{3DDB5E8F-8EFF-4A7C-34C5-D4F6388C1382}"/>
+              </a:ext>
+            </a:extLst>
+          </p:cNvPr>
+          <p:cNvPicPr>
+            <a:picLocks noChangeAspect="1"/>
+          </p:cNvPicPr>
+          <p:nvPr/>
+        </p:nvPicPr>
+        <p:blipFill>
+          <a:blip r:embed="rId2">
+            <a:extLst>
+              <a:ext uri="{28A0092B-C50C-407E-A947-70E740481C1C}">
+                <a14:useLocalDpi xmlns:a14="http://schemas.microsoft.com/office/drawing/2010/main" val="0"/>
+              </a:ext>
+            </a:extLst>
+          </a:blip>
+          <a:stretch>
+            <a:fillRect/>
+          </a:stretch>
+        </p:blipFill>
+        <p:spPr>
+          <a:xfrm>
+            <a:off x="8851751" y="0"/>
+            <a:ext cx="3340249" cy="6858000"/>
+          </a:xfrm>
+          <a:prstGeom prst="rect">
+            <a:avLst/>
+          </a:prstGeom>
+        </p:spPr>
+      </p:pic>
+      <p:pic>
+        <p:nvPicPr>
+          <p:cNvPr id="6" name="Picture 5">
+            <a:extLst>
+              <a:ext uri="{FF2B5EF4-FFF2-40B4-BE49-F238E27FC236}">
+                <a16:creationId xmlns:a16="http://schemas.microsoft.com/office/drawing/2014/main" id="{28C458D5-3811-7EE3-9B1D-918DCA1ED1D5}"/>
+              </a:ext>
+            </a:extLst>
+          </p:cNvPr>
+          <p:cNvPicPr>
+            <a:picLocks noChangeAspect="1"/>
+          </p:cNvPicPr>
+          <p:nvPr/>
+        </p:nvPicPr>
+        <p:blipFill>
+          <a:blip r:embed="rId3"/>
+          <a:stretch>
+            <a:fillRect/>
+          </a:stretch>
+        </p:blipFill>
+        <p:spPr>
+          <a:xfrm>
+            <a:off x="0" y="1516922"/>
+            <a:ext cx="5115639" cy="1076475"/>
+          </a:xfrm>
+          <a:prstGeom prst="rect">
+            <a:avLst/>
+          </a:prstGeom>
+        </p:spPr>
+      </p:pic>
+      <p:pic>
+        <p:nvPicPr>
+          <p:cNvPr id="10" name="Picture 9">
+            <a:extLst>
+              <a:ext uri="{FF2B5EF4-FFF2-40B4-BE49-F238E27FC236}">
+                <a16:creationId xmlns:a16="http://schemas.microsoft.com/office/drawing/2014/main" id="{AF3A367C-7C40-97CB-9DC7-0699E1BD61A0}"/>
+              </a:ext>
+            </a:extLst>
+          </p:cNvPr>
+          <p:cNvPicPr>
+            <a:picLocks noChangeAspect="1"/>
+          </p:cNvPicPr>
+          <p:nvPr/>
+        </p:nvPicPr>
+        <p:blipFill>
+          <a:blip r:embed="rId4"/>
+          <a:srcRect b="47629"/>
+          <a:stretch/>
+        </p:blipFill>
+        <p:spPr>
+          <a:xfrm>
+            <a:off x="0" y="5600770"/>
+            <a:ext cx="2356701" cy="1257229"/>
+          </a:xfrm>
+          <a:prstGeom prst="rect">
+            <a:avLst/>
+          </a:prstGeom>
+        </p:spPr>
+      </p:pic>
+      <p:pic>
+        <p:nvPicPr>
+          <p:cNvPr id="13" name="Picture 12">
+            <a:extLst>
+              <a:ext uri="{FF2B5EF4-FFF2-40B4-BE49-F238E27FC236}">
+                <a16:creationId xmlns:a16="http://schemas.microsoft.com/office/drawing/2014/main" id="{39FD5EF6-C86C-62BF-F0CB-88092B442511}"/>
+              </a:ext>
+            </a:extLst>
+          </p:cNvPr>
+          <p:cNvPicPr>
+            <a:picLocks noChangeAspect="1"/>
+          </p:cNvPicPr>
+          <p:nvPr/>
+        </p:nvPicPr>
+        <p:blipFill>
+          <a:blip r:embed="rId5">
+            <a:extLst>
+              <a:ext uri="{28A0092B-C50C-407E-A947-70E740481C1C}">
+                <a14:useLocalDpi xmlns:a14="http://schemas.microsoft.com/office/drawing/2010/main" val="0"/>
+              </a:ext>
+            </a:extLst>
+          </a:blip>
+          <a:stretch>
+            <a:fillRect/>
+          </a:stretch>
+        </p:blipFill>
+        <p:spPr>
+          <a:xfrm>
+            <a:off x="3129700" y="5597123"/>
+            <a:ext cx="513456" cy="1257229"/>
+          </a:xfrm>
+          <a:prstGeom prst="rect">
+            <a:avLst/>
+          </a:prstGeom>
+        </p:spPr>
+      </p:pic>
+    </p:spTree>
+    <p:extLst>
+      <p:ext uri="{BB962C8B-B14F-4D97-AF65-F5344CB8AC3E}">
+        <p14:creationId xmlns:p14="http://schemas.microsoft.com/office/powerpoint/2010/main" val="4240944397"/>
+      </p:ext>
+    </p:extLst>
+  </p:cSld>
+  <p:clrMapOvr>
+    <a:masterClrMapping/>
+  </p:clrMapOvr>
+</p:sld>
+</file>
+
+<file path=ppt/slides/slide10.xml><?xml version="1.0" encoding="utf-8"?>
+<p:sld xmlns:a="http://schemas.openxmlformats.org/drawingml/2006/main" xmlns:r="http://schemas.openxmlformats.org/officeDocument/2006/relationships" xmlns:p="http://schemas.openxmlformats.org/presentationml/2006/main">
+  <p:cSld>
+    <p:spTree>
+      <p:nvGrpSpPr>
+        <p:cNvPr id="1" name="">
+          <a:extLst>
+            <a:ext uri="{FF2B5EF4-FFF2-40B4-BE49-F238E27FC236}">
+              <a16:creationId xmlns:a16="http://schemas.microsoft.com/office/drawing/2014/main" id="{21784F65-09C7-F797-B3C8-5F77A75A9F7F}"/>
+            </a:ext>
+          </a:extLst>
+        </p:cNvPr>
+        <p:cNvGrpSpPr/>
+        <p:nvPr/>
+      </p:nvGrpSpPr>
+      <p:grpSpPr>
+        <a:xfrm>
+          <a:off x="0" y="0"/>
+          <a:ext cx="0" cy="0"/>
+          <a:chOff x="0" y="0"/>
+          <a:chExt cx="0" cy="0"/>
+        </a:xfrm>
+      </p:grpSpPr>
+      <p:sp>
+        <p:nvSpPr>
+          <p:cNvPr id="3" name="TextBox 2">
+            <a:extLst>
+              <a:ext uri="{FF2B5EF4-FFF2-40B4-BE49-F238E27FC236}">
+                <a16:creationId xmlns:a16="http://schemas.microsoft.com/office/drawing/2014/main" id="{C0A715EE-34D0-36FE-FBDB-8D6E7EA076FE}"/>
+              </a:ext>
+            </a:extLst>
+          </p:cNvPr>
+          <p:cNvSpPr txBox="1"/>
+          <p:nvPr/>
+        </p:nvSpPr>
+        <p:spPr>
+          <a:xfrm>
             <a:off x="217714" y="255046"/>
             <a:ext cx="11756571" cy="355354"/>
           </a:xfrm>
@@ -3388,7 +4052,265 @@
     </p:spTree>
     <p:extLst>
       <p:ext uri="{BB962C8B-B14F-4D97-AF65-F5344CB8AC3E}">
-        <p14:creationId xmlns:p14="http://schemas.microsoft.com/office/powerpoint/2010/main" val="4240944397"/>
+        <p14:creationId xmlns:p14="http://schemas.microsoft.com/office/powerpoint/2010/main" val="3739840116"/>
+      </p:ext>
+    </p:extLst>
+  </p:cSld>
+  <p:clrMapOvr>
+    <a:masterClrMapping/>
+  </p:clrMapOvr>
+</p:sld>
+</file>
+
+<file path=ppt/slides/slide11.xml><?xml version="1.0" encoding="utf-8"?>
+<p:sld xmlns:a="http://schemas.openxmlformats.org/drawingml/2006/main" xmlns:r="http://schemas.openxmlformats.org/officeDocument/2006/relationships" xmlns:p="http://schemas.openxmlformats.org/presentationml/2006/main">
+  <p:cSld>
+    <p:spTree>
+      <p:nvGrpSpPr>
+        <p:cNvPr id="1" name="">
+          <a:extLst>
+            <a:ext uri="{FF2B5EF4-FFF2-40B4-BE49-F238E27FC236}">
+              <a16:creationId xmlns:a16="http://schemas.microsoft.com/office/drawing/2014/main" id="{9BC89A7A-94A5-4A8E-0DE1-5288609A9DCE}"/>
+            </a:ext>
+          </a:extLst>
+        </p:cNvPr>
+        <p:cNvGrpSpPr/>
+        <p:nvPr/>
+      </p:nvGrpSpPr>
+      <p:grpSpPr>
+        <a:xfrm>
+          <a:off x="0" y="0"/>
+          <a:ext cx="0" cy="0"/>
+          <a:chOff x="0" y="0"/>
+          <a:chExt cx="0" cy="0"/>
+        </a:xfrm>
+      </p:grpSpPr>
+      <p:sp>
+        <p:nvSpPr>
+          <p:cNvPr id="3" name="TextBox 2">
+            <a:extLst>
+              <a:ext uri="{FF2B5EF4-FFF2-40B4-BE49-F238E27FC236}">
+                <a16:creationId xmlns:a16="http://schemas.microsoft.com/office/drawing/2014/main" id="{61042A6A-3B30-C75F-6A45-FA82B6641B03}"/>
+              </a:ext>
+            </a:extLst>
+          </p:cNvPr>
+          <p:cNvSpPr txBox="1"/>
+          <p:nvPr/>
+        </p:nvSpPr>
+        <p:spPr>
+          <a:xfrm>
+            <a:off x="217714" y="255046"/>
+            <a:ext cx="11756571" cy="355354"/>
+          </a:xfrm>
+          <a:prstGeom prst="rect">
+            <a:avLst/>
+          </a:prstGeom>
+          <a:noFill/>
+        </p:spPr>
+        <p:txBody>
+          <a:bodyPr wrap="square">
+            <a:spAutoFit/>
+          </a:bodyPr>
+          <a:lstStyle/>
+          <a:p>
+            <a:pPr>
+              <a:lnSpc>
+                <a:spcPct val="150000"/>
+              </a:lnSpc>
+              <a:buNone/>
+            </a:pPr>
+            <a:r>
+              <a:rPr kumimoji="0" lang="en-US" altLang="en-US" sz="1300" b="0" i="0" u="none" strike="noStrike" cap="none" normalizeH="0" baseline="0">
+                <a:ln>
+                  <a:noFill/>
+                </a:ln>
+                <a:solidFill>
+                  <a:schemeClr val="tx1"/>
+                </a:solidFill>
+                <a:effectLst/>
+                <a:latin typeface="Arial" panose="020B0604020202020204" pitchFamily="34" charset="0"/>
+              </a:rPr>
+              <a:t>.</a:t>
+            </a:r>
+          </a:p>
+        </p:txBody>
+      </p:sp>
+    </p:spTree>
+    <p:extLst>
+      <p:ext uri="{BB962C8B-B14F-4D97-AF65-F5344CB8AC3E}">
+        <p14:creationId xmlns:p14="http://schemas.microsoft.com/office/powerpoint/2010/main" val="1891971503"/>
+      </p:ext>
+    </p:extLst>
+  </p:cSld>
+  <p:clrMapOvr>
+    <a:masterClrMapping/>
+  </p:clrMapOvr>
+</p:sld>
+</file>
+
+<file path=ppt/slides/slide12.xml><?xml version="1.0" encoding="utf-8"?>
+<p:sld xmlns:a="http://schemas.openxmlformats.org/drawingml/2006/main" xmlns:r="http://schemas.openxmlformats.org/officeDocument/2006/relationships" xmlns:p="http://schemas.openxmlformats.org/presentationml/2006/main">
+  <p:cSld>
+    <p:spTree>
+      <p:nvGrpSpPr>
+        <p:cNvPr id="1" name="">
+          <a:extLst>
+            <a:ext uri="{FF2B5EF4-FFF2-40B4-BE49-F238E27FC236}">
+              <a16:creationId xmlns:a16="http://schemas.microsoft.com/office/drawing/2014/main" id="{F02E073B-FBAC-3EA0-D94F-FF77FB21EE40}"/>
+            </a:ext>
+          </a:extLst>
+        </p:cNvPr>
+        <p:cNvGrpSpPr/>
+        <p:nvPr/>
+      </p:nvGrpSpPr>
+      <p:grpSpPr>
+        <a:xfrm>
+          <a:off x="0" y="0"/>
+          <a:ext cx="0" cy="0"/>
+          <a:chOff x="0" y="0"/>
+          <a:chExt cx="0" cy="0"/>
+        </a:xfrm>
+      </p:grpSpPr>
+      <p:sp>
+        <p:nvSpPr>
+          <p:cNvPr id="3" name="TextBox 2">
+            <a:extLst>
+              <a:ext uri="{FF2B5EF4-FFF2-40B4-BE49-F238E27FC236}">
+                <a16:creationId xmlns:a16="http://schemas.microsoft.com/office/drawing/2014/main" id="{C75E4CC6-BF07-BA0A-E55E-AF09945AD699}"/>
+              </a:ext>
+            </a:extLst>
+          </p:cNvPr>
+          <p:cNvSpPr txBox="1"/>
+          <p:nvPr/>
+        </p:nvSpPr>
+        <p:spPr>
+          <a:xfrm>
+            <a:off x="217714" y="255046"/>
+            <a:ext cx="11756571" cy="355354"/>
+          </a:xfrm>
+          <a:prstGeom prst="rect">
+            <a:avLst/>
+          </a:prstGeom>
+          <a:noFill/>
+        </p:spPr>
+        <p:txBody>
+          <a:bodyPr wrap="square">
+            <a:spAutoFit/>
+          </a:bodyPr>
+          <a:lstStyle/>
+          <a:p>
+            <a:pPr>
+              <a:lnSpc>
+                <a:spcPct val="150000"/>
+              </a:lnSpc>
+              <a:buNone/>
+            </a:pPr>
+            <a:r>
+              <a:rPr kumimoji="0" lang="en-US" altLang="en-US" sz="1300" b="0" i="0" u="none" strike="noStrike" cap="none" normalizeH="0" baseline="0">
+                <a:ln>
+                  <a:noFill/>
+                </a:ln>
+                <a:solidFill>
+                  <a:schemeClr val="tx1"/>
+                </a:solidFill>
+                <a:effectLst/>
+                <a:latin typeface="Arial" panose="020B0604020202020204" pitchFamily="34" charset="0"/>
+              </a:rPr>
+              <a:t>.</a:t>
+            </a:r>
+          </a:p>
+        </p:txBody>
+      </p:sp>
+    </p:spTree>
+    <p:extLst>
+      <p:ext uri="{BB962C8B-B14F-4D97-AF65-F5344CB8AC3E}">
+        <p14:creationId xmlns:p14="http://schemas.microsoft.com/office/powerpoint/2010/main" val="3928060460"/>
+      </p:ext>
+    </p:extLst>
+  </p:cSld>
+  <p:clrMapOvr>
+    <a:masterClrMapping/>
+  </p:clrMapOvr>
+</p:sld>
+</file>
+
+<file path=ppt/slides/slide13.xml><?xml version="1.0" encoding="utf-8"?>
+<p:sld xmlns:a="http://schemas.openxmlformats.org/drawingml/2006/main" xmlns:r="http://schemas.openxmlformats.org/officeDocument/2006/relationships" xmlns:p="http://schemas.openxmlformats.org/presentationml/2006/main">
+  <p:cSld>
+    <p:spTree>
+      <p:nvGrpSpPr>
+        <p:cNvPr id="1" name="">
+          <a:extLst>
+            <a:ext uri="{FF2B5EF4-FFF2-40B4-BE49-F238E27FC236}">
+              <a16:creationId xmlns:a16="http://schemas.microsoft.com/office/drawing/2014/main" id="{62615A40-6475-52CE-E305-0C22D4AE173B}"/>
+            </a:ext>
+          </a:extLst>
+        </p:cNvPr>
+        <p:cNvGrpSpPr/>
+        <p:nvPr/>
+      </p:nvGrpSpPr>
+      <p:grpSpPr>
+        <a:xfrm>
+          <a:off x="0" y="0"/>
+          <a:ext cx="0" cy="0"/>
+          <a:chOff x="0" y="0"/>
+          <a:chExt cx="0" cy="0"/>
+        </a:xfrm>
+      </p:grpSpPr>
+      <p:sp>
+        <p:nvSpPr>
+          <p:cNvPr id="3" name="TextBox 2">
+            <a:extLst>
+              <a:ext uri="{FF2B5EF4-FFF2-40B4-BE49-F238E27FC236}">
+                <a16:creationId xmlns:a16="http://schemas.microsoft.com/office/drawing/2014/main" id="{0E07DCC3-3121-BCD2-01C5-449151560B81}"/>
+              </a:ext>
+            </a:extLst>
+          </p:cNvPr>
+          <p:cNvSpPr txBox="1"/>
+          <p:nvPr/>
+        </p:nvSpPr>
+        <p:spPr>
+          <a:xfrm>
+            <a:off x="217714" y="255046"/>
+            <a:ext cx="11756571" cy="355354"/>
+          </a:xfrm>
+          <a:prstGeom prst="rect">
+            <a:avLst/>
+          </a:prstGeom>
+          <a:noFill/>
+        </p:spPr>
+        <p:txBody>
+          <a:bodyPr wrap="square">
+            <a:spAutoFit/>
+          </a:bodyPr>
+          <a:lstStyle/>
+          <a:p>
+            <a:pPr>
+              <a:lnSpc>
+                <a:spcPct val="150000"/>
+              </a:lnSpc>
+              <a:buNone/>
+            </a:pPr>
+            <a:r>
+              <a:rPr kumimoji="0" lang="en-US" altLang="en-US" sz="1300" b="0" i="0" u="none" strike="noStrike" cap="none" normalizeH="0" baseline="0">
+                <a:ln>
+                  <a:noFill/>
+                </a:ln>
+                <a:solidFill>
+                  <a:schemeClr val="tx1"/>
+                </a:solidFill>
+                <a:effectLst/>
+                <a:latin typeface="Arial" panose="020B0604020202020204" pitchFamily="34" charset="0"/>
+              </a:rPr>
+              <a:t>.</a:t>
+            </a:r>
+          </a:p>
+        </p:txBody>
+      </p:sp>
+    </p:spTree>
+    <p:extLst>
+      <p:ext uri="{BB962C8B-B14F-4D97-AF65-F5344CB8AC3E}">
+        <p14:creationId xmlns:p14="http://schemas.microsoft.com/office/powerpoint/2010/main" val="4220695221"/>
       </p:ext>
     </p:extLst>
   </p:cSld>
@@ -3436,7 +4358,7 @@
         <p:spPr>
           <a:xfrm>
             <a:off x="217714" y="255046"/>
-            <a:ext cx="11756571" cy="355354"/>
+            <a:ext cx="11763754" cy="5393208"/>
           </a:xfrm>
           <a:prstGeom prst="rect">
             <a:avLst/>
@@ -3456,7 +4378,163 @@
               <a:buNone/>
             </a:pPr>
             <a:r>
-              <a:rPr kumimoji="0" lang="en-US" altLang="en-US" sz="1300" b="0" i="0" u="none" strike="noStrike" cap="none" normalizeH="0" baseline="0">
+              <a:rPr lang="az-Latn-AZ" altLang="en-US" sz="1100">
+                <a:latin typeface="Arial" panose="020B0604020202020204" pitchFamily="34" charset="0"/>
+              </a:rPr>
+              <a:t>2. </a:t>
+            </a:r>
+            <a:r>
+              <a:rPr lang="az-Latn-AZ" altLang="en-US" sz="1100" b="1">
+                <a:solidFill>
+                  <a:srgbClr val="FF0000"/>
+                </a:solidFill>
+                <a:latin typeface="Arial" panose="020B0604020202020204" pitchFamily="34" charset="0"/>
+              </a:rPr>
+              <a:t>Storage::disk('local')-&gt;delete('images/image_1.jpg’);</a:t>
+            </a:r>
+          </a:p>
+          <a:p>
+            <a:pPr>
+              <a:lnSpc>
+                <a:spcPct val="150000"/>
+              </a:lnSpc>
+              <a:buNone/>
+            </a:pPr>
+            <a:endParaRPr kumimoji="0" lang="az-Latn-AZ" altLang="en-US" sz="1100" b="0" i="0" u="none" strike="noStrike" cap="none" normalizeH="0" baseline="0">
+              <a:ln>
+                <a:noFill/>
+              </a:ln>
+              <a:solidFill>
+                <a:schemeClr val="tx1"/>
+              </a:solidFill>
+              <a:effectLst/>
+              <a:latin typeface="Arial" panose="020B0604020202020204" pitchFamily="34" charset="0"/>
+            </a:endParaRPr>
+          </a:p>
+          <a:p>
+            <a:pPr>
+              <a:lnSpc>
+                <a:spcPct val="150000"/>
+              </a:lnSpc>
+              <a:buNone/>
+            </a:pPr>
+            <a:r>
+              <a:rPr lang="az-Latn-AZ" altLang="en-US" sz="1100">
+                <a:latin typeface="Arial" panose="020B0604020202020204" pitchFamily="34" charset="0"/>
+              </a:rPr>
+              <a:t>Haradan silir?</a:t>
+            </a:r>
+          </a:p>
+          <a:p>
+            <a:pPr>
+              <a:lnSpc>
+                <a:spcPct val="150000"/>
+              </a:lnSpc>
+              <a:buNone/>
+            </a:pPr>
+            <a:r>
+              <a:rPr lang="az-Latn-AZ" altLang="en-US" sz="1100">
+                <a:latin typeface="Arial" panose="020B0604020202020204" pitchFamily="34" charset="0"/>
+              </a:rPr>
+              <a:t>Faylı bu yerdən silir:</a:t>
+            </a:r>
+          </a:p>
+          <a:p>
+            <a:pPr>
+              <a:lnSpc>
+                <a:spcPct val="150000"/>
+              </a:lnSpc>
+              <a:buNone/>
+            </a:pPr>
+            <a:r>
+              <a:rPr lang="az-Latn-AZ" altLang="en-US" sz="1100">
+                <a:latin typeface="Arial" panose="020B0604020202020204" pitchFamily="34" charset="0"/>
+              </a:rPr>
+              <a:t>storage/app/images/image_1.jpg</a:t>
+            </a:r>
+          </a:p>
+          <a:p>
+            <a:pPr>
+              <a:lnSpc>
+                <a:spcPct val="150000"/>
+              </a:lnSpc>
+              <a:buNone/>
+            </a:pPr>
+            <a:endParaRPr lang="az-Latn-AZ" altLang="en-US" sz="1100">
+              <a:latin typeface="Arial" panose="020B0604020202020204" pitchFamily="34" charset="0"/>
+            </a:endParaRPr>
+          </a:p>
+          <a:p>
+            <a:pPr>
+              <a:lnSpc>
+                <a:spcPct val="150000"/>
+              </a:lnSpc>
+              <a:buNone/>
+            </a:pPr>
+            <a:r>
+              <a:rPr lang="az-Latn-AZ" altLang="en-US" sz="1100">
+                <a:latin typeface="Arial" panose="020B0604020202020204" pitchFamily="34" charset="0"/>
+              </a:rPr>
+              <a:t>🔐 Bu local diskdir. Buradakı fayllar veb səhifədən görünmür. </a:t>
+            </a:r>
+          </a:p>
+          <a:p>
+            <a:pPr>
+              <a:lnSpc>
+                <a:spcPct val="150000"/>
+              </a:lnSpc>
+              <a:buNone/>
+            </a:pPr>
+            <a:r>
+              <a:rPr lang="az-Latn-AZ" altLang="en-US" sz="1100">
+                <a:latin typeface="Arial" panose="020B0604020202020204" pitchFamily="34" charset="0"/>
+              </a:rPr>
+              <a:t>Yəni </a:t>
+            </a:r>
+            <a:r>
+              <a:rPr lang="az-Latn-AZ" altLang="en-US" sz="1100" b="1">
+                <a:latin typeface="Arial" panose="020B0604020202020204" pitchFamily="34" charset="0"/>
+              </a:rPr>
+              <a:t>http://localhost/storage/... </a:t>
+            </a:r>
+            <a:r>
+              <a:rPr lang="az-Latn-AZ" altLang="en-US" sz="1100">
+                <a:latin typeface="Arial" panose="020B0604020202020204" pitchFamily="34" charset="0"/>
+              </a:rPr>
+              <a:t>ilə daxil ola bilməzsən.</a:t>
+            </a:r>
+          </a:p>
+          <a:p>
+            <a:pPr>
+              <a:lnSpc>
+                <a:spcPct val="150000"/>
+              </a:lnSpc>
+              <a:buNone/>
+            </a:pPr>
+            <a:endParaRPr lang="az-Latn-AZ" altLang="en-US" sz="1100">
+              <a:latin typeface="Arial" panose="020B0604020202020204" pitchFamily="34" charset="0"/>
+            </a:endParaRPr>
+          </a:p>
+          <a:p>
+            <a:pPr>
+              <a:lnSpc>
+                <a:spcPct val="150000"/>
+              </a:lnSpc>
+              <a:buNone/>
+            </a:pPr>
+            <a:endParaRPr lang="az-Latn-AZ" altLang="en-US" sz="1100">
+              <a:latin typeface="Arial" panose="020B0604020202020204" pitchFamily="34" charset="0"/>
+            </a:endParaRPr>
+          </a:p>
+          <a:p>
+            <a:pPr>
+              <a:lnSpc>
+                <a:spcPct val="150000"/>
+              </a:lnSpc>
+              <a:buNone/>
+            </a:pPr>
+            <a:r>
+              <a:rPr kumimoji="0" lang="az-Latn-AZ" altLang="en-US" sz="1100" b="0" i="0" u="none" strike="noStrike" cap="none" normalizeH="0" baseline="0">
                 <a:ln>
                   <a:noFill/>
                 </a:ln>
@@ -3466,11 +4544,291 @@
                 <a:effectLst/>
                 <a:latin typeface="Arial" panose="020B0604020202020204" pitchFamily="34" charset="0"/>
               </a:rPr>
-              <a:t>.</a:t>
-            </a:r>
+              <a:t>3. </a:t>
+            </a:r>
+            <a:r>
+              <a:rPr kumimoji="0" lang="az-Latn-AZ" altLang="en-US" sz="1100" b="1" i="0" u="none" strike="noStrike" cap="none" normalizeH="0" baseline="0">
+                <a:ln>
+                  <a:noFill/>
+                </a:ln>
+                <a:solidFill>
+                  <a:srgbClr val="FF0000"/>
+                </a:solidFill>
+                <a:effectLst/>
+                <a:latin typeface="Arial" panose="020B0604020202020204" pitchFamily="34" charset="0"/>
+              </a:rPr>
+              <a:t>Storage::delete('images/image_1.jpg’);</a:t>
+            </a:r>
+          </a:p>
+          <a:p>
+            <a:pPr>
+              <a:lnSpc>
+                <a:spcPct val="150000"/>
+              </a:lnSpc>
+              <a:buNone/>
+            </a:pPr>
+            <a:endParaRPr kumimoji="0" lang="az-Latn-AZ" altLang="en-US" sz="1100" b="1" i="0" u="none" strike="noStrike" cap="none" normalizeH="0" baseline="0">
+              <a:ln>
+                <a:noFill/>
+              </a:ln>
+              <a:solidFill>
+                <a:srgbClr val="FF0000"/>
+              </a:solidFill>
+              <a:effectLst/>
+              <a:latin typeface="Arial" panose="020B0604020202020204" pitchFamily="34" charset="0"/>
+            </a:endParaRPr>
+          </a:p>
+          <a:p>
+            <a:pPr>
+              <a:lnSpc>
+                <a:spcPct val="150000"/>
+              </a:lnSpc>
+              <a:buNone/>
+            </a:pPr>
+            <a:r>
+              <a:rPr lang="az-Latn-AZ" altLang="en-US" sz="1100">
+                <a:latin typeface="Arial" panose="020B0604020202020204" pitchFamily="34" charset="0"/>
+              </a:rPr>
+              <a:t>Haradan silir?</a:t>
+            </a:r>
+          </a:p>
+          <a:p>
+            <a:pPr>
+              <a:lnSpc>
+                <a:spcPct val="150000"/>
+              </a:lnSpc>
+              <a:buNone/>
+            </a:pPr>
+            <a:r>
+              <a:rPr lang="az-Latn-AZ" altLang="en-US" sz="1100">
+                <a:latin typeface="Arial" panose="020B0604020202020204" pitchFamily="34" charset="0"/>
+              </a:rPr>
+              <a:t>Bu, Laravel konfiqurasiyasındakı default disk-dən silir.</a:t>
+            </a:r>
+          </a:p>
+          <a:p>
+            <a:pPr>
+              <a:lnSpc>
+                <a:spcPct val="150000"/>
+              </a:lnSpc>
+              <a:buNone/>
+            </a:pPr>
+            <a:endParaRPr lang="az-Latn-AZ" altLang="en-US" sz="1100">
+              <a:latin typeface="Arial" panose="020B0604020202020204" pitchFamily="34" charset="0"/>
+            </a:endParaRPr>
+          </a:p>
+          <a:p>
+            <a:pPr>
+              <a:lnSpc>
+                <a:spcPct val="150000"/>
+              </a:lnSpc>
+              <a:buNone/>
+            </a:pPr>
+            <a:r>
+              <a:rPr lang="az-Latn-AZ" altLang="en-US" sz="1100">
+                <a:latin typeface="Arial" panose="020B0604020202020204" pitchFamily="34" charset="0"/>
+              </a:rPr>
+              <a:t>Əgər </a:t>
+            </a:r>
+            <a:r>
+              <a:rPr lang="az-Latn-AZ" altLang="en-US" sz="1100" b="1">
+                <a:latin typeface="Arial" panose="020B0604020202020204" pitchFamily="34" charset="0"/>
+              </a:rPr>
+              <a:t>.env </a:t>
+            </a:r>
+            <a:r>
+              <a:rPr lang="az-Latn-AZ" altLang="en-US" sz="1100">
+                <a:latin typeface="Arial" panose="020B0604020202020204" pitchFamily="34" charset="0"/>
+              </a:rPr>
+              <a:t>faylında belə yazılıbsa: onda bu əmr, 1-ci əmr kimi işləyəcək.</a:t>
+            </a:r>
+          </a:p>
+          <a:p>
+            <a:pPr>
+              <a:lnSpc>
+                <a:spcPct val="150000"/>
+              </a:lnSpc>
+              <a:buNone/>
+            </a:pPr>
+            <a:endParaRPr lang="az-Latn-AZ" altLang="en-US" sz="1100">
+              <a:latin typeface="Arial" panose="020B0604020202020204" pitchFamily="34" charset="0"/>
+            </a:endParaRPr>
+          </a:p>
+          <a:p>
+            <a:pPr>
+              <a:lnSpc>
+                <a:spcPct val="150000"/>
+              </a:lnSpc>
+              <a:buNone/>
+            </a:pPr>
+            <a:endParaRPr lang="az-Latn-AZ" altLang="en-US" sz="1100">
+              <a:latin typeface="Arial" panose="020B0604020202020204" pitchFamily="34" charset="0"/>
+            </a:endParaRPr>
+          </a:p>
+          <a:p>
+            <a:pPr>
+              <a:lnSpc>
+                <a:spcPct val="150000"/>
+              </a:lnSpc>
+              <a:buNone/>
+            </a:pPr>
+            <a:endParaRPr lang="az-Latn-AZ" altLang="en-US" sz="1100">
+              <a:latin typeface="Arial" panose="020B0604020202020204" pitchFamily="34" charset="0"/>
+            </a:endParaRPr>
+          </a:p>
+          <a:p>
+            <a:pPr>
+              <a:lnSpc>
+                <a:spcPct val="150000"/>
+              </a:lnSpc>
+              <a:buNone/>
+            </a:pPr>
+            <a:endParaRPr lang="az-Latn-AZ" altLang="en-US" sz="1100">
+              <a:latin typeface="Arial" panose="020B0604020202020204" pitchFamily="34" charset="0"/>
+            </a:endParaRPr>
+          </a:p>
+          <a:p>
+            <a:pPr>
+              <a:lnSpc>
+                <a:spcPct val="150000"/>
+              </a:lnSpc>
+              <a:buNone/>
+            </a:pPr>
+            <a:r>
+              <a:rPr kumimoji="0" lang="en-US" altLang="en-US" sz="1100" b="0" i="0" u="none" strike="noStrike" cap="none" normalizeH="0" baseline="0">
+                <a:ln>
+                  <a:noFill/>
+                </a:ln>
+                <a:solidFill>
+                  <a:schemeClr val="tx1"/>
+                </a:solidFill>
+                <a:effectLst/>
+                <a:latin typeface="Arial" panose="020B0604020202020204" pitchFamily="34" charset="0"/>
+              </a:rPr>
+              <a:t>Əgər belə yazılıbsa:</a:t>
+            </a:r>
+            <a:r>
+              <a:rPr kumimoji="0" lang="az-Latn-AZ" altLang="en-US" sz="1100" b="0" i="0" u="none" strike="noStrike" cap="none" normalizeH="0" baseline="0">
+                <a:ln>
+                  <a:noFill/>
+                </a:ln>
+                <a:solidFill>
+                  <a:schemeClr val="tx1"/>
+                </a:solidFill>
+                <a:effectLst/>
+                <a:latin typeface="Arial" panose="020B0604020202020204" pitchFamily="34" charset="0"/>
+              </a:rPr>
+              <a:t> onda bu əmr, 2-ci əmr kimi işləyəcək.</a:t>
+            </a:r>
+            <a:endParaRPr kumimoji="0" lang="en-US" altLang="en-US" sz="1100" b="0" i="0" u="none" strike="noStrike" cap="none" normalizeH="0" baseline="0">
+              <a:ln>
+                <a:noFill/>
+              </a:ln>
+              <a:solidFill>
+                <a:schemeClr val="tx1"/>
+              </a:solidFill>
+              <a:effectLst/>
+              <a:latin typeface="Arial" panose="020B0604020202020204" pitchFamily="34" charset="0"/>
+            </a:endParaRPr>
           </a:p>
         </p:txBody>
       </p:sp>
+      <p:pic>
+        <p:nvPicPr>
+          <p:cNvPr id="5" name="Picture 4">
+            <a:extLst>
+              <a:ext uri="{FF2B5EF4-FFF2-40B4-BE49-F238E27FC236}">
+                <a16:creationId xmlns:a16="http://schemas.microsoft.com/office/drawing/2014/main" id="{B1735E22-2A06-8DDA-69DF-4C5B276CA650}"/>
+              </a:ext>
+            </a:extLst>
+          </p:cNvPr>
+          <p:cNvPicPr>
+            <a:picLocks noChangeAspect="1"/>
+          </p:cNvPicPr>
+          <p:nvPr/>
+        </p:nvPicPr>
+        <p:blipFill>
+          <a:blip r:embed="rId2"/>
+          <a:stretch>
+            <a:fillRect/>
+          </a:stretch>
+        </p:blipFill>
+        <p:spPr>
+          <a:xfrm>
+            <a:off x="0" y="4457753"/>
+            <a:ext cx="2105319" cy="552527"/>
+          </a:xfrm>
+          <a:prstGeom prst="rect">
+            <a:avLst/>
+          </a:prstGeom>
+        </p:spPr>
+      </p:pic>
+      <p:pic>
+        <p:nvPicPr>
+          <p:cNvPr id="7" name="Picture 6">
+            <a:extLst>
+              <a:ext uri="{FF2B5EF4-FFF2-40B4-BE49-F238E27FC236}">
+                <a16:creationId xmlns:a16="http://schemas.microsoft.com/office/drawing/2014/main" id="{53A37334-66B1-9179-4B67-1D37FE58386C}"/>
+              </a:ext>
+            </a:extLst>
+          </p:cNvPr>
+          <p:cNvPicPr>
+            <a:picLocks noChangeAspect="1"/>
+          </p:cNvPicPr>
+          <p:nvPr/>
+        </p:nvPicPr>
+        <p:blipFill>
+          <a:blip r:embed="rId3"/>
+          <a:stretch>
+            <a:fillRect/>
+          </a:stretch>
+        </p:blipFill>
+        <p:spPr>
+          <a:xfrm>
+            <a:off x="4763" y="5714793"/>
+            <a:ext cx="2095792" cy="504895"/>
+          </a:xfrm>
+          <a:prstGeom prst="rect">
+            <a:avLst/>
+          </a:prstGeom>
+        </p:spPr>
+      </p:pic>
+      <p:pic>
+        <p:nvPicPr>
+          <p:cNvPr id="9" name="Picture 8">
+            <a:extLst>
+              <a:ext uri="{FF2B5EF4-FFF2-40B4-BE49-F238E27FC236}">
+                <a16:creationId xmlns:a16="http://schemas.microsoft.com/office/drawing/2014/main" id="{BE0EAFEE-E0F7-CF5D-F89D-B4F1420B1829}"/>
+              </a:ext>
+            </a:extLst>
+          </p:cNvPr>
+          <p:cNvPicPr>
+            <a:picLocks noChangeAspect="1"/>
+          </p:cNvPicPr>
+          <p:nvPr/>
+        </p:nvPicPr>
+        <p:blipFill>
+          <a:blip r:embed="rId4">
+            <a:extLst>
+              <a:ext uri="{28A0092B-C50C-407E-A947-70E740481C1C}">
+                <a14:useLocalDpi xmlns:a14="http://schemas.microsoft.com/office/drawing/2010/main" val="0"/>
+              </a:ext>
+            </a:extLst>
+          </a:blip>
+          <a:stretch>
+            <a:fillRect/>
+          </a:stretch>
+        </p:blipFill>
+        <p:spPr>
+          <a:xfrm>
+            <a:off x="6372060" y="0"/>
+            <a:ext cx="5819940" cy="6858000"/>
+          </a:xfrm>
+          <a:prstGeom prst="rect">
+            <a:avLst/>
+          </a:prstGeom>
+        </p:spPr>
+      </p:pic>
     </p:spTree>
     <p:extLst>
       <p:ext uri="{BB962C8B-B14F-4D97-AF65-F5344CB8AC3E}">
@@ -3485,6 +4843,2085 @@
 </file>
 
 <file path=ppt/slides/slide3.xml><?xml version="1.0" encoding="utf-8"?>
+<p:sld xmlns:a="http://schemas.openxmlformats.org/drawingml/2006/main" xmlns:r="http://schemas.openxmlformats.org/officeDocument/2006/relationships" xmlns:p="http://schemas.openxmlformats.org/presentationml/2006/main">
+  <p:cSld>
+    <p:spTree>
+      <p:nvGrpSpPr>
+        <p:cNvPr id="1" name="">
+          <a:extLst>
+            <a:ext uri="{FF2B5EF4-FFF2-40B4-BE49-F238E27FC236}">
+              <a16:creationId xmlns:a16="http://schemas.microsoft.com/office/drawing/2014/main" id="{94018BE1-DB36-0A9E-9540-1173B684FBE6}"/>
+            </a:ext>
+          </a:extLst>
+        </p:cNvPr>
+        <p:cNvGrpSpPr/>
+        <p:nvPr/>
+      </p:nvGrpSpPr>
+      <p:grpSpPr>
+        <a:xfrm>
+          <a:off x="0" y="0"/>
+          <a:ext cx="0" cy="0"/>
+          <a:chOff x="0" y="0"/>
+          <a:chExt cx="0" cy="0"/>
+        </a:xfrm>
+      </p:grpSpPr>
+      <p:sp>
+        <p:nvSpPr>
+          <p:cNvPr id="3" name="TextBox 2">
+            <a:extLst>
+              <a:ext uri="{FF2B5EF4-FFF2-40B4-BE49-F238E27FC236}">
+                <a16:creationId xmlns:a16="http://schemas.microsoft.com/office/drawing/2014/main" id="{7C902DE4-3DEB-DCA4-E785-B944F1B378E4}"/>
+              </a:ext>
+            </a:extLst>
+          </p:cNvPr>
+          <p:cNvSpPr txBox="1"/>
+          <p:nvPr/>
+        </p:nvSpPr>
+        <p:spPr>
+          <a:xfrm>
+            <a:off x="217714" y="255046"/>
+            <a:ext cx="11756571" cy="380682"/>
+          </a:xfrm>
+          <a:prstGeom prst="rect">
+            <a:avLst/>
+          </a:prstGeom>
+          <a:noFill/>
+        </p:spPr>
+        <p:txBody>
+          <a:bodyPr wrap="square">
+            <a:spAutoFit/>
+          </a:bodyPr>
+          <a:lstStyle/>
+          <a:p>
+            <a:pPr>
+              <a:lnSpc>
+                <a:spcPct val="150000"/>
+              </a:lnSpc>
+              <a:buNone/>
+            </a:pPr>
+            <a:r>
+              <a:rPr lang="en-US" sz="1400"/>
+              <a:t>Sadə Cədvəl</a:t>
+            </a:r>
+            <a:endParaRPr kumimoji="0" lang="en-US" altLang="en-US" sz="1300" b="0" i="0" u="none" strike="noStrike" cap="none" normalizeH="0" baseline="0">
+              <a:ln>
+                <a:noFill/>
+              </a:ln>
+              <a:solidFill>
+                <a:schemeClr val="tx1"/>
+              </a:solidFill>
+              <a:effectLst/>
+              <a:latin typeface="Arial" panose="020B0604020202020204" pitchFamily="34" charset="0"/>
+            </a:endParaRPr>
+          </a:p>
+        </p:txBody>
+      </p:sp>
+      <p:graphicFrame>
+        <p:nvGraphicFramePr>
+          <p:cNvPr id="2" name="Table 1">
+            <a:extLst>
+              <a:ext uri="{FF2B5EF4-FFF2-40B4-BE49-F238E27FC236}">
+                <a16:creationId xmlns:a16="http://schemas.microsoft.com/office/drawing/2014/main" id="{CED331DE-70C1-561F-A0C6-8455B6C9A6BC}"/>
+              </a:ext>
+            </a:extLst>
+          </p:cNvPr>
+          <p:cNvGraphicFramePr>
+            <a:graphicFrameLocks noGrp="1"/>
+          </p:cNvGraphicFramePr>
+          <p:nvPr>
+            <p:extLst>
+              <p:ext uri="{D42A27DB-BD31-4B8C-83A1-F6EECF244321}">
+                <p14:modId xmlns:p14="http://schemas.microsoft.com/office/powerpoint/2010/main" val="2673032278"/>
+              </p:ext>
+            </p:extLst>
+          </p:nvPr>
+        </p:nvGraphicFramePr>
+        <p:xfrm>
+          <a:off x="217714" y="1073329"/>
+          <a:ext cx="10515600" cy="1463040"/>
+        </p:xfrm>
+        <a:graphic>
+          <a:graphicData uri="http://schemas.openxmlformats.org/drawingml/2006/table">
+            <a:tbl>
+              <a:tblPr/>
+              <a:tblGrid>
+                <a:gridCol w="2628900">
+                  <a:extLst>
+                    <a:ext uri="{9D8B030D-6E8A-4147-A177-3AD203B41FA5}">
+                      <a16:colId xmlns:a16="http://schemas.microsoft.com/office/drawing/2014/main" val="413047136"/>
+                    </a:ext>
+                  </a:extLst>
+                </a:gridCol>
+                <a:gridCol w="2628900">
+                  <a:extLst>
+                    <a:ext uri="{9D8B030D-6E8A-4147-A177-3AD203B41FA5}">
+                      <a16:colId xmlns:a16="http://schemas.microsoft.com/office/drawing/2014/main" val="3508847222"/>
+                    </a:ext>
+                  </a:extLst>
+                </a:gridCol>
+                <a:gridCol w="2628900">
+                  <a:extLst>
+                    <a:ext uri="{9D8B030D-6E8A-4147-A177-3AD203B41FA5}">
+                      <a16:colId xmlns:a16="http://schemas.microsoft.com/office/drawing/2014/main" val="1034166081"/>
+                    </a:ext>
+                  </a:extLst>
+                </a:gridCol>
+                <a:gridCol w="2628900">
+                  <a:extLst>
+                    <a:ext uri="{9D8B030D-6E8A-4147-A177-3AD203B41FA5}">
+                      <a16:colId xmlns:a16="http://schemas.microsoft.com/office/drawing/2014/main" val="1164304806"/>
+                    </a:ext>
+                  </a:extLst>
+                </a:gridCol>
+              </a:tblGrid>
+              <a:tr h="0">
+                <a:tc>
+                  <a:txBody>
+                    <a:bodyPr/>
+                    <a:lstStyle/>
+                    <a:p>
+                      <a:r>
+                        <a:rPr lang="en-US" b="1"/>
+                        <a:t>Əmr</a:t>
+                      </a:r>
+                    </a:p>
+                  </a:txBody>
+                  <a:tcPr anchor="ctr">
+                    <a:lnL w="12700" cap="flat" cmpd="sng" algn="ctr">
+                      <a:solidFill>
+                        <a:schemeClr val="tx1"/>
+                      </a:solidFill>
+                      <a:prstDash val="solid"/>
+                      <a:round/>
+                      <a:headEnd type="none" w="med" len="med"/>
+                      <a:tailEnd type="none" w="med" len="med"/>
+                    </a:lnL>
+                    <a:lnR w="12700" cap="flat" cmpd="sng" algn="ctr">
+                      <a:solidFill>
+                        <a:schemeClr val="tx1"/>
+                      </a:solidFill>
+                      <a:prstDash val="solid"/>
+                      <a:round/>
+                      <a:headEnd type="none" w="med" len="med"/>
+                      <a:tailEnd type="none" w="med" len="med"/>
+                    </a:lnR>
+                    <a:lnT w="12700" cap="flat" cmpd="sng" algn="ctr">
+                      <a:solidFill>
+                        <a:schemeClr val="tx1"/>
+                      </a:solidFill>
+                      <a:prstDash val="solid"/>
+                      <a:round/>
+                      <a:headEnd type="none" w="med" len="med"/>
+                      <a:tailEnd type="none" w="med" len="med"/>
+                    </a:lnT>
+                    <a:lnB w="12700" cap="flat" cmpd="sng" algn="ctr">
+                      <a:solidFill>
+                        <a:schemeClr val="tx1"/>
+                      </a:solidFill>
+                      <a:prstDash val="solid"/>
+                      <a:round/>
+                      <a:headEnd type="none" w="med" len="med"/>
+                      <a:tailEnd type="none" w="med" len="med"/>
+                    </a:lnB>
+                    <a:lnTlToBr w="12700" cmpd="sng">
+                      <a:noFill/>
+                      <a:prstDash val="solid"/>
+                    </a:lnTlToBr>
+                    <a:lnBlToTr w="12700" cmpd="sng">
+                      <a:noFill/>
+                      <a:prstDash val="solid"/>
+                    </a:lnBlToTr>
+                    <a:solidFill>
+                      <a:schemeClr val="accent2"/>
+                    </a:solidFill>
+                  </a:tcPr>
+                </a:tc>
+                <a:tc>
+                  <a:txBody>
+                    <a:bodyPr/>
+                    <a:lstStyle/>
+                    <a:p>
+                      <a:r>
+                        <a:rPr lang="en-US" b="1"/>
+                        <a:t>Hansı disk?</a:t>
+                      </a:r>
+                    </a:p>
+                  </a:txBody>
+                  <a:tcPr anchor="ctr">
+                    <a:lnL w="12700" cap="flat" cmpd="sng" algn="ctr">
+                      <a:solidFill>
+                        <a:schemeClr val="tx1"/>
+                      </a:solidFill>
+                      <a:prstDash val="solid"/>
+                      <a:round/>
+                      <a:headEnd type="none" w="med" len="med"/>
+                      <a:tailEnd type="none" w="med" len="med"/>
+                    </a:lnL>
+                    <a:lnR w="12700" cap="flat" cmpd="sng" algn="ctr">
+                      <a:solidFill>
+                        <a:schemeClr val="tx1"/>
+                      </a:solidFill>
+                      <a:prstDash val="solid"/>
+                      <a:round/>
+                      <a:headEnd type="none" w="med" len="med"/>
+                      <a:tailEnd type="none" w="med" len="med"/>
+                    </a:lnR>
+                    <a:lnT w="12700" cap="flat" cmpd="sng" algn="ctr">
+                      <a:solidFill>
+                        <a:schemeClr val="tx1"/>
+                      </a:solidFill>
+                      <a:prstDash val="solid"/>
+                      <a:round/>
+                      <a:headEnd type="none" w="med" len="med"/>
+                      <a:tailEnd type="none" w="med" len="med"/>
+                    </a:lnT>
+                    <a:lnB w="12700" cap="flat" cmpd="sng" algn="ctr">
+                      <a:solidFill>
+                        <a:schemeClr val="tx1"/>
+                      </a:solidFill>
+                      <a:prstDash val="solid"/>
+                      <a:round/>
+                      <a:headEnd type="none" w="med" len="med"/>
+                      <a:tailEnd type="none" w="med" len="med"/>
+                    </a:lnB>
+                    <a:lnTlToBr w="12700" cmpd="sng">
+                      <a:noFill/>
+                      <a:prstDash val="solid"/>
+                    </a:lnTlToBr>
+                    <a:lnBlToTr w="12700" cmpd="sng">
+                      <a:noFill/>
+                      <a:prstDash val="solid"/>
+                    </a:lnBlToTr>
+                    <a:solidFill>
+                      <a:schemeClr val="accent2"/>
+                    </a:solidFill>
+                  </a:tcPr>
+                </a:tc>
+                <a:tc>
+                  <a:txBody>
+                    <a:bodyPr/>
+                    <a:lstStyle/>
+                    <a:p>
+                      <a:r>
+                        <a:rPr lang="en-US" b="1"/>
+                        <a:t>Fayl haradadır?</a:t>
+                      </a:r>
+                    </a:p>
+                  </a:txBody>
+                  <a:tcPr anchor="ctr">
+                    <a:lnL w="12700" cap="flat" cmpd="sng" algn="ctr">
+                      <a:solidFill>
+                        <a:schemeClr val="tx1"/>
+                      </a:solidFill>
+                      <a:prstDash val="solid"/>
+                      <a:round/>
+                      <a:headEnd type="none" w="med" len="med"/>
+                      <a:tailEnd type="none" w="med" len="med"/>
+                    </a:lnL>
+                    <a:lnR w="12700" cap="flat" cmpd="sng" algn="ctr">
+                      <a:solidFill>
+                        <a:schemeClr val="tx1"/>
+                      </a:solidFill>
+                      <a:prstDash val="solid"/>
+                      <a:round/>
+                      <a:headEnd type="none" w="med" len="med"/>
+                      <a:tailEnd type="none" w="med" len="med"/>
+                    </a:lnR>
+                    <a:lnT w="12700" cap="flat" cmpd="sng" algn="ctr">
+                      <a:solidFill>
+                        <a:schemeClr val="tx1"/>
+                      </a:solidFill>
+                      <a:prstDash val="solid"/>
+                      <a:round/>
+                      <a:headEnd type="none" w="med" len="med"/>
+                      <a:tailEnd type="none" w="med" len="med"/>
+                    </a:lnT>
+                    <a:lnB w="12700" cap="flat" cmpd="sng" algn="ctr">
+                      <a:solidFill>
+                        <a:schemeClr val="tx1"/>
+                      </a:solidFill>
+                      <a:prstDash val="solid"/>
+                      <a:round/>
+                      <a:headEnd type="none" w="med" len="med"/>
+                      <a:tailEnd type="none" w="med" len="med"/>
+                    </a:lnB>
+                    <a:lnTlToBr w="12700" cmpd="sng">
+                      <a:noFill/>
+                      <a:prstDash val="solid"/>
+                    </a:lnTlToBr>
+                    <a:lnBlToTr w="12700" cmpd="sng">
+                      <a:noFill/>
+                      <a:prstDash val="solid"/>
+                    </a:lnBlToTr>
+                    <a:solidFill>
+                      <a:schemeClr val="accent2"/>
+                    </a:solidFill>
+                  </a:tcPr>
+                </a:tc>
+                <a:tc>
+                  <a:txBody>
+                    <a:bodyPr/>
+                    <a:lstStyle/>
+                    <a:p>
+                      <a:r>
+                        <a:rPr lang="en-US" b="1"/>
+                        <a:t>Vebdən görünürmü?</a:t>
+                      </a:r>
+                    </a:p>
+                  </a:txBody>
+                  <a:tcPr anchor="ctr">
+                    <a:lnL w="12700" cap="flat" cmpd="sng" algn="ctr">
+                      <a:solidFill>
+                        <a:schemeClr val="tx1"/>
+                      </a:solidFill>
+                      <a:prstDash val="solid"/>
+                      <a:round/>
+                      <a:headEnd type="none" w="med" len="med"/>
+                      <a:tailEnd type="none" w="med" len="med"/>
+                    </a:lnL>
+                    <a:lnR w="12700" cap="flat" cmpd="sng" algn="ctr">
+                      <a:solidFill>
+                        <a:schemeClr val="tx1"/>
+                      </a:solidFill>
+                      <a:prstDash val="solid"/>
+                      <a:round/>
+                      <a:headEnd type="none" w="med" len="med"/>
+                      <a:tailEnd type="none" w="med" len="med"/>
+                    </a:lnR>
+                    <a:lnT w="12700" cap="flat" cmpd="sng" algn="ctr">
+                      <a:solidFill>
+                        <a:schemeClr val="tx1"/>
+                      </a:solidFill>
+                      <a:prstDash val="solid"/>
+                      <a:round/>
+                      <a:headEnd type="none" w="med" len="med"/>
+                      <a:tailEnd type="none" w="med" len="med"/>
+                    </a:lnT>
+                    <a:lnB w="12700" cap="flat" cmpd="sng" algn="ctr">
+                      <a:solidFill>
+                        <a:schemeClr val="tx1"/>
+                      </a:solidFill>
+                      <a:prstDash val="solid"/>
+                      <a:round/>
+                      <a:headEnd type="none" w="med" len="med"/>
+                      <a:tailEnd type="none" w="med" len="med"/>
+                    </a:lnB>
+                    <a:lnTlToBr w="12700" cmpd="sng">
+                      <a:noFill/>
+                      <a:prstDash val="solid"/>
+                    </a:lnTlToBr>
+                    <a:lnBlToTr w="12700" cmpd="sng">
+                      <a:noFill/>
+                      <a:prstDash val="solid"/>
+                    </a:lnBlToTr>
+                    <a:solidFill>
+                      <a:schemeClr val="accent2"/>
+                    </a:solidFill>
+                  </a:tcPr>
+                </a:tc>
+                <a:extLst>
+                  <a:ext uri="{0D108BD9-81ED-4DB2-BD59-A6C34878D82A}">
+                    <a16:rowId xmlns:a16="http://schemas.microsoft.com/office/drawing/2014/main" val="360387910"/>
+                  </a:ext>
+                </a:extLst>
+              </a:tr>
+              <a:tr h="0">
+                <a:tc>
+                  <a:txBody>
+                    <a:bodyPr/>
+                    <a:lstStyle/>
+                    <a:p>
+                      <a:r>
+                        <a:rPr lang="en-US"/>
+                        <a:t>1</a:t>
+                      </a:r>
+                    </a:p>
+                  </a:txBody>
+                  <a:tcPr anchor="ctr">
+                    <a:lnL w="12700" cap="flat" cmpd="sng" algn="ctr">
+                      <a:solidFill>
+                        <a:schemeClr val="tx1"/>
+                      </a:solidFill>
+                      <a:prstDash val="solid"/>
+                      <a:round/>
+                      <a:headEnd type="none" w="med" len="med"/>
+                      <a:tailEnd type="none" w="med" len="med"/>
+                    </a:lnL>
+                    <a:lnR w="12700" cap="flat" cmpd="sng" algn="ctr">
+                      <a:solidFill>
+                        <a:schemeClr val="tx1"/>
+                      </a:solidFill>
+                      <a:prstDash val="solid"/>
+                      <a:round/>
+                      <a:headEnd type="none" w="med" len="med"/>
+                      <a:tailEnd type="none" w="med" len="med"/>
+                    </a:lnR>
+                    <a:lnT w="12700" cap="flat" cmpd="sng" algn="ctr">
+                      <a:solidFill>
+                        <a:schemeClr val="tx1"/>
+                      </a:solidFill>
+                      <a:prstDash val="solid"/>
+                      <a:round/>
+                      <a:headEnd type="none" w="med" len="med"/>
+                      <a:tailEnd type="none" w="med" len="med"/>
+                    </a:lnT>
+                    <a:lnB w="12700" cap="flat" cmpd="sng" algn="ctr">
+                      <a:solidFill>
+                        <a:schemeClr val="tx1"/>
+                      </a:solidFill>
+                      <a:prstDash val="solid"/>
+                      <a:round/>
+                      <a:headEnd type="none" w="med" len="med"/>
+                      <a:tailEnd type="none" w="med" len="med"/>
+                    </a:lnB>
+                    <a:lnTlToBr w="12700" cmpd="sng">
+                      <a:noFill/>
+                      <a:prstDash val="solid"/>
+                    </a:lnTlToBr>
+                    <a:lnBlToTr w="12700" cmpd="sng">
+                      <a:noFill/>
+                      <a:prstDash val="solid"/>
+                    </a:lnBlToTr>
+                    <a:noFill/>
+                  </a:tcPr>
+                </a:tc>
+                <a:tc>
+                  <a:txBody>
+                    <a:bodyPr/>
+                    <a:lstStyle/>
+                    <a:p>
+                      <a:r>
+                        <a:rPr lang="en-US"/>
+                        <a:t>public</a:t>
+                      </a:r>
+                    </a:p>
+                  </a:txBody>
+                  <a:tcPr anchor="ctr">
+                    <a:lnL w="12700" cap="flat" cmpd="sng" algn="ctr">
+                      <a:solidFill>
+                        <a:schemeClr val="tx1"/>
+                      </a:solidFill>
+                      <a:prstDash val="solid"/>
+                      <a:round/>
+                      <a:headEnd type="none" w="med" len="med"/>
+                      <a:tailEnd type="none" w="med" len="med"/>
+                    </a:lnL>
+                    <a:lnR w="12700" cap="flat" cmpd="sng" algn="ctr">
+                      <a:solidFill>
+                        <a:schemeClr val="tx1"/>
+                      </a:solidFill>
+                      <a:prstDash val="solid"/>
+                      <a:round/>
+                      <a:headEnd type="none" w="med" len="med"/>
+                      <a:tailEnd type="none" w="med" len="med"/>
+                    </a:lnR>
+                    <a:lnT w="12700" cap="flat" cmpd="sng" algn="ctr">
+                      <a:solidFill>
+                        <a:schemeClr val="tx1"/>
+                      </a:solidFill>
+                      <a:prstDash val="solid"/>
+                      <a:round/>
+                      <a:headEnd type="none" w="med" len="med"/>
+                      <a:tailEnd type="none" w="med" len="med"/>
+                    </a:lnT>
+                    <a:lnB w="12700" cap="flat" cmpd="sng" algn="ctr">
+                      <a:solidFill>
+                        <a:schemeClr val="tx1"/>
+                      </a:solidFill>
+                      <a:prstDash val="solid"/>
+                      <a:round/>
+                      <a:headEnd type="none" w="med" len="med"/>
+                      <a:tailEnd type="none" w="med" len="med"/>
+                    </a:lnB>
+                    <a:lnTlToBr w="12700" cmpd="sng">
+                      <a:noFill/>
+                      <a:prstDash val="solid"/>
+                    </a:lnTlToBr>
+                    <a:lnBlToTr w="12700" cmpd="sng">
+                      <a:noFill/>
+                      <a:prstDash val="solid"/>
+                    </a:lnBlToTr>
+                    <a:noFill/>
+                  </a:tcPr>
+                </a:tc>
+                <a:tc>
+                  <a:txBody>
+                    <a:bodyPr/>
+                    <a:lstStyle/>
+                    <a:p>
+                      <a:r>
+                        <a:rPr lang="en-US"/>
+                        <a:t>storage/app/public/...</a:t>
+                      </a:r>
+                    </a:p>
+                  </a:txBody>
+                  <a:tcPr anchor="ctr">
+                    <a:lnL w="12700" cap="flat" cmpd="sng" algn="ctr">
+                      <a:solidFill>
+                        <a:schemeClr val="tx1"/>
+                      </a:solidFill>
+                      <a:prstDash val="solid"/>
+                      <a:round/>
+                      <a:headEnd type="none" w="med" len="med"/>
+                      <a:tailEnd type="none" w="med" len="med"/>
+                    </a:lnL>
+                    <a:lnR w="12700" cap="flat" cmpd="sng" algn="ctr">
+                      <a:solidFill>
+                        <a:schemeClr val="tx1"/>
+                      </a:solidFill>
+                      <a:prstDash val="solid"/>
+                      <a:round/>
+                      <a:headEnd type="none" w="med" len="med"/>
+                      <a:tailEnd type="none" w="med" len="med"/>
+                    </a:lnR>
+                    <a:lnT w="12700" cap="flat" cmpd="sng" algn="ctr">
+                      <a:solidFill>
+                        <a:schemeClr val="tx1"/>
+                      </a:solidFill>
+                      <a:prstDash val="solid"/>
+                      <a:round/>
+                      <a:headEnd type="none" w="med" len="med"/>
+                      <a:tailEnd type="none" w="med" len="med"/>
+                    </a:lnT>
+                    <a:lnB w="12700" cap="flat" cmpd="sng" algn="ctr">
+                      <a:solidFill>
+                        <a:schemeClr val="tx1"/>
+                      </a:solidFill>
+                      <a:prstDash val="solid"/>
+                      <a:round/>
+                      <a:headEnd type="none" w="med" len="med"/>
+                      <a:tailEnd type="none" w="med" len="med"/>
+                    </a:lnB>
+                    <a:lnTlToBr w="12700" cmpd="sng">
+                      <a:noFill/>
+                      <a:prstDash val="solid"/>
+                    </a:lnTlToBr>
+                    <a:lnBlToTr w="12700" cmpd="sng">
+                      <a:noFill/>
+                      <a:prstDash val="solid"/>
+                    </a:lnBlToTr>
+                    <a:noFill/>
+                  </a:tcPr>
+                </a:tc>
+                <a:tc>
+                  <a:txBody>
+                    <a:bodyPr/>
+                    <a:lstStyle/>
+                    <a:p>
+                      <a:r>
+                        <a:rPr lang="en-US"/>
+                        <a:t>Bəli (əgər link verilibsə)</a:t>
+                      </a:r>
+                    </a:p>
+                  </a:txBody>
+                  <a:tcPr anchor="ctr">
+                    <a:lnL w="12700" cap="flat" cmpd="sng" algn="ctr">
+                      <a:solidFill>
+                        <a:schemeClr val="tx1"/>
+                      </a:solidFill>
+                      <a:prstDash val="solid"/>
+                      <a:round/>
+                      <a:headEnd type="none" w="med" len="med"/>
+                      <a:tailEnd type="none" w="med" len="med"/>
+                    </a:lnL>
+                    <a:lnR w="12700" cap="flat" cmpd="sng" algn="ctr">
+                      <a:solidFill>
+                        <a:schemeClr val="tx1"/>
+                      </a:solidFill>
+                      <a:prstDash val="solid"/>
+                      <a:round/>
+                      <a:headEnd type="none" w="med" len="med"/>
+                      <a:tailEnd type="none" w="med" len="med"/>
+                    </a:lnR>
+                    <a:lnT w="12700" cap="flat" cmpd="sng" algn="ctr">
+                      <a:solidFill>
+                        <a:schemeClr val="tx1"/>
+                      </a:solidFill>
+                      <a:prstDash val="solid"/>
+                      <a:round/>
+                      <a:headEnd type="none" w="med" len="med"/>
+                      <a:tailEnd type="none" w="med" len="med"/>
+                    </a:lnT>
+                    <a:lnB w="12700" cap="flat" cmpd="sng" algn="ctr">
+                      <a:solidFill>
+                        <a:schemeClr val="tx1"/>
+                      </a:solidFill>
+                      <a:prstDash val="solid"/>
+                      <a:round/>
+                      <a:headEnd type="none" w="med" len="med"/>
+                      <a:tailEnd type="none" w="med" len="med"/>
+                    </a:lnB>
+                    <a:lnTlToBr w="12700" cmpd="sng">
+                      <a:noFill/>
+                      <a:prstDash val="solid"/>
+                    </a:lnTlToBr>
+                    <a:lnBlToTr w="12700" cmpd="sng">
+                      <a:noFill/>
+                      <a:prstDash val="solid"/>
+                    </a:lnBlToTr>
+                    <a:noFill/>
+                  </a:tcPr>
+                </a:tc>
+                <a:extLst>
+                  <a:ext uri="{0D108BD9-81ED-4DB2-BD59-A6C34878D82A}">
+                    <a16:rowId xmlns:a16="http://schemas.microsoft.com/office/drawing/2014/main" val="2930927560"/>
+                  </a:ext>
+                </a:extLst>
+              </a:tr>
+              <a:tr h="0">
+                <a:tc>
+                  <a:txBody>
+                    <a:bodyPr/>
+                    <a:lstStyle/>
+                    <a:p>
+                      <a:r>
+                        <a:rPr lang="en-US"/>
+                        <a:t>2</a:t>
+                      </a:r>
+                    </a:p>
+                  </a:txBody>
+                  <a:tcPr anchor="ctr">
+                    <a:lnL w="12700" cap="flat" cmpd="sng" algn="ctr">
+                      <a:solidFill>
+                        <a:schemeClr val="tx1"/>
+                      </a:solidFill>
+                      <a:prstDash val="solid"/>
+                      <a:round/>
+                      <a:headEnd type="none" w="med" len="med"/>
+                      <a:tailEnd type="none" w="med" len="med"/>
+                    </a:lnL>
+                    <a:lnR w="12700" cap="flat" cmpd="sng" algn="ctr">
+                      <a:solidFill>
+                        <a:schemeClr val="tx1"/>
+                      </a:solidFill>
+                      <a:prstDash val="solid"/>
+                      <a:round/>
+                      <a:headEnd type="none" w="med" len="med"/>
+                      <a:tailEnd type="none" w="med" len="med"/>
+                    </a:lnR>
+                    <a:lnT w="12700" cap="flat" cmpd="sng" algn="ctr">
+                      <a:solidFill>
+                        <a:schemeClr val="tx1"/>
+                      </a:solidFill>
+                      <a:prstDash val="solid"/>
+                      <a:round/>
+                      <a:headEnd type="none" w="med" len="med"/>
+                      <a:tailEnd type="none" w="med" len="med"/>
+                    </a:lnT>
+                    <a:lnB w="12700" cap="flat" cmpd="sng" algn="ctr">
+                      <a:solidFill>
+                        <a:schemeClr val="tx1"/>
+                      </a:solidFill>
+                      <a:prstDash val="solid"/>
+                      <a:round/>
+                      <a:headEnd type="none" w="med" len="med"/>
+                      <a:tailEnd type="none" w="med" len="med"/>
+                    </a:lnB>
+                    <a:lnTlToBr w="12700" cmpd="sng">
+                      <a:noFill/>
+                      <a:prstDash val="solid"/>
+                    </a:lnTlToBr>
+                    <a:lnBlToTr w="12700" cmpd="sng">
+                      <a:noFill/>
+                      <a:prstDash val="solid"/>
+                    </a:lnBlToTr>
+                    <a:noFill/>
+                  </a:tcPr>
+                </a:tc>
+                <a:tc>
+                  <a:txBody>
+                    <a:bodyPr/>
+                    <a:lstStyle/>
+                    <a:p>
+                      <a:r>
+                        <a:rPr lang="en-US"/>
+                        <a:t>local</a:t>
+                      </a:r>
+                    </a:p>
+                  </a:txBody>
+                  <a:tcPr anchor="ctr">
+                    <a:lnL w="12700" cap="flat" cmpd="sng" algn="ctr">
+                      <a:solidFill>
+                        <a:schemeClr val="tx1"/>
+                      </a:solidFill>
+                      <a:prstDash val="solid"/>
+                      <a:round/>
+                      <a:headEnd type="none" w="med" len="med"/>
+                      <a:tailEnd type="none" w="med" len="med"/>
+                    </a:lnL>
+                    <a:lnR w="12700" cap="flat" cmpd="sng" algn="ctr">
+                      <a:solidFill>
+                        <a:schemeClr val="tx1"/>
+                      </a:solidFill>
+                      <a:prstDash val="solid"/>
+                      <a:round/>
+                      <a:headEnd type="none" w="med" len="med"/>
+                      <a:tailEnd type="none" w="med" len="med"/>
+                    </a:lnR>
+                    <a:lnT w="12700" cap="flat" cmpd="sng" algn="ctr">
+                      <a:solidFill>
+                        <a:schemeClr val="tx1"/>
+                      </a:solidFill>
+                      <a:prstDash val="solid"/>
+                      <a:round/>
+                      <a:headEnd type="none" w="med" len="med"/>
+                      <a:tailEnd type="none" w="med" len="med"/>
+                    </a:lnT>
+                    <a:lnB w="12700" cap="flat" cmpd="sng" algn="ctr">
+                      <a:solidFill>
+                        <a:schemeClr val="tx1"/>
+                      </a:solidFill>
+                      <a:prstDash val="solid"/>
+                      <a:round/>
+                      <a:headEnd type="none" w="med" len="med"/>
+                      <a:tailEnd type="none" w="med" len="med"/>
+                    </a:lnB>
+                    <a:lnTlToBr w="12700" cmpd="sng">
+                      <a:noFill/>
+                      <a:prstDash val="solid"/>
+                    </a:lnTlToBr>
+                    <a:lnBlToTr w="12700" cmpd="sng">
+                      <a:noFill/>
+                      <a:prstDash val="solid"/>
+                    </a:lnBlToTr>
+                    <a:noFill/>
+                  </a:tcPr>
+                </a:tc>
+                <a:tc>
+                  <a:txBody>
+                    <a:bodyPr/>
+                    <a:lstStyle/>
+                    <a:p>
+                      <a:r>
+                        <a:rPr lang="en-US"/>
+                        <a:t>storage/app/...</a:t>
+                      </a:r>
+                    </a:p>
+                  </a:txBody>
+                  <a:tcPr anchor="ctr">
+                    <a:lnL w="12700" cap="flat" cmpd="sng" algn="ctr">
+                      <a:solidFill>
+                        <a:schemeClr val="tx1"/>
+                      </a:solidFill>
+                      <a:prstDash val="solid"/>
+                      <a:round/>
+                      <a:headEnd type="none" w="med" len="med"/>
+                      <a:tailEnd type="none" w="med" len="med"/>
+                    </a:lnL>
+                    <a:lnR w="12700" cap="flat" cmpd="sng" algn="ctr">
+                      <a:solidFill>
+                        <a:schemeClr val="tx1"/>
+                      </a:solidFill>
+                      <a:prstDash val="solid"/>
+                      <a:round/>
+                      <a:headEnd type="none" w="med" len="med"/>
+                      <a:tailEnd type="none" w="med" len="med"/>
+                    </a:lnR>
+                    <a:lnT w="12700" cap="flat" cmpd="sng" algn="ctr">
+                      <a:solidFill>
+                        <a:schemeClr val="tx1"/>
+                      </a:solidFill>
+                      <a:prstDash val="solid"/>
+                      <a:round/>
+                      <a:headEnd type="none" w="med" len="med"/>
+                      <a:tailEnd type="none" w="med" len="med"/>
+                    </a:lnT>
+                    <a:lnB w="12700" cap="flat" cmpd="sng" algn="ctr">
+                      <a:solidFill>
+                        <a:schemeClr val="tx1"/>
+                      </a:solidFill>
+                      <a:prstDash val="solid"/>
+                      <a:round/>
+                      <a:headEnd type="none" w="med" len="med"/>
+                      <a:tailEnd type="none" w="med" len="med"/>
+                    </a:lnB>
+                    <a:lnTlToBr w="12700" cmpd="sng">
+                      <a:noFill/>
+                      <a:prstDash val="solid"/>
+                    </a:lnTlToBr>
+                    <a:lnBlToTr w="12700" cmpd="sng">
+                      <a:noFill/>
+                      <a:prstDash val="solid"/>
+                    </a:lnBlToTr>
+                    <a:noFill/>
+                  </a:tcPr>
+                </a:tc>
+                <a:tc>
+                  <a:txBody>
+                    <a:bodyPr/>
+                    <a:lstStyle/>
+                    <a:p>
+                      <a:r>
+                        <a:rPr lang="en-US"/>
+                        <a:t>Xeyr</a:t>
+                      </a:r>
+                    </a:p>
+                  </a:txBody>
+                  <a:tcPr anchor="ctr">
+                    <a:lnL w="12700" cap="flat" cmpd="sng" algn="ctr">
+                      <a:solidFill>
+                        <a:schemeClr val="tx1"/>
+                      </a:solidFill>
+                      <a:prstDash val="solid"/>
+                      <a:round/>
+                      <a:headEnd type="none" w="med" len="med"/>
+                      <a:tailEnd type="none" w="med" len="med"/>
+                    </a:lnL>
+                    <a:lnR w="12700" cap="flat" cmpd="sng" algn="ctr">
+                      <a:solidFill>
+                        <a:schemeClr val="tx1"/>
+                      </a:solidFill>
+                      <a:prstDash val="solid"/>
+                      <a:round/>
+                      <a:headEnd type="none" w="med" len="med"/>
+                      <a:tailEnd type="none" w="med" len="med"/>
+                    </a:lnR>
+                    <a:lnT w="12700" cap="flat" cmpd="sng" algn="ctr">
+                      <a:solidFill>
+                        <a:schemeClr val="tx1"/>
+                      </a:solidFill>
+                      <a:prstDash val="solid"/>
+                      <a:round/>
+                      <a:headEnd type="none" w="med" len="med"/>
+                      <a:tailEnd type="none" w="med" len="med"/>
+                    </a:lnT>
+                    <a:lnB w="12700" cap="flat" cmpd="sng" algn="ctr">
+                      <a:solidFill>
+                        <a:schemeClr val="tx1"/>
+                      </a:solidFill>
+                      <a:prstDash val="solid"/>
+                      <a:round/>
+                      <a:headEnd type="none" w="med" len="med"/>
+                      <a:tailEnd type="none" w="med" len="med"/>
+                    </a:lnB>
+                    <a:lnTlToBr w="12700" cmpd="sng">
+                      <a:noFill/>
+                      <a:prstDash val="solid"/>
+                    </a:lnTlToBr>
+                    <a:lnBlToTr w="12700" cmpd="sng">
+                      <a:noFill/>
+                      <a:prstDash val="solid"/>
+                    </a:lnBlToTr>
+                    <a:noFill/>
+                  </a:tcPr>
+                </a:tc>
+                <a:extLst>
+                  <a:ext uri="{0D108BD9-81ED-4DB2-BD59-A6C34878D82A}">
+                    <a16:rowId xmlns:a16="http://schemas.microsoft.com/office/drawing/2014/main" val="3565347555"/>
+                  </a:ext>
+                </a:extLst>
+              </a:tr>
+              <a:tr h="0">
+                <a:tc>
+                  <a:txBody>
+                    <a:bodyPr/>
+                    <a:lstStyle/>
+                    <a:p>
+                      <a:r>
+                        <a:rPr lang="en-US"/>
+                        <a:t>3</a:t>
+                      </a:r>
+                    </a:p>
+                  </a:txBody>
+                  <a:tcPr anchor="ctr">
+                    <a:lnL w="12700" cap="flat" cmpd="sng" algn="ctr">
+                      <a:solidFill>
+                        <a:schemeClr val="tx1"/>
+                      </a:solidFill>
+                      <a:prstDash val="solid"/>
+                      <a:round/>
+                      <a:headEnd type="none" w="med" len="med"/>
+                      <a:tailEnd type="none" w="med" len="med"/>
+                    </a:lnL>
+                    <a:lnR w="12700" cap="flat" cmpd="sng" algn="ctr">
+                      <a:solidFill>
+                        <a:schemeClr val="tx1"/>
+                      </a:solidFill>
+                      <a:prstDash val="solid"/>
+                      <a:round/>
+                      <a:headEnd type="none" w="med" len="med"/>
+                      <a:tailEnd type="none" w="med" len="med"/>
+                    </a:lnR>
+                    <a:lnT w="12700" cap="flat" cmpd="sng" algn="ctr">
+                      <a:solidFill>
+                        <a:schemeClr val="tx1"/>
+                      </a:solidFill>
+                      <a:prstDash val="solid"/>
+                      <a:round/>
+                      <a:headEnd type="none" w="med" len="med"/>
+                      <a:tailEnd type="none" w="med" len="med"/>
+                    </a:lnT>
+                    <a:lnB w="12700" cap="flat" cmpd="sng" algn="ctr">
+                      <a:solidFill>
+                        <a:schemeClr val="tx1"/>
+                      </a:solidFill>
+                      <a:prstDash val="solid"/>
+                      <a:round/>
+                      <a:headEnd type="none" w="med" len="med"/>
+                      <a:tailEnd type="none" w="med" len="med"/>
+                    </a:lnB>
+                    <a:lnTlToBr w="12700" cmpd="sng">
+                      <a:noFill/>
+                      <a:prstDash val="solid"/>
+                    </a:lnTlToBr>
+                    <a:lnBlToTr w="12700" cmpd="sng">
+                      <a:noFill/>
+                      <a:prstDash val="solid"/>
+                    </a:lnBlToTr>
+                    <a:noFill/>
+                  </a:tcPr>
+                </a:tc>
+                <a:tc>
+                  <a:txBody>
+                    <a:bodyPr/>
+                    <a:lstStyle/>
+                    <a:p>
+                      <a:r>
+                        <a:rPr lang="en-US"/>
+                        <a:t>default</a:t>
+                      </a:r>
+                    </a:p>
+                  </a:txBody>
+                  <a:tcPr anchor="ctr">
+                    <a:lnL w="12700" cap="flat" cmpd="sng" algn="ctr">
+                      <a:solidFill>
+                        <a:schemeClr val="tx1"/>
+                      </a:solidFill>
+                      <a:prstDash val="solid"/>
+                      <a:round/>
+                      <a:headEnd type="none" w="med" len="med"/>
+                      <a:tailEnd type="none" w="med" len="med"/>
+                    </a:lnL>
+                    <a:lnR w="12700" cap="flat" cmpd="sng" algn="ctr">
+                      <a:solidFill>
+                        <a:schemeClr val="tx1"/>
+                      </a:solidFill>
+                      <a:prstDash val="solid"/>
+                      <a:round/>
+                      <a:headEnd type="none" w="med" len="med"/>
+                      <a:tailEnd type="none" w="med" len="med"/>
+                    </a:lnR>
+                    <a:lnT w="12700" cap="flat" cmpd="sng" algn="ctr">
+                      <a:solidFill>
+                        <a:schemeClr val="tx1"/>
+                      </a:solidFill>
+                      <a:prstDash val="solid"/>
+                      <a:round/>
+                      <a:headEnd type="none" w="med" len="med"/>
+                      <a:tailEnd type="none" w="med" len="med"/>
+                    </a:lnT>
+                    <a:lnB w="12700" cap="flat" cmpd="sng" algn="ctr">
+                      <a:solidFill>
+                        <a:schemeClr val="tx1"/>
+                      </a:solidFill>
+                      <a:prstDash val="solid"/>
+                      <a:round/>
+                      <a:headEnd type="none" w="med" len="med"/>
+                      <a:tailEnd type="none" w="med" len="med"/>
+                    </a:lnB>
+                    <a:lnTlToBr w="12700" cmpd="sng">
+                      <a:noFill/>
+                      <a:prstDash val="solid"/>
+                    </a:lnTlToBr>
+                    <a:lnBlToTr w="12700" cmpd="sng">
+                      <a:noFill/>
+                      <a:prstDash val="solid"/>
+                    </a:lnBlToTr>
+                    <a:noFill/>
+                  </a:tcPr>
+                </a:tc>
+                <a:tc>
+                  <a:txBody>
+                    <a:bodyPr/>
+                    <a:lstStyle/>
+                    <a:p>
+                      <a:r>
+                        <a:rPr lang="en-US"/>
+                        <a:t>Config-dən asılıdır</a:t>
+                      </a:r>
+                    </a:p>
+                  </a:txBody>
+                  <a:tcPr anchor="ctr">
+                    <a:lnL w="12700" cap="flat" cmpd="sng" algn="ctr">
+                      <a:solidFill>
+                        <a:schemeClr val="tx1"/>
+                      </a:solidFill>
+                      <a:prstDash val="solid"/>
+                      <a:round/>
+                      <a:headEnd type="none" w="med" len="med"/>
+                      <a:tailEnd type="none" w="med" len="med"/>
+                    </a:lnL>
+                    <a:lnR w="12700" cap="flat" cmpd="sng" algn="ctr">
+                      <a:solidFill>
+                        <a:schemeClr val="tx1"/>
+                      </a:solidFill>
+                      <a:prstDash val="solid"/>
+                      <a:round/>
+                      <a:headEnd type="none" w="med" len="med"/>
+                      <a:tailEnd type="none" w="med" len="med"/>
+                    </a:lnR>
+                    <a:lnT w="12700" cap="flat" cmpd="sng" algn="ctr">
+                      <a:solidFill>
+                        <a:schemeClr val="tx1"/>
+                      </a:solidFill>
+                      <a:prstDash val="solid"/>
+                      <a:round/>
+                      <a:headEnd type="none" w="med" len="med"/>
+                      <a:tailEnd type="none" w="med" len="med"/>
+                    </a:lnT>
+                    <a:lnB w="12700" cap="flat" cmpd="sng" algn="ctr">
+                      <a:solidFill>
+                        <a:schemeClr val="tx1"/>
+                      </a:solidFill>
+                      <a:prstDash val="solid"/>
+                      <a:round/>
+                      <a:headEnd type="none" w="med" len="med"/>
+                      <a:tailEnd type="none" w="med" len="med"/>
+                    </a:lnB>
+                    <a:lnTlToBr w="12700" cmpd="sng">
+                      <a:noFill/>
+                      <a:prstDash val="solid"/>
+                    </a:lnTlToBr>
+                    <a:lnBlToTr w="12700" cmpd="sng">
+                      <a:noFill/>
+                      <a:prstDash val="solid"/>
+                    </a:lnBlToTr>
+                    <a:noFill/>
+                  </a:tcPr>
+                </a:tc>
+                <a:tc>
+                  <a:txBody>
+                    <a:bodyPr/>
+                    <a:lstStyle/>
+                    <a:p>
+                      <a:r>
+                        <a:rPr lang="en-US"/>
+                        <a:t>Asılıdır</a:t>
+                      </a:r>
+                    </a:p>
+                  </a:txBody>
+                  <a:tcPr anchor="ctr">
+                    <a:lnL w="12700" cap="flat" cmpd="sng" algn="ctr">
+                      <a:solidFill>
+                        <a:schemeClr val="tx1"/>
+                      </a:solidFill>
+                      <a:prstDash val="solid"/>
+                      <a:round/>
+                      <a:headEnd type="none" w="med" len="med"/>
+                      <a:tailEnd type="none" w="med" len="med"/>
+                    </a:lnL>
+                    <a:lnR w="12700" cap="flat" cmpd="sng" algn="ctr">
+                      <a:solidFill>
+                        <a:schemeClr val="tx1"/>
+                      </a:solidFill>
+                      <a:prstDash val="solid"/>
+                      <a:round/>
+                      <a:headEnd type="none" w="med" len="med"/>
+                      <a:tailEnd type="none" w="med" len="med"/>
+                    </a:lnR>
+                    <a:lnT w="12700" cap="flat" cmpd="sng" algn="ctr">
+                      <a:solidFill>
+                        <a:schemeClr val="tx1"/>
+                      </a:solidFill>
+                      <a:prstDash val="solid"/>
+                      <a:round/>
+                      <a:headEnd type="none" w="med" len="med"/>
+                      <a:tailEnd type="none" w="med" len="med"/>
+                    </a:lnT>
+                    <a:lnB w="12700" cap="flat" cmpd="sng" algn="ctr">
+                      <a:solidFill>
+                        <a:schemeClr val="tx1"/>
+                      </a:solidFill>
+                      <a:prstDash val="solid"/>
+                      <a:round/>
+                      <a:headEnd type="none" w="med" len="med"/>
+                      <a:tailEnd type="none" w="med" len="med"/>
+                    </a:lnB>
+                    <a:lnTlToBr w="12700" cmpd="sng">
+                      <a:noFill/>
+                      <a:prstDash val="solid"/>
+                    </a:lnTlToBr>
+                    <a:lnBlToTr w="12700" cmpd="sng">
+                      <a:noFill/>
+                      <a:prstDash val="solid"/>
+                    </a:lnBlToTr>
+                    <a:noFill/>
+                  </a:tcPr>
+                </a:tc>
+                <a:extLst>
+                  <a:ext uri="{0D108BD9-81ED-4DB2-BD59-A6C34878D82A}">
+                    <a16:rowId xmlns:a16="http://schemas.microsoft.com/office/drawing/2014/main" val="377500512"/>
+                  </a:ext>
+                </a:extLst>
+              </a:tr>
+            </a:tbl>
+          </a:graphicData>
+        </a:graphic>
+      </p:graphicFrame>
+    </p:spTree>
+    <p:extLst>
+      <p:ext uri="{BB962C8B-B14F-4D97-AF65-F5344CB8AC3E}">
+        <p14:creationId xmlns:p14="http://schemas.microsoft.com/office/powerpoint/2010/main" val="3236842363"/>
+      </p:ext>
+    </p:extLst>
+  </p:cSld>
+  <p:clrMapOvr>
+    <a:masterClrMapping/>
+  </p:clrMapOvr>
+</p:sld>
+</file>
+
+<file path=ppt/slides/slide4.xml><?xml version="1.0" encoding="utf-8"?>
+<p:sld xmlns:a="http://schemas.openxmlformats.org/drawingml/2006/main" xmlns:r="http://schemas.openxmlformats.org/officeDocument/2006/relationships" xmlns:p="http://schemas.openxmlformats.org/presentationml/2006/main">
+  <p:cSld>
+    <p:spTree>
+      <p:nvGrpSpPr>
+        <p:cNvPr id="1" name="">
+          <a:extLst>
+            <a:ext uri="{FF2B5EF4-FFF2-40B4-BE49-F238E27FC236}">
+              <a16:creationId xmlns:a16="http://schemas.microsoft.com/office/drawing/2014/main" id="{F867DB65-5C00-7981-3DC2-6821D7C23CBA}"/>
+            </a:ext>
+          </a:extLst>
+        </p:cNvPr>
+        <p:cNvGrpSpPr/>
+        <p:nvPr/>
+      </p:nvGrpSpPr>
+      <p:grpSpPr>
+        <a:xfrm>
+          <a:off x="0" y="0"/>
+          <a:ext cx="0" cy="0"/>
+          <a:chOff x="0" y="0"/>
+          <a:chExt cx="0" cy="0"/>
+        </a:xfrm>
+      </p:grpSpPr>
+      <p:sp>
+        <p:nvSpPr>
+          <p:cNvPr id="3" name="TextBox 2">
+            <a:extLst>
+              <a:ext uri="{FF2B5EF4-FFF2-40B4-BE49-F238E27FC236}">
+                <a16:creationId xmlns:a16="http://schemas.microsoft.com/office/drawing/2014/main" id="{8C4BF384-B1A2-BDCC-40D3-6C344A62CE56}"/>
+              </a:ext>
+            </a:extLst>
+          </p:cNvPr>
+          <p:cNvSpPr txBox="1"/>
+          <p:nvPr/>
+        </p:nvSpPr>
+        <p:spPr>
+          <a:xfrm>
+            <a:off x="198663" y="196836"/>
+            <a:ext cx="11756571" cy="5647123"/>
+          </a:xfrm>
+          <a:prstGeom prst="rect">
+            <a:avLst/>
+          </a:prstGeom>
+          <a:noFill/>
+        </p:spPr>
+        <p:txBody>
+          <a:bodyPr wrap="square">
+            <a:spAutoFit/>
+          </a:bodyPr>
+          <a:lstStyle/>
+          <a:p>
+            <a:pPr>
+              <a:lnSpc>
+                <a:spcPct val="150000"/>
+              </a:lnSpc>
+              <a:buNone/>
+            </a:pPr>
+            <a:r>
+              <a:rPr lang="az-Latn-AZ" altLang="en-US" sz="1100">
+                <a:latin typeface="Arial" panose="020B0604020202020204" pitchFamily="34" charset="0"/>
+                <a:cs typeface="Arial" panose="020B0604020202020204" pitchFamily="34" charset="0"/>
+              </a:rPr>
+              <a:t>Silmək üçün </a:t>
+            </a:r>
+            <a:r>
+              <a:rPr lang="az-Latn-AZ" altLang="en-US" sz="1100" b="1">
+                <a:latin typeface="Arial" panose="020B0604020202020204" pitchFamily="34" charset="0"/>
+                <a:cs typeface="Arial" panose="020B0604020202020204" pitchFamily="34" charset="0"/>
+              </a:rPr>
+              <a:t>Storage</a:t>
+            </a:r>
+            <a:r>
+              <a:rPr lang="az-Latn-AZ" altLang="en-US" sz="1100">
+                <a:latin typeface="Arial" panose="020B0604020202020204" pitchFamily="34" charset="0"/>
+                <a:cs typeface="Arial" panose="020B0604020202020204" pitchFamily="34" charset="0"/>
+              </a:rPr>
+              <a:t> -dən fərqli bir addım olan </a:t>
+            </a:r>
+            <a:r>
+              <a:rPr lang="az-Latn-AZ" altLang="en-US" sz="1100" b="1">
+                <a:solidFill>
+                  <a:srgbClr val="FF0000"/>
+                </a:solidFill>
+                <a:latin typeface="Arial" panose="020B0604020202020204" pitchFamily="34" charset="0"/>
+                <a:cs typeface="Arial" panose="020B0604020202020204" pitchFamily="34" charset="0"/>
+              </a:rPr>
+              <a:t>File</a:t>
+            </a:r>
+            <a:r>
+              <a:rPr lang="az-Latn-AZ" altLang="en-US" sz="1100">
+                <a:latin typeface="Arial" panose="020B0604020202020204" pitchFamily="34" charset="0"/>
+                <a:cs typeface="Arial" panose="020B0604020202020204" pitchFamily="34" charset="0"/>
+              </a:rPr>
+              <a:t> classından istifadə edə bilərik. </a:t>
+            </a:r>
+          </a:p>
+          <a:p>
+            <a:pPr>
+              <a:lnSpc>
+                <a:spcPct val="150000"/>
+              </a:lnSpc>
+              <a:buNone/>
+            </a:pPr>
+            <a:endParaRPr kumimoji="0" lang="az-Latn-AZ" altLang="en-US" sz="1100" b="0" i="0" u="none" strike="noStrike" cap="none" normalizeH="0" baseline="0">
+              <a:ln>
+                <a:noFill/>
+              </a:ln>
+              <a:solidFill>
+                <a:schemeClr val="tx1"/>
+              </a:solidFill>
+              <a:effectLst/>
+              <a:latin typeface="Arial" panose="020B0604020202020204" pitchFamily="34" charset="0"/>
+              <a:cs typeface="Arial" panose="020B0604020202020204" pitchFamily="34" charset="0"/>
+            </a:endParaRPr>
+          </a:p>
+          <a:p>
+            <a:pPr>
+              <a:lnSpc>
+                <a:spcPct val="150000"/>
+              </a:lnSpc>
+            </a:pPr>
+            <a:r>
+              <a:rPr kumimoji="0" lang="az-Latn-AZ" altLang="en-US" sz="1100" b="1" i="0" u="none" strike="noStrike" cap="none" normalizeH="0" baseline="0">
+                <a:ln>
+                  <a:noFill/>
+                </a:ln>
+                <a:solidFill>
+                  <a:srgbClr val="FF0000"/>
+                </a:solidFill>
+                <a:effectLst/>
+                <a:latin typeface="Arial" panose="020B0604020202020204" pitchFamily="34" charset="0"/>
+                <a:cs typeface="Arial" panose="020B0604020202020204" pitchFamily="34" charset="0"/>
+              </a:rPr>
+              <a:t>1. </a:t>
+            </a:r>
+            <a:r>
+              <a:rPr kumimoji="0" lang="it-IT" altLang="en-US" sz="1100" b="1" i="0" u="none" strike="noStrike" cap="none" normalizeH="0" baseline="0">
+                <a:ln>
+                  <a:noFill/>
+                </a:ln>
+                <a:solidFill>
+                  <a:srgbClr val="FF0000"/>
+                </a:solidFill>
+                <a:effectLst/>
+                <a:latin typeface="Arial" panose="020B0604020202020204" pitchFamily="34" charset="0"/>
+                <a:cs typeface="Arial" panose="020B0604020202020204" pitchFamily="34" charset="0"/>
+              </a:rPr>
+              <a:t>File::delete(...) </a:t>
+            </a:r>
+            <a:r>
+              <a:rPr kumimoji="0" lang="it-IT" altLang="en-US" sz="1100" b="0" i="0" u="none" strike="noStrike" cap="none" normalizeH="0" baseline="0">
+                <a:ln>
+                  <a:noFill/>
+                </a:ln>
+                <a:solidFill>
+                  <a:schemeClr val="tx1"/>
+                </a:solidFill>
+                <a:effectLst/>
+                <a:latin typeface="Arial" panose="020B0604020202020204" pitchFamily="34" charset="0"/>
+                <a:cs typeface="Arial" panose="020B0604020202020204" pitchFamily="34" charset="0"/>
+              </a:rPr>
+              <a:t>nə edir?</a:t>
+            </a:r>
+            <a:endParaRPr lang="az-Latn-AZ" altLang="en-US" sz="1100">
+              <a:latin typeface="Arial" panose="020B0604020202020204" pitchFamily="34" charset="0"/>
+              <a:cs typeface="Arial" panose="020B0604020202020204" pitchFamily="34" charset="0"/>
+            </a:endParaRPr>
+          </a:p>
+          <a:p>
+            <a:pPr marL="342900" indent="-342900">
+              <a:lnSpc>
+                <a:spcPct val="150000"/>
+              </a:lnSpc>
+              <a:buAutoNum type="arabicPeriod"/>
+            </a:pPr>
+            <a:endParaRPr kumimoji="0" lang="az-Latn-AZ" altLang="en-US" sz="1100" b="0" i="0" u="none" strike="noStrike" cap="none" normalizeH="0" baseline="0">
+              <a:ln>
+                <a:noFill/>
+              </a:ln>
+              <a:solidFill>
+                <a:schemeClr val="tx1"/>
+              </a:solidFill>
+              <a:effectLst/>
+              <a:latin typeface="Arial" panose="020B0604020202020204" pitchFamily="34" charset="0"/>
+              <a:cs typeface="Arial" panose="020B0604020202020204" pitchFamily="34" charset="0"/>
+            </a:endParaRPr>
+          </a:p>
+          <a:p>
+            <a:pPr>
+              <a:lnSpc>
+                <a:spcPct val="150000"/>
+              </a:lnSpc>
+            </a:pPr>
+            <a:r>
+              <a:rPr lang="az-Latn-AZ" altLang="en-US" sz="1100">
+                <a:latin typeface="Arial" panose="020B0604020202020204" pitchFamily="34" charset="0"/>
+                <a:cs typeface="Arial" panose="020B0604020202020204" pitchFamily="34" charset="0"/>
+              </a:rPr>
+              <a:t>Laravel-də </a:t>
+            </a:r>
+            <a:r>
+              <a:rPr lang="az-Latn-AZ" altLang="en-US" sz="1100" b="1">
+                <a:latin typeface="Arial" panose="020B0604020202020204" pitchFamily="34" charset="0"/>
+                <a:cs typeface="Arial" panose="020B0604020202020204" pitchFamily="34" charset="0"/>
+              </a:rPr>
+              <a:t>File</a:t>
+            </a:r>
+            <a:r>
+              <a:rPr lang="az-Latn-AZ" altLang="en-US" sz="1100">
+                <a:latin typeface="Arial" panose="020B0604020202020204" pitchFamily="34" charset="0"/>
+                <a:cs typeface="Arial" panose="020B0604020202020204" pitchFamily="34" charset="0"/>
+              </a:rPr>
+              <a:t> klası, əslində Laravel-in </a:t>
+            </a:r>
+            <a:r>
+              <a:rPr lang="az-Latn-AZ" altLang="en-US" sz="1100" b="1">
+                <a:latin typeface="Arial" panose="020B0604020202020204" pitchFamily="34" charset="0"/>
+                <a:cs typeface="Arial" panose="020B0604020202020204" pitchFamily="34" charset="0"/>
+              </a:rPr>
+              <a:t>Illuminate\Support\Facades\File </a:t>
+            </a:r>
+            <a:r>
+              <a:rPr lang="az-Latn-AZ" altLang="en-US" sz="1100">
+                <a:latin typeface="Arial" panose="020B0604020202020204" pitchFamily="34" charset="0"/>
+                <a:cs typeface="Arial" panose="020B0604020202020204" pitchFamily="34" charset="0"/>
+              </a:rPr>
+              <a:t>paketidir və fayl sistemi ilə birbaşa işləməyə imkan verir. </a:t>
+            </a:r>
+          </a:p>
+          <a:p>
+            <a:pPr>
+              <a:lnSpc>
+                <a:spcPct val="150000"/>
+              </a:lnSpc>
+            </a:pPr>
+            <a:endParaRPr lang="az-Latn-AZ" altLang="en-US" sz="1100">
+              <a:latin typeface="Arial" panose="020B0604020202020204" pitchFamily="34" charset="0"/>
+              <a:cs typeface="Arial" panose="020B0604020202020204" pitchFamily="34" charset="0"/>
+            </a:endParaRPr>
+          </a:p>
+          <a:p>
+            <a:pPr>
+              <a:lnSpc>
+                <a:spcPct val="150000"/>
+              </a:lnSpc>
+            </a:pPr>
+            <a:r>
+              <a:rPr lang="az-Latn-AZ" altLang="en-US" sz="1100">
+                <a:latin typeface="Arial" panose="020B0604020202020204" pitchFamily="34" charset="0"/>
+                <a:cs typeface="Arial" panose="020B0604020202020204" pitchFamily="34" charset="0"/>
+              </a:rPr>
+              <a:t>Bu metod, göstərilən faylın fiziki olaraq serverdən silinməsini təmin edir. Əgər fayl mövcud deyilsə, heç bir </a:t>
+            </a:r>
+            <a:r>
+              <a:rPr lang="az-Latn-AZ" altLang="en-US" sz="1100" b="1">
+                <a:latin typeface="Arial" panose="020B0604020202020204" pitchFamily="34" charset="0"/>
+                <a:cs typeface="Arial" panose="020B0604020202020204" pitchFamily="34" charset="0"/>
+              </a:rPr>
+              <a:t>xəta atmır </a:t>
+            </a:r>
+            <a:r>
+              <a:rPr lang="az-Latn-AZ" altLang="en-US" sz="1100">
+                <a:latin typeface="Arial" panose="020B0604020202020204" pitchFamily="34" charset="0"/>
+                <a:cs typeface="Arial" panose="020B0604020202020204" pitchFamily="34" charset="0"/>
+              </a:rPr>
+              <a:t>– sadəcə olaraq heç nə etmir.</a:t>
+            </a:r>
+          </a:p>
+          <a:p>
+            <a:pPr marL="342900" indent="-342900">
+              <a:lnSpc>
+                <a:spcPct val="150000"/>
+              </a:lnSpc>
+              <a:buAutoNum type="arabicPeriod"/>
+            </a:pPr>
+            <a:endParaRPr kumimoji="0" lang="az-Latn-AZ" altLang="en-US" sz="1100" b="0" i="0" u="none" strike="noStrike" cap="none" normalizeH="0" baseline="0">
+              <a:ln>
+                <a:noFill/>
+              </a:ln>
+              <a:solidFill>
+                <a:schemeClr val="tx1"/>
+              </a:solidFill>
+              <a:effectLst/>
+              <a:latin typeface="Arial" panose="020B0604020202020204" pitchFamily="34" charset="0"/>
+              <a:cs typeface="Arial" panose="020B0604020202020204" pitchFamily="34" charset="0"/>
+            </a:endParaRPr>
+          </a:p>
+          <a:p>
+            <a:pPr>
+              <a:lnSpc>
+                <a:spcPct val="150000"/>
+              </a:lnSpc>
+            </a:pPr>
+            <a:endParaRPr kumimoji="0" lang="az-Latn-AZ" altLang="en-US" sz="1100" b="0" i="0" u="none" strike="noStrike" cap="none" normalizeH="0" baseline="0">
+              <a:ln>
+                <a:noFill/>
+              </a:ln>
+              <a:solidFill>
+                <a:schemeClr val="tx1"/>
+              </a:solidFill>
+              <a:effectLst/>
+              <a:latin typeface="Arial" panose="020B0604020202020204" pitchFamily="34" charset="0"/>
+              <a:cs typeface="Arial" panose="020B0604020202020204" pitchFamily="34" charset="0"/>
+            </a:endParaRPr>
+          </a:p>
+          <a:p>
+            <a:pPr>
+              <a:lnSpc>
+                <a:spcPct val="150000"/>
+              </a:lnSpc>
+            </a:pPr>
+            <a:endParaRPr lang="az-Latn-AZ" altLang="en-US" sz="1100">
+              <a:latin typeface="Arial" panose="020B0604020202020204" pitchFamily="34" charset="0"/>
+              <a:cs typeface="Arial" panose="020B0604020202020204" pitchFamily="34" charset="0"/>
+            </a:endParaRPr>
+          </a:p>
+          <a:p>
+            <a:pPr>
+              <a:lnSpc>
+                <a:spcPct val="150000"/>
+              </a:lnSpc>
+            </a:pPr>
+            <a:endParaRPr kumimoji="0" lang="az-Latn-AZ" altLang="en-US" sz="1100" b="0" i="0" u="none" strike="noStrike" cap="none" normalizeH="0" baseline="0">
+              <a:ln>
+                <a:noFill/>
+              </a:ln>
+              <a:solidFill>
+                <a:schemeClr val="tx1"/>
+              </a:solidFill>
+              <a:effectLst/>
+              <a:latin typeface="Arial" panose="020B0604020202020204" pitchFamily="34" charset="0"/>
+              <a:cs typeface="Arial" panose="020B0604020202020204" pitchFamily="34" charset="0"/>
+            </a:endParaRPr>
+          </a:p>
+          <a:p>
+            <a:pPr>
+              <a:lnSpc>
+                <a:spcPct val="150000"/>
+              </a:lnSpc>
+            </a:pPr>
+            <a:endParaRPr kumimoji="0" lang="az-Latn-AZ" altLang="en-US" sz="1100" b="0" i="0" u="none" strike="noStrike" cap="none" normalizeH="0" baseline="0">
+              <a:ln>
+                <a:noFill/>
+              </a:ln>
+              <a:solidFill>
+                <a:schemeClr val="tx1"/>
+              </a:solidFill>
+              <a:effectLst/>
+              <a:latin typeface="Arial" panose="020B0604020202020204" pitchFamily="34" charset="0"/>
+              <a:cs typeface="Arial" panose="020B0604020202020204" pitchFamily="34" charset="0"/>
+            </a:endParaRPr>
+          </a:p>
+          <a:p>
+            <a:pPr>
+              <a:lnSpc>
+                <a:spcPct val="150000"/>
+              </a:lnSpc>
+            </a:pPr>
+            <a:r>
+              <a:rPr kumimoji="0" lang="en-US" altLang="en-US" sz="1100" b="1" i="0" u="none" strike="noStrike" cap="none" normalizeH="0" baseline="0">
+                <a:ln>
+                  <a:noFill/>
+                </a:ln>
+                <a:solidFill>
+                  <a:srgbClr val="FF0000"/>
+                </a:solidFill>
+                <a:effectLst/>
+                <a:latin typeface="Arial" panose="020B0604020202020204" pitchFamily="34" charset="0"/>
+                <a:cs typeface="Arial" panose="020B0604020202020204" pitchFamily="34" charset="0"/>
+              </a:rPr>
+              <a:t>2. storage_path(...) </a:t>
+            </a:r>
+            <a:r>
+              <a:rPr kumimoji="0" lang="en-US" altLang="en-US" sz="1100" b="0" i="0" u="none" strike="noStrike" cap="none" normalizeH="0" baseline="0">
+                <a:ln>
+                  <a:noFill/>
+                </a:ln>
+                <a:solidFill>
+                  <a:schemeClr val="tx1"/>
+                </a:solidFill>
+                <a:effectLst/>
+                <a:latin typeface="Arial" panose="020B0604020202020204" pitchFamily="34" charset="0"/>
+                <a:cs typeface="Arial" panose="020B0604020202020204" pitchFamily="34" charset="0"/>
+              </a:rPr>
+              <a:t>nədir?</a:t>
+            </a:r>
+            <a:endParaRPr kumimoji="0" lang="az-Latn-AZ" altLang="en-US" sz="1100" b="0" i="0" u="none" strike="noStrike" cap="none" normalizeH="0" baseline="0">
+              <a:ln>
+                <a:noFill/>
+              </a:ln>
+              <a:solidFill>
+                <a:schemeClr val="tx1"/>
+              </a:solidFill>
+              <a:effectLst/>
+              <a:latin typeface="Arial" panose="020B0604020202020204" pitchFamily="34" charset="0"/>
+              <a:cs typeface="Arial" panose="020B0604020202020204" pitchFamily="34" charset="0"/>
+            </a:endParaRPr>
+          </a:p>
+          <a:p>
+            <a:pPr>
+              <a:lnSpc>
+                <a:spcPct val="150000"/>
+              </a:lnSpc>
+            </a:pPr>
+            <a:endParaRPr kumimoji="0" lang="az-Latn-AZ" altLang="en-US" sz="1100" b="0" i="0" u="none" strike="noStrike" cap="none" normalizeH="0" baseline="0">
+              <a:ln>
+                <a:noFill/>
+              </a:ln>
+              <a:solidFill>
+                <a:schemeClr val="tx1"/>
+              </a:solidFill>
+              <a:effectLst/>
+              <a:latin typeface="Arial" panose="020B0604020202020204" pitchFamily="34" charset="0"/>
+              <a:cs typeface="Arial" panose="020B0604020202020204" pitchFamily="34" charset="0"/>
+            </a:endParaRPr>
+          </a:p>
+          <a:p>
+            <a:pPr>
+              <a:lnSpc>
+                <a:spcPct val="150000"/>
+              </a:lnSpc>
+            </a:pPr>
+            <a:endParaRPr lang="az-Latn-AZ" altLang="en-US" sz="1100">
+              <a:latin typeface="Arial" panose="020B0604020202020204" pitchFamily="34" charset="0"/>
+              <a:cs typeface="Arial" panose="020B0604020202020204" pitchFamily="34" charset="0"/>
+            </a:endParaRPr>
+          </a:p>
+          <a:p>
+            <a:pPr>
+              <a:lnSpc>
+                <a:spcPct val="150000"/>
+              </a:lnSpc>
+            </a:pPr>
+            <a:endParaRPr kumimoji="0" lang="az-Latn-AZ" altLang="en-US" sz="1100" b="0" i="0" u="none" strike="noStrike" cap="none" normalizeH="0" baseline="0">
+              <a:ln>
+                <a:noFill/>
+              </a:ln>
+              <a:solidFill>
+                <a:schemeClr val="tx1"/>
+              </a:solidFill>
+              <a:effectLst/>
+              <a:latin typeface="Arial" panose="020B0604020202020204" pitchFamily="34" charset="0"/>
+              <a:cs typeface="Arial" panose="020B0604020202020204" pitchFamily="34" charset="0"/>
+            </a:endParaRPr>
+          </a:p>
+          <a:p>
+            <a:pPr>
+              <a:lnSpc>
+                <a:spcPct val="150000"/>
+              </a:lnSpc>
+            </a:pPr>
+            <a:r>
+              <a:rPr lang="az-Latn-AZ" altLang="en-US" sz="1100">
+                <a:latin typeface="Arial" panose="020B0604020202020204" pitchFamily="34" charset="0"/>
+                <a:cs typeface="Arial" panose="020B0604020202020204" pitchFamily="34" charset="0"/>
+              </a:rPr>
+              <a:t>Bu, Laravel-in köməkçi funksiyasıdır. O, Laravel-in </a:t>
+            </a:r>
+            <a:r>
+              <a:rPr lang="az-Latn-AZ" altLang="en-US" sz="1100" b="1">
+                <a:latin typeface="Arial" panose="020B0604020202020204" pitchFamily="34" charset="0"/>
+                <a:cs typeface="Arial" panose="020B0604020202020204" pitchFamily="34" charset="0"/>
+              </a:rPr>
+              <a:t>storage</a:t>
+            </a:r>
+            <a:r>
+              <a:rPr lang="az-Latn-AZ" altLang="en-US" sz="1100">
+                <a:latin typeface="Arial" panose="020B0604020202020204" pitchFamily="34" charset="0"/>
+                <a:cs typeface="Arial" panose="020B0604020202020204" pitchFamily="34" charset="0"/>
+              </a:rPr>
+              <a:t> qovluğuna tam yol qaytarır. Əgər sən </a:t>
+            </a:r>
+            <a:r>
+              <a:rPr lang="az-Latn-AZ" altLang="en-US" sz="1100" b="1">
+                <a:latin typeface="Arial" panose="020B0604020202020204" pitchFamily="34" charset="0"/>
+                <a:cs typeface="Arial" panose="020B0604020202020204" pitchFamily="34" charset="0"/>
+              </a:rPr>
+              <a:t>storage_path('/app/public/images/image_3.jpg') </a:t>
+            </a:r>
+            <a:r>
+              <a:rPr lang="az-Latn-AZ" altLang="en-US" sz="1100">
+                <a:latin typeface="Arial" panose="020B0604020202020204" pitchFamily="34" charset="0"/>
+                <a:cs typeface="Arial" panose="020B0604020202020204" pitchFamily="34" charset="0"/>
+              </a:rPr>
+              <a:t>yazırsansa, Laravel bunu belə bir tam yola çevirir:</a:t>
+            </a:r>
+          </a:p>
+          <a:p>
+            <a:pPr>
+              <a:lnSpc>
+                <a:spcPct val="150000"/>
+              </a:lnSpc>
+            </a:pPr>
+            <a:endParaRPr lang="az-Latn-AZ" altLang="en-US" sz="1100">
+              <a:latin typeface="Arial" panose="020B0604020202020204" pitchFamily="34" charset="0"/>
+              <a:cs typeface="Arial" panose="020B0604020202020204" pitchFamily="34" charset="0"/>
+            </a:endParaRPr>
+          </a:p>
+          <a:p>
+            <a:pPr>
+              <a:lnSpc>
+                <a:spcPct val="150000"/>
+              </a:lnSpc>
+            </a:pPr>
+            <a:endParaRPr lang="az-Latn-AZ" altLang="en-US" sz="1100">
+              <a:latin typeface="Arial" panose="020B0604020202020204" pitchFamily="34" charset="0"/>
+              <a:cs typeface="Arial" panose="020B0604020202020204" pitchFamily="34" charset="0"/>
+            </a:endParaRPr>
+          </a:p>
+          <a:p>
+            <a:pPr>
+              <a:lnSpc>
+                <a:spcPct val="150000"/>
+              </a:lnSpc>
+            </a:pPr>
+            <a:endParaRPr lang="az-Latn-AZ" altLang="en-US" sz="1100">
+              <a:latin typeface="Arial" panose="020B0604020202020204" pitchFamily="34" charset="0"/>
+              <a:cs typeface="Arial" panose="020B0604020202020204" pitchFamily="34" charset="0"/>
+            </a:endParaRPr>
+          </a:p>
+          <a:p>
+            <a:pPr>
+              <a:lnSpc>
+                <a:spcPct val="150000"/>
+              </a:lnSpc>
+            </a:pPr>
+            <a:r>
+              <a:rPr lang="en-US" sz="1100">
+                <a:latin typeface="Arial" panose="020B0604020202020204" pitchFamily="34" charset="0"/>
+                <a:cs typeface="Arial" panose="020B0604020202020204" pitchFamily="34" charset="0"/>
+              </a:rPr>
+              <a:t>Deməli nəticə bu olur:</a:t>
+            </a:r>
+            <a:endParaRPr lang="az-Latn-AZ" altLang="en-US" sz="1100">
+              <a:latin typeface="Arial" panose="020B0604020202020204" pitchFamily="34" charset="0"/>
+              <a:cs typeface="Arial" panose="020B0604020202020204" pitchFamily="34" charset="0"/>
+            </a:endParaRPr>
+          </a:p>
+        </p:txBody>
+      </p:sp>
+      <p:pic>
+        <p:nvPicPr>
+          <p:cNvPr id="4" name="Picture 3">
+            <a:extLst>
+              <a:ext uri="{FF2B5EF4-FFF2-40B4-BE49-F238E27FC236}">
+                <a16:creationId xmlns:a16="http://schemas.microsoft.com/office/drawing/2014/main" id="{204AB45E-70E8-7B4C-9DCD-0D219DDB4B93}"/>
+              </a:ext>
+            </a:extLst>
+          </p:cNvPr>
+          <p:cNvPicPr>
+            <a:picLocks noChangeAspect="1"/>
+          </p:cNvPicPr>
+          <p:nvPr/>
+        </p:nvPicPr>
+        <p:blipFill>
+          <a:blip r:embed="rId2"/>
+          <a:stretch>
+            <a:fillRect/>
+          </a:stretch>
+        </p:blipFill>
+        <p:spPr>
+          <a:xfrm>
+            <a:off x="236766" y="2099818"/>
+            <a:ext cx="2200582" cy="571580"/>
+          </a:xfrm>
+          <a:prstGeom prst="rect">
+            <a:avLst/>
+          </a:prstGeom>
+        </p:spPr>
+      </p:pic>
+      <p:pic>
+        <p:nvPicPr>
+          <p:cNvPr id="6" name="Picture 5">
+            <a:extLst>
+              <a:ext uri="{FF2B5EF4-FFF2-40B4-BE49-F238E27FC236}">
+                <a16:creationId xmlns:a16="http://schemas.microsoft.com/office/drawing/2014/main" id="{97FA366A-70FB-9754-9673-71849A1B7E66}"/>
+              </a:ext>
+            </a:extLst>
+          </p:cNvPr>
+          <p:cNvPicPr>
+            <a:picLocks noChangeAspect="1"/>
+          </p:cNvPicPr>
+          <p:nvPr/>
+        </p:nvPicPr>
+        <p:blipFill>
+          <a:blip r:embed="rId3"/>
+          <a:stretch>
+            <a:fillRect/>
+          </a:stretch>
+        </p:blipFill>
+        <p:spPr>
+          <a:xfrm>
+            <a:off x="198663" y="3514166"/>
+            <a:ext cx="3791479" cy="543001"/>
+          </a:xfrm>
+          <a:prstGeom prst="rect">
+            <a:avLst/>
+          </a:prstGeom>
+        </p:spPr>
+      </p:pic>
+      <p:pic>
+        <p:nvPicPr>
+          <p:cNvPr id="8" name="Picture 7">
+            <a:extLst>
+              <a:ext uri="{FF2B5EF4-FFF2-40B4-BE49-F238E27FC236}">
+                <a16:creationId xmlns:a16="http://schemas.microsoft.com/office/drawing/2014/main" id="{68CA5A21-7354-1579-3243-F9B8A420CAE4}"/>
+              </a:ext>
+            </a:extLst>
+          </p:cNvPr>
+          <p:cNvPicPr>
+            <a:picLocks noChangeAspect="1"/>
+          </p:cNvPicPr>
+          <p:nvPr/>
+        </p:nvPicPr>
+        <p:blipFill>
+          <a:blip r:embed="rId4"/>
+          <a:stretch>
+            <a:fillRect/>
+          </a:stretch>
+        </p:blipFill>
+        <p:spPr>
+          <a:xfrm>
+            <a:off x="236766" y="4803663"/>
+            <a:ext cx="4363059" cy="523948"/>
+          </a:xfrm>
+          <a:prstGeom prst="rect">
+            <a:avLst/>
+          </a:prstGeom>
+        </p:spPr>
+      </p:pic>
+      <p:pic>
+        <p:nvPicPr>
+          <p:cNvPr id="10" name="Picture 9">
+            <a:extLst>
+              <a:ext uri="{FF2B5EF4-FFF2-40B4-BE49-F238E27FC236}">
+                <a16:creationId xmlns:a16="http://schemas.microsoft.com/office/drawing/2014/main" id="{F3CDB4A2-462B-E643-F9AA-F0E6696C67D0}"/>
+              </a:ext>
+            </a:extLst>
+          </p:cNvPr>
+          <p:cNvPicPr>
+            <a:picLocks noChangeAspect="1"/>
+          </p:cNvPicPr>
+          <p:nvPr/>
+        </p:nvPicPr>
+        <p:blipFill>
+          <a:blip r:embed="rId5"/>
+          <a:stretch>
+            <a:fillRect/>
+          </a:stretch>
+        </p:blipFill>
+        <p:spPr>
+          <a:xfrm>
+            <a:off x="236766" y="5825870"/>
+            <a:ext cx="5010849" cy="552527"/>
+          </a:xfrm>
+          <a:prstGeom prst="rect">
+            <a:avLst/>
+          </a:prstGeom>
+        </p:spPr>
+      </p:pic>
+    </p:spTree>
+    <p:extLst>
+      <p:ext uri="{BB962C8B-B14F-4D97-AF65-F5344CB8AC3E}">
+        <p14:creationId xmlns:p14="http://schemas.microsoft.com/office/powerpoint/2010/main" val="3174492391"/>
+      </p:ext>
+    </p:extLst>
+  </p:cSld>
+  <p:clrMapOvr>
+    <a:masterClrMapping/>
+  </p:clrMapOvr>
+</p:sld>
+</file>
+
+<file path=ppt/slides/slide5.xml><?xml version="1.0" encoding="utf-8"?>
+<p:sld xmlns:a="http://schemas.openxmlformats.org/drawingml/2006/main" xmlns:r="http://schemas.openxmlformats.org/officeDocument/2006/relationships" xmlns:p="http://schemas.openxmlformats.org/presentationml/2006/main">
+  <p:cSld>
+    <p:spTree>
+      <p:nvGrpSpPr>
+        <p:cNvPr id="1" name="">
+          <a:extLst>
+            <a:ext uri="{FF2B5EF4-FFF2-40B4-BE49-F238E27FC236}">
+              <a16:creationId xmlns:a16="http://schemas.microsoft.com/office/drawing/2014/main" id="{02011C4B-FE5B-3030-A6A8-3B1670DCA898}"/>
+            </a:ext>
+          </a:extLst>
+        </p:cNvPr>
+        <p:cNvGrpSpPr/>
+        <p:nvPr/>
+      </p:nvGrpSpPr>
+      <p:grpSpPr>
+        <a:xfrm>
+          <a:off x="0" y="0"/>
+          <a:ext cx="0" cy="0"/>
+          <a:chOff x="0" y="0"/>
+          <a:chExt cx="0" cy="0"/>
+        </a:xfrm>
+      </p:grpSpPr>
+      <p:sp>
+        <p:nvSpPr>
+          <p:cNvPr id="3" name="TextBox 2">
+            <a:extLst>
+              <a:ext uri="{FF2B5EF4-FFF2-40B4-BE49-F238E27FC236}">
+                <a16:creationId xmlns:a16="http://schemas.microsoft.com/office/drawing/2014/main" id="{D1BC93F3-D3F9-F07B-D44F-99ADF1F285A2}"/>
+              </a:ext>
+            </a:extLst>
+          </p:cNvPr>
+          <p:cNvSpPr txBox="1"/>
+          <p:nvPr/>
+        </p:nvSpPr>
+        <p:spPr>
+          <a:xfrm>
+            <a:off x="217714" y="255046"/>
+            <a:ext cx="11756571" cy="1855764"/>
+          </a:xfrm>
+          <a:prstGeom prst="rect">
+            <a:avLst/>
+          </a:prstGeom>
+          <a:noFill/>
+        </p:spPr>
+        <p:txBody>
+          <a:bodyPr wrap="square">
+            <a:spAutoFit/>
+          </a:bodyPr>
+          <a:lstStyle/>
+          <a:p>
+            <a:pPr>
+              <a:lnSpc>
+                <a:spcPct val="150000"/>
+              </a:lnSpc>
+              <a:buNone/>
+            </a:pPr>
+            <a:r>
+              <a:rPr kumimoji="0" lang="en-US" altLang="en-US" sz="1300" b="0" i="0" u="none" strike="noStrike" cap="none" normalizeH="0" baseline="0">
+                <a:ln>
+                  <a:noFill/>
+                </a:ln>
+                <a:solidFill>
+                  <a:schemeClr val="tx1"/>
+                </a:solidFill>
+                <a:effectLst/>
+                <a:latin typeface="Arial" panose="020B0604020202020204" pitchFamily="34" charset="0"/>
+              </a:rPr>
+              <a:t>Sadə şəkildə: bu sətir nə edir?</a:t>
+            </a:r>
+            <a:endParaRPr kumimoji="0" lang="az-Latn-AZ" altLang="en-US" sz="1300" b="0" i="0" u="none" strike="noStrike" cap="none" normalizeH="0" baseline="0">
+              <a:ln>
+                <a:noFill/>
+              </a:ln>
+              <a:solidFill>
+                <a:schemeClr val="tx1"/>
+              </a:solidFill>
+              <a:effectLst/>
+              <a:latin typeface="Arial" panose="020B0604020202020204" pitchFamily="34" charset="0"/>
+            </a:endParaRPr>
+          </a:p>
+          <a:p>
+            <a:pPr>
+              <a:lnSpc>
+                <a:spcPct val="150000"/>
+              </a:lnSpc>
+              <a:buNone/>
+            </a:pPr>
+            <a:endParaRPr lang="az-Latn-AZ" altLang="en-US" sz="1300">
+              <a:latin typeface="Arial" panose="020B0604020202020204" pitchFamily="34" charset="0"/>
+            </a:endParaRPr>
+          </a:p>
+          <a:p>
+            <a:pPr>
+              <a:lnSpc>
+                <a:spcPct val="150000"/>
+              </a:lnSpc>
+              <a:buNone/>
+            </a:pPr>
+            <a:endParaRPr kumimoji="0" lang="az-Latn-AZ" altLang="en-US" sz="1300" b="0" i="0" u="none" strike="noStrike" cap="none" normalizeH="0" baseline="0">
+              <a:ln>
+                <a:noFill/>
+              </a:ln>
+              <a:solidFill>
+                <a:schemeClr val="tx1"/>
+              </a:solidFill>
+              <a:effectLst/>
+              <a:latin typeface="Arial" panose="020B0604020202020204" pitchFamily="34" charset="0"/>
+            </a:endParaRPr>
+          </a:p>
+          <a:p>
+            <a:pPr>
+              <a:lnSpc>
+                <a:spcPct val="150000"/>
+              </a:lnSpc>
+              <a:buNone/>
+            </a:pPr>
+            <a:endParaRPr lang="az-Latn-AZ" altLang="en-US" sz="1300">
+              <a:latin typeface="Arial" panose="020B0604020202020204" pitchFamily="34" charset="0"/>
+            </a:endParaRPr>
+          </a:p>
+          <a:p>
+            <a:pPr>
+              <a:lnSpc>
+                <a:spcPct val="150000"/>
+              </a:lnSpc>
+              <a:buNone/>
+            </a:pPr>
+            <a:r>
+              <a:rPr kumimoji="0" lang="en-US" altLang="en-US" sz="1300" b="0" i="0" u="none" strike="noStrike" cap="none" normalizeH="0" baseline="0">
+                <a:ln>
+                  <a:noFill/>
+                </a:ln>
+                <a:solidFill>
+                  <a:schemeClr val="tx1"/>
+                </a:solidFill>
+                <a:effectLst/>
+                <a:latin typeface="Arial" panose="020B0604020202020204" pitchFamily="34" charset="0"/>
+              </a:rPr>
+              <a:t>Bu, əslində bu əmri icra edir: Fiziki olaraq sil → </a:t>
+            </a:r>
+            <a:r>
+              <a:rPr kumimoji="0" lang="en-US" altLang="en-US" sz="1300" b="1" i="0" u="none" strike="noStrike" cap="none" normalizeH="0" baseline="0">
+                <a:ln>
+                  <a:noFill/>
+                </a:ln>
+                <a:solidFill>
+                  <a:schemeClr val="tx1"/>
+                </a:solidFill>
+                <a:effectLst/>
+                <a:latin typeface="Arial" panose="020B0604020202020204" pitchFamily="34" charset="0"/>
+              </a:rPr>
+              <a:t>/laravel-proyektinin-yolu/storage/app/public/images/image_3.jpg </a:t>
+            </a:r>
+            <a:r>
+              <a:rPr kumimoji="0" lang="en-US" altLang="en-US" sz="1300" b="0" i="0" u="none" strike="noStrike" cap="none" normalizeH="0" baseline="0">
+                <a:ln>
+                  <a:noFill/>
+                </a:ln>
+                <a:solidFill>
+                  <a:schemeClr val="tx1"/>
+                </a:solidFill>
+                <a:effectLst/>
+                <a:latin typeface="Arial" panose="020B0604020202020204" pitchFamily="34" charset="0"/>
+              </a:rPr>
+              <a:t>faylını</a:t>
+            </a:r>
+            <a:endParaRPr kumimoji="0" lang="az-Latn-AZ" altLang="en-US" sz="1300" b="0" i="0" u="none" strike="noStrike" cap="none" normalizeH="0" baseline="0">
+              <a:ln>
+                <a:noFill/>
+              </a:ln>
+              <a:solidFill>
+                <a:schemeClr val="tx1"/>
+              </a:solidFill>
+              <a:effectLst/>
+              <a:latin typeface="Arial" panose="020B0604020202020204" pitchFamily="34" charset="0"/>
+            </a:endParaRPr>
+          </a:p>
+          <a:p>
+            <a:pPr>
+              <a:lnSpc>
+                <a:spcPct val="150000"/>
+              </a:lnSpc>
+              <a:buNone/>
+            </a:pPr>
+            <a:endParaRPr kumimoji="0" lang="en-US" altLang="en-US" sz="1300" b="0" i="0" u="none" strike="noStrike" cap="none" normalizeH="0" baseline="0">
+              <a:ln>
+                <a:noFill/>
+              </a:ln>
+              <a:solidFill>
+                <a:schemeClr val="tx1"/>
+              </a:solidFill>
+              <a:effectLst/>
+              <a:latin typeface="Arial" panose="020B0604020202020204" pitchFamily="34" charset="0"/>
+            </a:endParaRPr>
+          </a:p>
+        </p:txBody>
+      </p:sp>
+      <p:pic>
+        <p:nvPicPr>
+          <p:cNvPr id="4" name="Picture 3">
+            <a:extLst>
+              <a:ext uri="{FF2B5EF4-FFF2-40B4-BE49-F238E27FC236}">
+                <a16:creationId xmlns:a16="http://schemas.microsoft.com/office/drawing/2014/main" id="{50E950BE-A021-B36F-244B-5B6E2CCA414A}"/>
+              </a:ext>
+            </a:extLst>
+          </p:cNvPr>
+          <p:cNvPicPr>
+            <a:picLocks noChangeAspect="1"/>
+          </p:cNvPicPr>
+          <p:nvPr/>
+        </p:nvPicPr>
+        <p:blipFill>
+          <a:blip r:embed="rId2"/>
+          <a:stretch>
+            <a:fillRect/>
+          </a:stretch>
+        </p:blipFill>
+        <p:spPr>
+          <a:xfrm>
+            <a:off x="217714" y="782144"/>
+            <a:ext cx="5172797" cy="504895"/>
+          </a:xfrm>
+          <a:prstGeom prst="rect">
+            <a:avLst/>
+          </a:prstGeom>
+        </p:spPr>
+      </p:pic>
+      <p:pic>
+        <p:nvPicPr>
+          <p:cNvPr id="6" name="Picture 5">
+            <a:extLst>
+              <a:ext uri="{FF2B5EF4-FFF2-40B4-BE49-F238E27FC236}">
+                <a16:creationId xmlns:a16="http://schemas.microsoft.com/office/drawing/2014/main" id="{B4B6981C-60B7-2677-291B-FC870E7AE223}"/>
+              </a:ext>
+            </a:extLst>
+          </p:cNvPr>
+          <p:cNvPicPr>
+            <a:picLocks noChangeAspect="1"/>
+          </p:cNvPicPr>
+          <p:nvPr/>
+        </p:nvPicPr>
+        <p:blipFill>
+          <a:blip r:embed="rId3">
+            <a:extLst>
+              <a:ext uri="{28A0092B-C50C-407E-A947-70E740481C1C}">
+                <a14:useLocalDpi xmlns:a14="http://schemas.microsoft.com/office/drawing/2010/main" val="0"/>
+              </a:ext>
+            </a:extLst>
+          </a:blip>
+          <a:stretch>
+            <a:fillRect/>
+          </a:stretch>
+        </p:blipFill>
+        <p:spPr>
+          <a:xfrm>
+            <a:off x="6664751" y="2285336"/>
+            <a:ext cx="5527249" cy="4572664"/>
+          </a:xfrm>
+          <a:prstGeom prst="rect">
+            <a:avLst/>
+          </a:prstGeom>
+        </p:spPr>
+      </p:pic>
+    </p:spTree>
+    <p:extLst>
+      <p:ext uri="{BB962C8B-B14F-4D97-AF65-F5344CB8AC3E}">
+        <p14:creationId xmlns:p14="http://schemas.microsoft.com/office/powerpoint/2010/main" val="4063611022"/>
+      </p:ext>
+    </p:extLst>
+  </p:cSld>
+  <p:clrMapOvr>
+    <a:masterClrMapping/>
+  </p:clrMapOvr>
+</p:sld>
+</file>
+
+<file path=ppt/slides/slide6.xml><?xml version="1.0" encoding="utf-8"?>
 <p:sld xmlns:a="http://schemas.openxmlformats.org/drawingml/2006/main" xmlns:r="http://schemas.openxmlformats.org/officeDocument/2006/relationships" xmlns:p="http://schemas.openxmlformats.org/presentationml/2006/main">
   <p:cSld>
     <p:spTree>
@@ -3522,7 +6959,7 @@
         <p:spPr>
           <a:xfrm>
             <a:off x="217714" y="255046"/>
-            <a:ext cx="11756571" cy="355354"/>
+            <a:ext cx="11756571" cy="4556504"/>
           </a:xfrm>
           <a:prstGeom prst="rect">
             <a:avLst/>
@@ -3552,11 +6989,986 @@
                 <a:effectLst/>
                 <a:latin typeface="Arial" panose="020B0604020202020204" pitchFamily="34" charset="0"/>
               </a:rPr>
+              <a:t>Niyə </a:t>
+            </a:r>
+            <a:r>
+              <a:rPr kumimoji="0" lang="en-US" altLang="en-US" sz="1300" b="1" i="0" u="none" strike="noStrike" cap="none" normalizeH="0" baseline="0">
+                <a:ln>
+                  <a:noFill/>
+                </a:ln>
+                <a:solidFill>
+                  <a:srgbClr val="00B050"/>
+                </a:solidFill>
+                <a:effectLst/>
+                <a:latin typeface="Arial" panose="020B0604020202020204" pitchFamily="34" charset="0"/>
+              </a:rPr>
+              <a:t>Storage::delete(...) </a:t>
+            </a:r>
+            <a:r>
+              <a:rPr kumimoji="0" lang="en-US" altLang="en-US" sz="1300" b="0" i="0" u="none" strike="noStrike" cap="none" normalizeH="0" baseline="0">
+                <a:ln>
+                  <a:noFill/>
+                </a:ln>
+                <a:solidFill>
+                  <a:schemeClr val="tx1"/>
+                </a:solidFill>
+                <a:effectLst/>
+                <a:latin typeface="Arial" panose="020B0604020202020204" pitchFamily="34" charset="0"/>
+              </a:rPr>
+              <a:t>yox, </a:t>
+            </a:r>
+            <a:r>
+              <a:rPr kumimoji="0" lang="en-US" altLang="en-US" sz="1300" b="1" i="0" u="none" strike="noStrike" cap="none" normalizeH="0" baseline="0">
+                <a:ln>
+                  <a:noFill/>
+                </a:ln>
+                <a:solidFill>
+                  <a:srgbClr val="00B0F0"/>
+                </a:solidFill>
+                <a:effectLst/>
+                <a:latin typeface="Arial" panose="020B0604020202020204" pitchFamily="34" charset="0"/>
+              </a:rPr>
+              <a:t>File::delete(...) </a:t>
+            </a:r>
+            <a:r>
+              <a:rPr kumimoji="0" lang="en-US" altLang="en-US" sz="1300" b="0" i="0" u="none" strike="noStrike" cap="none" normalizeH="0" baseline="0">
+                <a:ln>
+                  <a:noFill/>
+                </a:ln>
+                <a:solidFill>
+                  <a:schemeClr val="tx1"/>
+                </a:solidFill>
+                <a:effectLst/>
+                <a:latin typeface="Arial" panose="020B0604020202020204" pitchFamily="34" charset="0"/>
+              </a:rPr>
+              <a:t>istifadə olunur?</a:t>
+            </a:r>
+            <a:endParaRPr kumimoji="0" lang="az-Latn-AZ" altLang="en-US" sz="1300" b="0" i="0" u="none" strike="noStrike" cap="none" normalizeH="0" baseline="0">
+              <a:ln>
+                <a:noFill/>
+              </a:ln>
+              <a:solidFill>
+                <a:schemeClr val="tx1"/>
+              </a:solidFill>
+              <a:effectLst/>
+              <a:latin typeface="Arial" panose="020B0604020202020204" pitchFamily="34" charset="0"/>
+            </a:endParaRPr>
+          </a:p>
+          <a:p>
+            <a:pPr>
+              <a:lnSpc>
+                <a:spcPct val="150000"/>
+              </a:lnSpc>
+              <a:buNone/>
+            </a:pPr>
+            <a:endParaRPr lang="az-Latn-AZ" altLang="en-US" sz="1300">
+              <a:latin typeface="Arial" panose="020B0604020202020204" pitchFamily="34" charset="0"/>
+            </a:endParaRPr>
+          </a:p>
+          <a:p>
+            <a:pPr>
+              <a:lnSpc>
+                <a:spcPct val="150000"/>
+              </a:lnSpc>
+              <a:buNone/>
+            </a:pPr>
+            <a:endParaRPr kumimoji="0" lang="az-Latn-AZ" altLang="en-US" sz="1300" b="0" i="0" u="none" strike="noStrike" cap="none" normalizeH="0" baseline="0">
+              <a:ln>
+                <a:noFill/>
+              </a:ln>
+              <a:solidFill>
+                <a:schemeClr val="tx1"/>
+              </a:solidFill>
+              <a:effectLst/>
+              <a:latin typeface="Arial" panose="020B0604020202020204" pitchFamily="34" charset="0"/>
+            </a:endParaRPr>
+          </a:p>
+          <a:p>
+            <a:pPr>
+              <a:lnSpc>
+                <a:spcPct val="150000"/>
+              </a:lnSpc>
+              <a:buNone/>
+            </a:pPr>
+            <a:endParaRPr lang="az-Latn-AZ" altLang="en-US" sz="1300">
+              <a:latin typeface="Arial" panose="020B0604020202020204" pitchFamily="34" charset="0"/>
+            </a:endParaRPr>
+          </a:p>
+          <a:p>
+            <a:pPr>
+              <a:lnSpc>
+                <a:spcPct val="150000"/>
+              </a:lnSpc>
+              <a:buNone/>
+            </a:pPr>
+            <a:endParaRPr kumimoji="0" lang="az-Latn-AZ" altLang="en-US" sz="1300" b="0" i="0" u="none" strike="noStrike" cap="none" normalizeH="0" baseline="0">
+              <a:ln>
+                <a:noFill/>
+              </a:ln>
+              <a:solidFill>
+                <a:schemeClr val="tx1"/>
+              </a:solidFill>
+              <a:effectLst/>
+              <a:latin typeface="Arial" panose="020B0604020202020204" pitchFamily="34" charset="0"/>
+            </a:endParaRPr>
+          </a:p>
+          <a:p>
+            <a:pPr>
+              <a:lnSpc>
+                <a:spcPct val="150000"/>
+              </a:lnSpc>
+              <a:buNone/>
+            </a:pPr>
+            <a:endParaRPr lang="az-Latn-AZ" altLang="en-US" sz="1300">
+              <a:latin typeface="Arial" panose="020B0604020202020204" pitchFamily="34" charset="0"/>
+            </a:endParaRPr>
+          </a:p>
+          <a:p>
+            <a:pPr>
+              <a:lnSpc>
+                <a:spcPct val="150000"/>
+              </a:lnSpc>
+              <a:buNone/>
+            </a:pPr>
+            <a:endParaRPr kumimoji="0" lang="az-Latn-AZ" altLang="en-US" sz="1300" b="0" i="0" u="none" strike="noStrike" cap="none" normalizeH="0" baseline="0">
+              <a:ln>
+                <a:noFill/>
+              </a:ln>
+              <a:solidFill>
+                <a:schemeClr val="tx1"/>
+              </a:solidFill>
+              <a:effectLst/>
+              <a:latin typeface="Arial" panose="020B0604020202020204" pitchFamily="34" charset="0"/>
+            </a:endParaRPr>
+          </a:p>
+          <a:p>
+            <a:pPr>
+              <a:lnSpc>
+                <a:spcPct val="150000"/>
+              </a:lnSpc>
+              <a:buNone/>
+            </a:pPr>
+            <a:endParaRPr lang="az-Latn-AZ" altLang="en-US" sz="1300">
+              <a:latin typeface="Arial" panose="020B0604020202020204" pitchFamily="34" charset="0"/>
+            </a:endParaRPr>
+          </a:p>
+          <a:p>
+            <a:pPr>
+              <a:lnSpc>
+                <a:spcPct val="150000"/>
+              </a:lnSpc>
+              <a:buNone/>
+            </a:pPr>
+            <a:endParaRPr kumimoji="0" lang="az-Latn-AZ" altLang="en-US" sz="1300" b="0" i="0" u="none" strike="noStrike" cap="none" normalizeH="0" baseline="0">
+              <a:ln>
+                <a:noFill/>
+              </a:ln>
+              <a:solidFill>
+                <a:schemeClr val="tx1"/>
+              </a:solidFill>
+              <a:effectLst/>
+              <a:latin typeface="Arial" panose="020B0604020202020204" pitchFamily="34" charset="0"/>
+            </a:endParaRPr>
+          </a:p>
+          <a:p>
+            <a:pPr>
+              <a:lnSpc>
+                <a:spcPct val="150000"/>
+              </a:lnSpc>
+              <a:buNone/>
+            </a:pPr>
+            <a:r>
+              <a:rPr kumimoji="0" lang="en-US" altLang="en-US" sz="1300" b="0" i="0" u="none" strike="noStrike" cap="none" normalizeH="0" baseline="0">
+                <a:ln>
+                  <a:noFill/>
+                </a:ln>
+                <a:solidFill>
+                  <a:schemeClr val="tx1"/>
+                </a:solidFill>
+                <a:effectLst/>
+                <a:latin typeface="Arial" panose="020B0604020202020204" pitchFamily="34" charset="0"/>
+              </a:rPr>
+              <a:t>1) "</a:t>
+            </a:r>
+            <a:r>
+              <a:rPr kumimoji="0" lang="en-US" altLang="en-US" sz="1300" b="1" i="0" u="none" strike="noStrike" cap="none" normalizeH="0" baseline="0">
+                <a:ln>
+                  <a:noFill/>
+                </a:ln>
+                <a:solidFill>
+                  <a:srgbClr val="FF0000"/>
+                </a:solidFill>
+                <a:effectLst/>
+                <a:latin typeface="Arial" panose="020B0604020202020204" pitchFamily="34" charset="0"/>
+              </a:rPr>
+              <a:t>Laravel-in low-level PHP unlink() </a:t>
+            </a:r>
+            <a:r>
+              <a:rPr kumimoji="0" lang="en-US" altLang="en-US" sz="1300" b="0" i="0" u="none" strike="noStrike" cap="none" normalizeH="0" baseline="0">
+                <a:ln>
+                  <a:noFill/>
+                </a:ln>
+                <a:solidFill>
+                  <a:schemeClr val="tx1"/>
+                </a:solidFill>
+                <a:effectLst/>
+                <a:latin typeface="Arial" panose="020B0604020202020204" pitchFamily="34" charset="0"/>
+              </a:rPr>
+              <a:t>metodunu əvəzləyir" nə deməkdir?</a:t>
+            </a:r>
+          </a:p>
+          <a:p>
+            <a:pPr>
+              <a:lnSpc>
+                <a:spcPct val="150000"/>
+              </a:lnSpc>
+              <a:buNone/>
+            </a:pPr>
+            <a:r>
+              <a:rPr kumimoji="0" lang="en-US" altLang="en-US" sz="1300" b="0" i="0" u="none" strike="noStrike" cap="none" normalizeH="0" baseline="0">
+                <a:ln>
+                  <a:noFill/>
+                </a:ln>
+                <a:solidFill>
+                  <a:schemeClr val="tx1"/>
+                </a:solidFill>
+                <a:effectLst/>
+                <a:latin typeface="Arial" panose="020B0604020202020204" pitchFamily="34" charset="0"/>
+              </a:rPr>
+              <a:t>PHP-də faylı silmək üçün əsas (low-level) üsul </a:t>
+            </a:r>
+            <a:r>
+              <a:rPr kumimoji="0" lang="en-US" altLang="en-US" sz="1300" b="1" i="0" u="none" strike="noStrike" cap="none" normalizeH="0" baseline="0">
+                <a:ln>
+                  <a:noFill/>
+                </a:ln>
+                <a:solidFill>
+                  <a:schemeClr val="tx1"/>
+                </a:solidFill>
+                <a:effectLst/>
+                <a:latin typeface="Arial" panose="020B0604020202020204" pitchFamily="34" charset="0"/>
+              </a:rPr>
+              <a:t>unlink() </a:t>
+            </a:r>
+            <a:r>
+              <a:rPr kumimoji="0" lang="en-US" altLang="en-US" sz="1300" b="0" i="0" u="none" strike="noStrike" cap="none" normalizeH="0" baseline="0">
+                <a:ln>
+                  <a:noFill/>
+                </a:ln>
+                <a:solidFill>
+                  <a:schemeClr val="tx1"/>
+                </a:solidFill>
+                <a:effectLst/>
+                <a:latin typeface="Arial" panose="020B0604020202020204" pitchFamily="34" charset="0"/>
+              </a:rPr>
+              <a:t>funksiyasıdır:</a:t>
+            </a:r>
+            <a:r>
+              <a:rPr kumimoji="0" lang="az-Latn-AZ" altLang="en-US" sz="1300" b="0" i="0" u="none" strike="noStrike" cap="none" normalizeH="0" baseline="0">
+                <a:ln>
+                  <a:noFill/>
+                </a:ln>
+                <a:solidFill>
+                  <a:schemeClr val="tx1"/>
+                </a:solidFill>
+                <a:effectLst/>
+                <a:latin typeface="Arial" panose="020B0604020202020204" pitchFamily="34" charset="0"/>
+              </a:rPr>
+              <a:t> </a:t>
+            </a:r>
+          </a:p>
+          <a:p>
+            <a:pPr>
+              <a:lnSpc>
+                <a:spcPct val="150000"/>
+              </a:lnSpc>
+              <a:buNone/>
+            </a:pPr>
+            <a:endParaRPr lang="az-Latn-AZ" altLang="en-US" sz="1300">
+              <a:latin typeface="Arial" panose="020B0604020202020204" pitchFamily="34" charset="0"/>
+            </a:endParaRPr>
+          </a:p>
+          <a:p>
+            <a:pPr>
+              <a:lnSpc>
+                <a:spcPct val="150000"/>
+              </a:lnSpc>
+              <a:buNone/>
+            </a:pPr>
+            <a:endParaRPr kumimoji="0" lang="az-Latn-AZ" altLang="en-US" sz="1300" b="0" i="0" u="none" strike="noStrike" cap="none" normalizeH="0" baseline="0">
+              <a:ln>
+                <a:noFill/>
+              </a:ln>
+              <a:solidFill>
+                <a:schemeClr val="tx1"/>
+              </a:solidFill>
+              <a:effectLst/>
+              <a:latin typeface="Arial" panose="020B0604020202020204" pitchFamily="34" charset="0"/>
+            </a:endParaRPr>
+          </a:p>
+          <a:p>
+            <a:pPr>
+              <a:lnSpc>
+                <a:spcPct val="150000"/>
+              </a:lnSpc>
+              <a:buNone/>
+            </a:pPr>
+            <a:endParaRPr kumimoji="0" lang="az-Latn-AZ" altLang="en-US" sz="1300" b="0" i="0" u="none" strike="noStrike" cap="none" normalizeH="0" baseline="0">
+              <a:ln>
+                <a:noFill/>
+              </a:ln>
+              <a:solidFill>
+                <a:schemeClr val="tx1"/>
+              </a:solidFill>
+              <a:effectLst/>
+              <a:latin typeface="Arial" panose="020B0604020202020204" pitchFamily="34" charset="0"/>
+            </a:endParaRPr>
+          </a:p>
+          <a:p>
+            <a:pPr>
+              <a:lnSpc>
+                <a:spcPct val="150000"/>
+              </a:lnSpc>
+              <a:buNone/>
+            </a:pPr>
+            <a:r>
+              <a:rPr kumimoji="0" lang="az-Latn-AZ" altLang="en-US" sz="1300" b="0" i="0" u="none" strike="noStrike" cap="none" normalizeH="0" baseline="0">
+                <a:ln>
+                  <a:noFill/>
+                </a:ln>
+                <a:solidFill>
+                  <a:schemeClr val="tx1"/>
+                </a:solidFill>
+                <a:effectLst/>
+                <a:latin typeface="Arial" panose="020B0604020202020204" pitchFamily="34" charset="0"/>
+              </a:rPr>
+              <a:t>Bu PHP funksiyası sistemə deyir ki: “Bu faylı bu yoldan sil.” Əgər fayl mövcud deyilsə, </a:t>
+            </a:r>
+            <a:r>
+              <a:rPr kumimoji="0" lang="az-Latn-AZ" altLang="en-US" sz="1300" b="1" i="0" u="none" strike="noStrike" cap="none" normalizeH="0" baseline="0">
+                <a:ln>
+                  <a:noFill/>
+                </a:ln>
+                <a:solidFill>
+                  <a:schemeClr val="tx1"/>
+                </a:solidFill>
+                <a:effectLst/>
+                <a:latin typeface="Arial" panose="020B0604020202020204" pitchFamily="34" charset="0"/>
+              </a:rPr>
+              <a:t>unlink() xəta verir</a:t>
+            </a:r>
+            <a:r>
+              <a:rPr kumimoji="0" lang="az-Latn-AZ" altLang="en-US" sz="1300" b="0" i="0" u="none" strike="noStrike" cap="none" normalizeH="0" baseline="0">
+                <a:ln>
+                  <a:noFill/>
+                </a:ln>
+                <a:solidFill>
+                  <a:schemeClr val="tx1"/>
+                </a:solidFill>
+                <a:effectLst/>
+                <a:latin typeface="Arial" panose="020B0604020202020204" pitchFamily="34" charset="0"/>
+              </a:rPr>
               <a:t>.</a:t>
             </a:r>
+            <a:endParaRPr kumimoji="0" lang="en-US" altLang="en-US" sz="1300" b="0" i="0" u="none" strike="noStrike" cap="none" normalizeH="0" baseline="0">
+              <a:ln>
+                <a:noFill/>
+              </a:ln>
+              <a:solidFill>
+                <a:schemeClr val="tx1"/>
+              </a:solidFill>
+              <a:effectLst/>
+              <a:latin typeface="Arial" panose="020B0604020202020204" pitchFamily="34" charset="0"/>
+            </a:endParaRPr>
           </a:p>
         </p:txBody>
       </p:sp>
+      <p:graphicFrame>
+        <p:nvGraphicFramePr>
+          <p:cNvPr id="2" name="Table 1">
+            <a:extLst>
+              <a:ext uri="{FF2B5EF4-FFF2-40B4-BE49-F238E27FC236}">
+                <a16:creationId xmlns:a16="http://schemas.microsoft.com/office/drawing/2014/main" id="{9C2A2C1D-714E-9993-4A95-57DBA0540519}"/>
+              </a:ext>
+            </a:extLst>
+          </p:cNvPr>
+          <p:cNvGraphicFramePr>
+            <a:graphicFrameLocks noGrp="1"/>
+          </p:cNvGraphicFramePr>
+          <p:nvPr>
+            <p:extLst>
+              <p:ext uri="{D42A27DB-BD31-4B8C-83A1-F6EECF244321}">
+                <p14:modId xmlns:p14="http://schemas.microsoft.com/office/powerpoint/2010/main" val="3406387289"/>
+              </p:ext>
+            </p:extLst>
+          </p:nvPr>
+        </p:nvGraphicFramePr>
+        <p:xfrm>
+          <a:off x="217714" y="865939"/>
+          <a:ext cx="10547696" cy="1773568"/>
+        </p:xfrm>
+        <a:graphic>
+          <a:graphicData uri="http://schemas.openxmlformats.org/drawingml/2006/table">
+            <a:tbl>
+              <a:tblPr/>
+              <a:tblGrid>
+                <a:gridCol w="5273848">
+                  <a:extLst>
+                    <a:ext uri="{9D8B030D-6E8A-4147-A177-3AD203B41FA5}">
+                      <a16:colId xmlns:a16="http://schemas.microsoft.com/office/drawing/2014/main" val="3357166291"/>
+                    </a:ext>
+                  </a:extLst>
+                </a:gridCol>
+                <a:gridCol w="5273848">
+                  <a:extLst>
+                    <a:ext uri="{9D8B030D-6E8A-4147-A177-3AD203B41FA5}">
+                      <a16:colId xmlns:a16="http://schemas.microsoft.com/office/drawing/2014/main" val="3968829048"/>
+                    </a:ext>
+                  </a:extLst>
+                </a:gridCol>
+              </a:tblGrid>
+              <a:tr h="443392">
+                <a:tc>
+                  <a:txBody>
+                    <a:bodyPr/>
+                    <a:lstStyle/>
+                    <a:p>
+                      <a:r>
+                        <a:rPr lang="en-US" b="1"/>
+                        <a:t>File::delete()</a:t>
+                      </a:r>
+                    </a:p>
+                  </a:txBody>
+                  <a:tcPr anchor="ctr">
+                    <a:lnL w="12700" cap="flat" cmpd="sng" algn="ctr">
+                      <a:solidFill>
+                        <a:schemeClr val="tx1"/>
+                      </a:solidFill>
+                      <a:prstDash val="solid"/>
+                      <a:round/>
+                      <a:headEnd type="none" w="med" len="med"/>
+                      <a:tailEnd type="none" w="med" len="med"/>
+                    </a:lnL>
+                    <a:lnR w="12700" cap="flat" cmpd="sng" algn="ctr">
+                      <a:solidFill>
+                        <a:schemeClr val="tx1"/>
+                      </a:solidFill>
+                      <a:prstDash val="solid"/>
+                      <a:round/>
+                      <a:headEnd type="none" w="med" len="med"/>
+                      <a:tailEnd type="none" w="med" len="med"/>
+                    </a:lnR>
+                    <a:lnT w="12700" cap="flat" cmpd="sng" algn="ctr">
+                      <a:solidFill>
+                        <a:schemeClr val="tx1"/>
+                      </a:solidFill>
+                      <a:prstDash val="solid"/>
+                      <a:round/>
+                      <a:headEnd type="none" w="med" len="med"/>
+                      <a:tailEnd type="none" w="med" len="med"/>
+                    </a:lnT>
+                    <a:lnB w="12700" cap="flat" cmpd="sng" algn="ctr">
+                      <a:solidFill>
+                        <a:schemeClr val="tx1"/>
+                      </a:solidFill>
+                      <a:prstDash val="solid"/>
+                      <a:round/>
+                      <a:headEnd type="none" w="med" len="med"/>
+                      <a:tailEnd type="none" w="med" len="med"/>
+                    </a:lnB>
+                    <a:solidFill>
+                      <a:schemeClr val="accent2"/>
+                    </a:solidFill>
+                  </a:tcPr>
+                </a:tc>
+                <a:tc>
+                  <a:txBody>
+                    <a:bodyPr/>
+                    <a:lstStyle/>
+                    <a:p>
+                      <a:r>
+                        <a:rPr lang="en-US" b="1"/>
+                        <a:t>Storage::delete()</a:t>
+                      </a:r>
+                    </a:p>
+                  </a:txBody>
+                  <a:tcPr anchor="ctr">
+                    <a:lnL w="12700" cap="flat" cmpd="sng" algn="ctr">
+                      <a:solidFill>
+                        <a:schemeClr val="tx1"/>
+                      </a:solidFill>
+                      <a:prstDash val="solid"/>
+                      <a:round/>
+                      <a:headEnd type="none" w="med" len="med"/>
+                      <a:tailEnd type="none" w="med" len="med"/>
+                    </a:lnL>
+                    <a:lnR w="12700" cap="flat" cmpd="sng" algn="ctr">
+                      <a:solidFill>
+                        <a:schemeClr val="tx1"/>
+                      </a:solidFill>
+                      <a:prstDash val="solid"/>
+                      <a:round/>
+                      <a:headEnd type="none" w="med" len="med"/>
+                      <a:tailEnd type="none" w="med" len="med"/>
+                    </a:lnR>
+                    <a:lnT w="12700" cap="flat" cmpd="sng" algn="ctr">
+                      <a:solidFill>
+                        <a:schemeClr val="tx1"/>
+                      </a:solidFill>
+                      <a:prstDash val="solid"/>
+                      <a:round/>
+                      <a:headEnd type="none" w="med" len="med"/>
+                      <a:tailEnd type="none" w="med" len="med"/>
+                    </a:lnT>
+                    <a:lnB w="12700" cap="flat" cmpd="sng" algn="ctr">
+                      <a:solidFill>
+                        <a:schemeClr val="tx1"/>
+                      </a:solidFill>
+                      <a:prstDash val="solid"/>
+                      <a:round/>
+                      <a:headEnd type="none" w="med" len="med"/>
+                      <a:tailEnd type="none" w="med" len="med"/>
+                    </a:lnB>
+                    <a:solidFill>
+                      <a:schemeClr val="accent2"/>
+                    </a:solidFill>
+                  </a:tcPr>
+                </a:tc>
+                <a:extLst>
+                  <a:ext uri="{0D108BD9-81ED-4DB2-BD59-A6C34878D82A}">
+                    <a16:rowId xmlns:a16="http://schemas.microsoft.com/office/drawing/2014/main" val="653464177"/>
+                  </a:ext>
+                </a:extLst>
+              </a:tr>
+              <a:tr h="443392">
+                <a:tc>
+                  <a:txBody>
+                    <a:bodyPr/>
+                    <a:lstStyle/>
+                    <a:p>
+                      <a:r>
+                        <a:rPr lang="pl-PL"/>
+                        <a:t>Fiziki tam yol lazımdır (</a:t>
+                      </a:r>
+                      <a:r>
+                        <a:rPr lang="az-Latn-AZ"/>
+                        <a:t> </a:t>
+                      </a:r>
+                      <a:r>
+                        <a:rPr lang="pl-PL" b="1"/>
+                        <a:t>/var/www/...</a:t>
+                      </a:r>
+                      <a:r>
+                        <a:rPr lang="az-Latn-AZ" b="1"/>
+                        <a:t> </a:t>
+                      </a:r>
+                      <a:r>
+                        <a:rPr lang="pl-PL"/>
+                        <a:t>)</a:t>
+                      </a:r>
+                    </a:p>
+                  </a:txBody>
+                  <a:tcPr anchor="ctr">
+                    <a:lnL w="12700" cap="flat" cmpd="sng" algn="ctr">
+                      <a:solidFill>
+                        <a:schemeClr val="tx1"/>
+                      </a:solidFill>
+                      <a:prstDash val="solid"/>
+                      <a:round/>
+                      <a:headEnd type="none" w="med" len="med"/>
+                      <a:tailEnd type="none" w="med" len="med"/>
+                    </a:lnL>
+                    <a:lnR w="12700" cap="flat" cmpd="sng" algn="ctr">
+                      <a:solidFill>
+                        <a:schemeClr val="tx1"/>
+                      </a:solidFill>
+                      <a:prstDash val="solid"/>
+                      <a:round/>
+                      <a:headEnd type="none" w="med" len="med"/>
+                      <a:tailEnd type="none" w="med" len="med"/>
+                    </a:lnR>
+                    <a:lnT w="12700" cap="flat" cmpd="sng" algn="ctr">
+                      <a:solidFill>
+                        <a:schemeClr val="tx1"/>
+                      </a:solidFill>
+                      <a:prstDash val="solid"/>
+                      <a:round/>
+                      <a:headEnd type="none" w="med" len="med"/>
+                      <a:tailEnd type="none" w="med" len="med"/>
+                    </a:lnT>
+                    <a:lnB w="12700" cap="flat" cmpd="sng" algn="ctr">
+                      <a:solidFill>
+                        <a:schemeClr val="tx1"/>
+                      </a:solidFill>
+                      <a:prstDash val="solid"/>
+                      <a:round/>
+                      <a:headEnd type="none" w="med" len="med"/>
+                      <a:tailEnd type="none" w="med" len="med"/>
+                    </a:lnB>
+                    <a:noFill/>
+                  </a:tcPr>
+                </a:tc>
+                <a:tc>
+                  <a:txBody>
+                    <a:bodyPr/>
+                    <a:lstStyle/>
+                    <a:p>
+                      <a:r>
+                        <a:rPr lang="en-US"/>
+                        <a:t>Nisbətən yol verilir (</a:t>
+                      </a:r>
+                      <a:r>
+                        <a:rPr lang="az-Latn-AZ"/>
+                        <a:t> </a:t>
+                      </a:r>
+                      <a:r>
+                        <a:rPr lang="en-US" b="1"/>
+                        <a:t>images/image_3.jpg</a:t>
+                      </a:r>
+                      <a:r>
+                        <a:rPr lang="az-Latn-AZ" b="1"/>
+                        <a:t> </a:t>
+                      </a:r>
+                      <a:r>
+                        <a:rPr lang="en-US"/>
+                        <a:t>)</a:t>
+                      </a:r>
+                    </a:p>
+                  </a:txBody>
+                  <a:tcPr anchor="ctr">
+                    <a:lnL w="12700" cap="flat" cmpd="sng" algn="ctr">
+                      <a:solidFill>
+                        <a:schemeClr val="tx1"/>
+                      </a:solidFill>
+                      <a:prstDash val="solid"/>
+                      <a:round/>
+                      <a:headEnd type="none" w="med" len="med"/>
+                      <a:tailEnd type="none" w="med" len="med"/>
+                    </a:lnL>
+                    <a:lnR w="12700" cap="flat" cmpd="sng" algn="ctr">
+                      <a:solidFill>
+                        <a:schemeClr val="tx1"/>
+                      </a:solidFill>
+                      <a:prstDash val="solid"/>
+                      <a:round/>
+                      <a:headEnd type="none" w="med" len="med"/>
+                      <a:tailEnd type="none" w="med" len="med"/>
+                    </a:lnR>
+                    <a:lnT w="12700" cap="flat" cmpd="sng" algn="ctr">
+                      <a:solidFill>
+                        <a:schemeClr val="tx1"/>
+                      </a:solidFill>
+                      <a:prstDash val="solid"/>
+                      <a:round/>
+                      <a:headEnd type="none" w="med" len="med"/>
+                      <a:tailEnd type="none" w="med" len="med"/>
+                    </a:lnT>
+                    <a:lnB w="12700" cap="flat" cmpd="sng" algn="ctr">
+                      <a:solidFill>
+                        <a:schemeClr val="tx1"/>
+                      </a:solidFill>
+                      <a:prstDash val="solid"/>
+                      <a:round/>
+                      <a:headEnd type="none" w="med" len="med"/>
+                      <a:tailEnd type="none" w="med" len="med"/>
+                    </a:lnB>
+                    <a:noFill/>
+                  </a:tcPr>
+                </a:tc>
+                <a:extLst>
+                  <a:ext uri="{0D108BD9-81ED-4DB2-BD59-A6C34878D82A}">
+                    <a16:rowId xmlns:a16="http://schemas.microsoft.com/office/drawing/2014/main" val="2952340035"/>
+                  </a:ext>
+                </a:extLst>
+              </a:tr>
+              <a:tr h="443392">
+                <a:tc>
+                  <a:txBody>
+                    <a:bodyPr/>
+                    <a:lstStyle/>
+                    <a:p>
+                      <a:r>
+                        <a:rPr lang="en-US"/>
+                        <a:t>Laravel-in </a:t>
+                      </a:r>
+                      <a:r>
+                        <a:rPr lang="en-US" b="1">
+                          <a:solidFill>
+                            <a:srgbClr val="FF0000"/>
+                          </a:solidFill>
+                        </a:rPr>
+                        <a:t>low-level PHP unlink() </a:t>
+                      </a:r>
+                      <a:r>
+                        <a:rPr lang="en-US"/>
+                        <a:t>metodunu əvəzləyir</a:t>
+                      </a:r>
+                    </a:p>
+                  </a:txBody>
+                  <a:tcPr anchor="ctr">
+                    <a:lnL w="12700" cap="flat" cmpd="sng" algn="ctr">
+                      <a:solidFill>
+                        <a:schemeClr val="tx1"/>
+                      </a:solidFill>
+                      <a:prstDash val="solid"/>
+                      <a:round/>
+                      <a:headEnd type="none" w="med" len="med"/>
+                      <a:tailEnd type="none" w="med" len="med"/>
+                    </a:lnL>
+                    <a:lnR w="12700" cap="flat" cmpd="sng" algn="ctr">
+                      <a:solidFill>
+                        <a:schemeClr val="tx1"/>
+                      </a:solidFill>
+                      <a:prstDash val="solid"/>
+                      <a:round/>
+                      <a:headEnd type="none" w="med" len="med"/>
+                      <a:tailEnd type="none" w="med" len="med"/>
+                    </a:lnR>
+                    <a:lnT w="12700" cap="flat" cmpd="sng" algn="ctr">
+                      <a:solidFill>
+                        <a:schemeClr val="tx1"/>
+                      </a:solidFill>
+                      <a:prstDash val="solid"/>
+                      <a:round/>
+                      <a:headEnd type="none" w="med" len="med"/>
+                      <a:tailEnd type="none" w="med" len="med"/>
+                    </a:lnT>
+                    <a:lnB w="12700" cap="flat" cmpd="sng" algn="ctr">
+                      <a:solidFill>
+                        <a:schemeClr val="tx1"/>
+                      </a:solidFill>
+                      <a:prstDash val="solid"/>
+                      <a:round/>
+                      <a:headEnd type="none" w="med" len="med"/>
+                      <a:tailEnd type="none" w="med" len="med"/>
+                    </a:lnB>
+                    <a:noFill/>
+                  </a:tcPr>
+                </a:tc>
+                <a:tc>
+                  <a:txBody>
+                    <a:bodyPr/>
+                    <a:lstStyle/>
+                    <a:p>
+                      <a:r>
+                        <a:rPr lang="sv-SE"/>
+                        <a:t>Laravel-in </a:t>
+                      </a:r>
+                      <a:r>
+                        <a:rPr lang="sv-SE" b="1">
+                          <a:solidFill>
+                            <a:srgbClr val="FF0000"/>
+                          </a:solidFill>
+                        </a:rPr>
+                        <a:t>disk() </a:t>
+                      </a:r>
+                      <a:r>
+                        <a:rPr lang="sv-SE"/>
+                        <a:t>və </a:t>
+                      </a:r>
+                      <a:r>
+                        <a:rPr lang="sv-SE" b="1">
+                          <a:solidFill>
+                            <a:srgbClr val="FF0000"/>
+                          </a:solidFill>
+                        </a:rPr>
+                        <a:t>filesystem</a:t>
+                      </a:r>
+                      <a:r>
+                        <a:rPr lang="sv-SE"/>
+                        <a:t> ayarlarını istifadə edir</a:t>
+                      </a:r>
+                    </a:p>
+                  </a:txBody>
+                  <a:tcPr anchor="ctr">
+                    <a:lnL w="12700" cap="flat" cmpd="sng" algn="ctr">
+                      <a:solidFill>
+                        <a:schemeClr val="tx1"/>
+                      </a:solidFill>
+                      <a:prstDash val="solid"/>
+                      <a:round/>
+                      <a:headEnd type="none" w="med" len="med"/>
+                      <a:tailEnd type="none" w="med" len="med"/>
+                    </a:lnL>
+                    <a:lnR w="12700" cap="flat" cmpd="sng" algn="ctr">
+                      <a:solidFill>
+                        <a:schemeClr val="tx1"/>
+                      </a:solidFill>
+                      <a:prstDash val="solid"/>
+                      <a:round/>
+                      <a:headEnd type="none" w="med" len="med"/>
+                      <a:tailEnd type="none" w="med" len="med"/>
+                    </a:lnR>
+                    <a:lnT w="12700" cap="flat" cmpd="sng" algn="ctr">
+                      <a:solidFill>
+                        <a:schemeClr val="tx1"/>
+                      </a:solidFill>
+                      <a:prstDash val="solid"/>
+                      <a:round/>
+                      <a:headEnd type="none" w="med" len="med"/>
+                      <a:tailEnd type="none" w="med" len="med"/>
+                    </a:lnT>
+                    <a:lnB w="12700" cap="flat" cmpd="sng" algn="ctr">
+                      <a:solidFill>
+                        <a:schemeClr val="tx1"/>
+                      </a:solidFill>
+                      <a:prstDash val="solid"/>
+                      <a:round/>
+                      <a:headEnd type="none" w="med" len="med"/>
+                      <a:tailEnd type="none" w="med" len="med"/>
+                    </a:lnB>
+                    <a:noFill/>
+                  </a:tcPr>
+                </a:tc>
+                <a:extLst>
+                  <a:ext uri="{0D108BD9-81ED-4DB2-BD59-A6C34878D82A}">
+                    <a16:rowId xmlns:a16="http://schemas.microsoft.com/office/drawing/2014/main" val="4279759852"/>
+                  </a:ext>
+                </a:extLst>
+              </a:tr>
+              <a:tr h="443392">
+                <a:tc>
+                  <a:txBody>
+                    <a:bodyPr/>
+                    <a:lstStyle/>
+                    <a:p>
+                      <a:r>
+                        <a:rPr lang="en-US"/>
+                        <a:t>Daha birbaşa və sadədir</a:t>
+                      </a:r>
+                    </a:p>
+                  </a:txBody>
+                  <a:tcPr anchor="ctr">
+                    <a:lnL w="12700" cap="flat" cmpd="sng" algn="ctr">
+                      <a:solidFill>
+                        <a:schemeClr val="tx1"/>
+                      </a:solidFill>
+                      <a:prstDash val="solid"/>
+                      <a:round/>
+                      <a:headEnd type="none" w="med" len="med"/>
+                      <a:tailEnd type="none" w="med" len="med"/>
+                    </a:lnL>
+                    <a:lnR w="12700" cap="flat" cmpd="sng" algn="ctr">
+                      <a:solidFill>
+                        <a:schemeClr val="tx1"/>
+                      </a:solidFill>
+                      <a:prstDash val="solid"/>
+                      <a:round/>
+                      <a:headEnd type="none" w="med" len="med"/>
+                      <a:tailEnd type="none" w="med" len="med"/>
+                    </a:lnR>
+                    <a:lnT w="12700" cap="flat" cmpd="sng" algn="ctr">
+                      <a:solidFill>
+                        <a:schemeClr val="tx1"/>
+                      </a:solidFill>
+                      <a:prstDash val="solid"/>
+                      <a:round/>
+                      <a:headEnd type="none" w="med" len="med"/>
+                      <a:tailEnd type="none" w="med" len="med"/>
+                    </a:lnT>
+                    <a:lnB w="12700" cap="flat" cmpd="sng" algn="ctr">
+                      <a:solidFill>
+                        <a:schemeClr val="tx1"/>
+                      </a:solidFill>
+                      <a:prstDash val="solid"/>
+                      <a:round/>
+                      <a:headEnd type="none" w="med" len="med"/>
+                      <a:tailEnd type="none" w="med" len="med"/>
+                    </a:lnB>
+                    <a:noFill/>
+                  </a:tcPr>
+                </a:tc>
+                <a:tc>
+                  <a:txBody>
+                    <a:bodyPr/>
+                    <a:lstStyle/>
+                    <a:p>
+                      <a:r>
+                        <a:rPr lang="en-US"/>
+                        <a:t>Daha çevik və disk əsaslıdır</a:t>
+                      </a:r>
+                    </a:p>
+                  </a:txBody>
+                  <a:tcPr anchor="ctr">
+                    <a:lnL w="12700" cap="flat" cmpd="sng" algn="ctr">
+                      <a:solidFill>
+                        <a:schemeClr val="tx1"/>
+                      </a:solidFill>
+                      <a:prstDash val="solid"/>
+                      <a:round/>
+                      <a:headEnd type="none" w="med" len="med"/>
+                      <a:tailEnd type="none" w="med" len="med"/>
+                    </a:lnL>
+                    <a:lnR w="12700" cap="flat" cmpd="sng" algn="ctr">
+                      <a:solidFill>
+                        <a:schemeClr val="tx1"/>
+                      </a:solidFill>
+                      <a:prstDash val="solid"/>
+                      <a:round/>
+                      <a:headEnd type="none" w="med" len="med"/>
+                      <a:tailEnd type="none" w="med" len="med"/>
+                    </a:lnR>
+                    <a:lnT w="12700" cap="flat" cmpd="sng" algn="ctr">
+                      <a:solidFill>
+                        <a:schemeClr val="tx1"/>
+                      </a:solidFill>
+                      <a:prstDash val="solid"/>
+                      <a:round/>
+                      <a:headEnd type="none" w="med" len="med"/>
+                      <a:tailEnd type="none" w="med" len="med"/>
+                    </a:lnT>
+                    <a:lnB w="12700" cap="flat" cmpd="sng" algn="ctr">
+                      <a:solidFill>
+                        <a:schemeClr val="tx1"/>
+                      </a:solidFill>
+                      <a:prstDash val="solid"/>
+                      <a:round/>
+                      <a:headEnd type="none" w="med" len="med"/>
+                      <a:tailEnd type="none" w="med" len="med"/>
+                    </a:lnB>
+                    <a:noFill/>
+                  </a:tcPr>
+                </a:tc>
+                <a:extLst>
+                  <a:ext uri="{0D108BD9-81ED-4DB2-BD59-A6C34878D82A}">
+                    <a16:rowId xmlns:a16="http://schemas.microsoft.com/office/drawing/2014/main" val="3478945013"/>
+                  </a:ext>
+                </a:extLst>
+              </a:tr>
+            </a:tbl>
+          </a:graphicData>
+        </a:graphic>
+      </p:graphicFrame>
+      <p:pic>
+        <p:nvPicPr>
+          <p:cNvPr id="5" name="Picture 4">
+            <a:extLst>
+              <a:ext uri="{FF2B5EF4-FFF2-40B4-BE49-F238E27FC236}">
+                <a16:creationId xmlns:a16="http://schemas.microsoft.com/office/drawing/2014/main" id="{0FE690E0-70FB-1441-B011-87BC748CE48B}"/>
+              </a:ext>
+            </a:extLst>
+          </p:cNvPr>
+          <p:cNvPicPr>
+            <a:picLocks noChangeAspect="1"/>
+          </p:cNvPicPr>
+          <p:nvPr/>
+        </p:nvPicPr>
+        <p:blipFill>
+          <a:blip r:embed="rId2"/>
+          <a:stretch>
+            <a:fillRect/>
+          </a:stretch>
+        </p:blipFill>
+        <p:spPr>
+          <a:xfrm>
+            <a:off x="217714" y="3830988"/>
+            <a:ext cx="2572109" cy="495369"/>
+          </a:xfrm>
+          <a:prstGeom prst="rect">
+            <a:avLst/>
+          </a:prstGeom>
+        </p:spPr>
+      </p:pic>
     </p:spTree>
     <p:extLst>
       <p:ext uri="{BB962C8B-B14F-4D97-AF65-F5344CB8AC3E}">
@@ -3570,7 +7982,7 @@
 </p:sld>
 </file>
 
-<file path=ppt/slides/slide4.xml><?xml version="1.0" encoding="utf-8"?>
+<file path=ppt/slides/slide7.xml><?xml version="1.0" encoding="utf-8"?>
 <p:sld xmlns:a="http://schemas.openxmlformats.org/drawingml/2006/main" xmlns:r="http://schemas.openxmlformats.org/officeDocument/2006/relationships" xmlns:p="http://schemas.openxmlformats.org/presentationml/2006/main">
   <p:cSld>
     <p:spTree>
@@ -3608,6 +8020,1520 @@
         <p:spPr>
           <a:xfrm>
             <a:off x="217714" y="255046"/>
+            <a:ext cx="11756571" cy="1855764"/>
+          </a:xfrm>
+          <a:prstGeom prst="rect">
+            <a:avLst/>
+          </a:prstGeom>
+          <a:noFill/>
+        </p:spPr>
+        <p:txBody>
+          <a:bodyPr wrap="square">
+            <a:spAutoFit/>
+          </a:bodyPr>
+          <a:lstStyle/>
+          <a:p>
+            <a:pPr>
+              <a:lnSpc>
+                <a:spcPct val="150000"/>
+              </a:lnSpc>
+              <a:buNone/>
+            </a:pPr>
+            <a:r>
+              <a:rPr kumimoji="0" lang="en-US" altLang="en-US" sz="1300" b="0" i="0" u="none" strike="noStrike" cap="none" normalizeH="0" baseline="0">
+                <a:ln>
+                  <a:noFill/>
+                </a:ln>
+                <a:solidFill>
+                  <a:schemeClr val="tx1"/>
+                </a:solidFill>
+                <a:effectLst/>
+                <a:latin typeface="Arial" panose="020B0604020202020204" pitchFamily="34" charset="0"/>
+              </a:rPr>
+              <a:t>Laravel-dəki bu:  </a:t>
+            </a:r>
+            <a:r>
+              <a:rPr kumimoji="0" lang="en-US" altLang="en-US" sz="1300" b="1" i="0" u="none" strike="noStrike" cap="none" normalizeH="0" baseline="0">
+                <a:ln>
+                  <a:noFill/>
+                </a:ln>
+                <a:solidFill>
+                  <a:srgbClr val="00B050"/>
+                </a:solidFill>
+                <a:effectLst/>
+                <a:latin typeface="Arial" panose="020B0604020202020204" pitchFamily="34" charset="0"/>
+              </a:rPr>
+              <a:t>File::delete($file_path);  </a:t>
+            </a:r>
+            <a:r>
+              <a:rPr kumimoji="0" lang="en-US" altLang="en-US" sz="1300" b="0" i="0" u="none" strike="noStrike" cap="none" normalizeH="0" baseline="0">
+                <a:ln>
+                  <a:noFill/>
+                </a:ln>
+                <a:solidFill>
+                  <a:schemeClr val="tx1"/>
+                </a:solidFill>
+                <a:effectLst/>
+                <a:latin typeface="Arial" panose="020B0604020202020204" pitchFamily="34" charset="0"/>
+              </a:rPr>
+              <a:t>əslində </a:t>
+            </a:r>
+            <a:r>
+              <a:rPr kumimoji="0" lang="en-US" altLang="en-US" sz="1300" b="1" i="0" u="none" strike="noStrike" cap="none" normalizeH="0" baseline="0">
+                <a:ln>
+                  <a:noFill/>
+                </a:ln>
+                <a:solidFill>
+                  <a:srgbClr val="0070C0"/>
+                </a:solidFill>
+                <a:effectLst/>
+                <a:latin typeface="Arial" panose="020B0604020202020204" pitchFamily="34" charset="0"/>
+              </a:rPr>
+              <a:t>unlink() </a:t>
+            </a:r>
+            <a:r>
+              <a:rPr kumimoji="0" lang="en-US" altLang="en-US" sz="1300" b="0" i="0" u="none" strike="noStrike" cap="none" normalizeH="0" baseline="0">
+                <a:ln>
+                  <a:noFill/>
+                </a:ln>
+                <a:solidFill>
+                  <a:schemeClr val="tx1"/>
+                </a:solidFill>
+                <a:effectLst/>
+                <a:latin typeface="Arial" panose="020B0604020202020204" pitchFamily="34" charset="0"/>
+              </a:rPr>
+              <a:t>funksiyasının üstündə yazılmış etibarlı bir qutu (wrapper) kimidir. </a:t>
+            </a:r>
+            <a:r>
+              <a:rPr kumimoji="0" lang="en-US" altLang="en-US" sz="1300" b="1" i="0" u="none" strike="noStrike" cap="none" normalizeH="0" baseline="0">
+                <a:ln>
+                  <a:noFill/>
+                </a:ln>
+                <a:solidFill>
+                  <a:schemeClr val="tx1"/>
+                </a:solidFill>
+                <a:effectLst/>
+                <a:latin typeface="Arial" panose="020B0604020202020204" pitchFamily="34" charset="0"/>
+              </a:rPr>
+              <a:t>File::delete() → unlink() </a:t>
+            </a:r>
+            <a:r>
+              <a:rPr kumimoji="0" lang="en-US" altLang="en-US" sz="1300" b="0" i="0" u="none" strike="noStrike" cap="none" normalizeH="0" baseline="0">
+                <a:ln>
+                  <a:noFill/>
+                </a:ln>
+                <a:solidFill>
+                  <a:schemeClr val="tx1"/>
+                </a:solidFill>
+                <a:effectLst/>
+                <a:latin typeface="Arial" panose="020B0604020202020204" pitchFamily="34" charset="0"/>
+              </a:rPr>
+              <a:t>funksiyasını təhlükəsiz şəkildə çağırır.</a:t>
+            </a:r>
+            <a:endParaRPr kumimoji="0" lang="az-Latn-AZ" altLang="en-US" sz="1300" b="0" i="0" u="none" strike="noStrike" cap="none" normalizeH="0" baseline="0">
+              <a:ln>
+                <a:noFill/>
+              </a:ln>
+              <a:solidFill>
+                <a:schemeClr val="tx1"/>
+              </a:solidFill>
+              <a:effectLst/>
+              <a:latin typeface="Arial" panose="020B0604020202020204" pitchFamily="34" charset="0"/>
+            </a:endParaRPr>
+          </a:p>
+          <a:p>
+            <a:pPr>
+              <a:lnSpc>
+                <a:spcPct val="150000"/>
+              </a:lnSpc>
+              <a:buNone/>
+            </a:pPr>
+            <a:endParaRPr lang="az-Latn-AZ" altLang="en-US" sz="1300">
+              <a:latin typeface="Arial" panose="020B0604020202020204" pitchFamily="34" charset="0"/>
+            </a:endParaRPr>
+          </a:p>
+          <a:p>
+            <a:pPr>
+              <a:lnSpc>
+                <a:spcPct val="150000"/>
+              </a:lnSpc>
+              <a:buNone/>
+            </a:pPr>
+            <a:endParaRPr kumimoji="0" lang="az-Latn-AZ" altLang="en-US" sz="1300" b="0" i="0" u="none" strike="noStrike" cap="none" normalizeH="0" baseline="0">
+              <a:ln>
+                <a:noFill/>
+              </a:ln>
+              <a:solidFill>
+                <a:schemeClr val="tx1"/>
+              </a:solidFill>
+              <a:effectLst/>
+              <a:latin typeface="Arial" panose="020B0604020202020204" pitchFamily="34" charset="0"/>
+            </a:endParaRPr>
+          </a:p>
+          <a:p>
+            <a:pPr>
+              <a:lnSpc>
+                <a:spcPct val="150000"/>
+              </a:lnSpc>
+              <a:buNone/>
+            </a:pPr>
+            <a:endParaRPr lang="az-Latn-AZ" altLang="en-US" sz="1300">
+              <a:latin typeface="Arial" panose="020B0604020202020204" pitchFamily="34" charset="0"/>
+            </a:endParaRPr>
+          </a:p>
+          <a:p>
+            <a:pPr>
+              <a:lnSpc>
+                <a:spcPct val="150000"/>
+              </a:lnSpc>
+              <a:buNone/>
+            </a:pPr>
+            <a:endParaRPr kumimoji="0" lang="en-US" altLang="en-US" sz="1300" b="0" i="0" u="none" strike="noStrike" cap="none" normalizeH="0" baseline="0">
+              <a:ln>
+                <a:noFill/>
+              </a:ln>
+              <a:solidFill>
+                <a:schemeClr val="tx1"/>
+              </a:solidFill>
+              <a:effectLst/>
+              <a:latin typeface="Arial" panose="020B0604020202020204" pitchFamily="34" charset="0"/>
+            </a:endParaRPr>
+          </a:p>
+        </p:txBody>
+      </p:sp>
+      <p:graphicFrame>
+        <p:nvGraphicFramePr>
+          <p:cNvPr id="4" name="Table 3">
+            <a:extLst>
+              <a:ext uri="{FF2B5EF4-FFF2-40B4-BE49-F238E27FC236}">
+                <a16:creationId xmlns:a16="http://schemas.microsoft.com/office/drawing/2014/main" id="{B4A87BFB-92E4-9662-6AEA-BFE595AD6F18}"/>
+              </a:ext>
+            </a:extLst>
+          </p:cNvPr>
+          <p:cNvGraphicFramePr>
+            <a:graphicFrameLocks noGrp="1"/>
+          </p:cNvGraphicFramePr>
+          <p:nvPr>
+            <p:extLst>
+              <p:ext uri="{D42A27DB-BD31-4B8C-83A1-F6EECF244321}">
+                <p14:modId xmlns:p14="http://schemas.microsoft.com/office/powerpoint/2010/main" val="2185978850"/>
+              </p:ext>
+            </p:extLst>
+          </p:nvPr>
+        </p:nvGraphicFramePr>
+        <p:xfrm>
+          <a:off x="217714" y="1244765"/>
+          <a:ext cx="10464537" cy="1732089"/>
+        </p:xfrm>
+        <a:graphic>
+          <a:graphicData uri="http://schemas.openxmlformats.org/drawingml/2006/table">
+            <a:tbl>
+              <a:tblPr/>
+              <a:tblGrid>
+                <a:gridCol w="3488179">
+                  <a:extLst>
+                    <a:ext uri="{9D8B030D-6E8A-4147-A177-3AD203B41FA5}">
+                      <a16:colId xmlns:a16="http://schemas.microsoft.com/office/drawing/2014/main" val="4143292505"/>
+                    </a:ext>
+                  </a:extLst>
+                </a:gridCol>
+                <a:gridCol w="3488179">
+                  <a:extLst>
+                    <a:ext uri="{9D8B030D-6E8A-4147-A177-3AD203B41FA5}">
+                      <a16:colId xmlns:a16="http://schemas.microsoft.com/office/drawing/2014/main" val="182542997"/>
+                    </a:ext>
+                  </a:extLst>
+                </a:gridCol>
+                <a:gridCol w="3488179">
+                  <a:extLst>
+                    <a:ext uri="{9D8B030D-6E8A-4147-A177-3AD203B41FA5}">
+                      <a16:colId xmlns:a16="http://schemas.microsoft.com/office/drawing/2014/main" val="3658571982"/>
+                    </a:ext>
+                  </a:extLst>
+                </a:gridCol>
+              </a:tblGrid>
+              <a:tr h="577363">
+                <a:tc>
+                  <a:txBody>
+                    <a:bodyPr/>
+                    <a:lstStyle/>
+                    <a:p>
+                      <a:r>
+                        <a:rPr lang="en-US" b="1"/>
+                        <a:t>Funksiya</a:t>
+                      </a:r>
+                    </a:p>
+                  </a:txBody>
+                  <a:tcPr anchor="ctr">
+                    <a:lnL w="12700" cap="flat" cmpd="sng" algn="ctr">
+                      <a:solidFill>
+                        <a:schemeClr val="tx1"/>
+                      </a:solidFill>
+                      <a:prstDash val="solid"/>
+                      <a:round/>
+                      <a:headEnd type="none" w="med" len="med"/>
+                      <a:tailEnd type="none" w="med" len="med"/>
+                    </a:lnL>
+                    <a:lnR w="12700" cap="flat" cmpd="sng" algn="ctr">
+                      <a:solidFill>
+                        <a:schemeClr val="tx1"/>
+                      </a:solidFill>
+                      <a:prstDash val="solid"/>
+                      <a:round/>
+                      <a:headEnd type="none" w="med" len="med"/>
+                      <a:tailEnd type="none" w="med" len="med"/>
+                    </a:lnR>
+                    <a:lnT w="12700" cap="flat" cmpd="sng" algn="ctr">
+                      <a:solidFill>
+                        <a:schemeClr val="tx1"/>
+                      </a:solidFill>
+                      <a:prstDash val="solid"/>
+                      <a:round/>
+                      <a:headEnd type="none" w="med" len="med"/>
+                      <a:tailEnd type="none" w="med" len="med"/>
+                    </a:lnT>
+                    <a:lnB w="12700" cap="flat" cmpd="sng" algn="ctr">
+                      <a:solidFill>
+                        <a:schemeClr val="tx1"/>
+                      </a:solidFill>
+                      <a:prstDash val="solid"/>
+                      <a:round/>
+                      <a:headEnd type="none" w="med" len="med"/>
+                      <a:tailEnd type="none" w="med" len="med"/>
+                    </a:lnB>
+                    <a:solidFill>
+                      <a:schemeClr val="accent2"/>
+                    </a:solidFill>
+                  </a:tcPr>
+                </a:tc>
+                <a:tc>
+                  <a:txBody>
+                    <a:bodyPr/>
+                    <a:lstStyle/>
+                    <a:p>
+                      <a:r>
+                        <a:rPr lang="en-US" b="1"/>
+                        <a:t>Fayl yoxdursa nə edir?</a:t>
+                      </a:r>
+                    </a:p>
+                  </a:txBody>
+                  <a:tcPr anchor="ctr">
+                    <a:lnL w="12700" cap="flat" cmpd="sng" algn="ctr">
+                      <a:solidFill>
+                        <a:schemeClr val="tx1"/>
+                      </a:solidFill>
+                      <a:prstDash val="solid"/>
+                      <a:round/>
+                      <a:headEnd type="none" w="med" len="med"/>
+                      <a:tailEnd type="none" w="med" len="med"/>
+                    </a:lnL>
+                    <a:lnR w="12700" cap="flat" cmpd="sng" algn="ctr">
+                      <a:solidFill>
+                        <a:schemeClr val="tx1"/>
+                      </a:solidFill>
+                      <a:prstDash val="solid"/>
+                      <a:round/>
+                      <a:headEnd type="none" w="med" len="med"/>
+                      <a:tailEnd type="none" w="med" len="med"/>
+                    </a:lnR>
+                    <a:lnT w="12700" cap="flat" cmpd="sng" algn="ctr">
+                      <a:solidFill>
+                        <a:schemeClr val="tx1"/>
+                      </a:solidFill>
+                      <a:prstDash val="solid"/>
+                      <a:round/>
+                      <a:headEnd type="none" w="med" len="med"/>
+                      <a:tailEnd type="none" w="med" len="med"/>
+                    </a:lnT>
+                    <a:lnB w="12700" cap="flat" cmpd="sng" algn="ctr">
+                      <a:solidFill>
+                        <a:schemeClr val="tx1"/>
+                      </a:solidFill>
+                      <a:prstDash val="solid"/>
+                      <a:round/>
+                      <a:headEnd type="none" w="med" len="med"/>
+                      <a:tailEnd type="none" w="med" len="med"/>
+                    </a:lnB>
+                    <a:solidFill>
+                      <a:schemeClr val="accent2"/>
+                    </a:solidFill>
+                  </a:tcPr>
+                </a:tc>
+                <a:tc>
+                  <a:txBody>
+                    <a:bodyPr/>
+                    <a:lstStyle/>
+                    <a:p>
+                      <a:r>
+                        <a:rPr lang="en-US" b="1"/>
+                        <a:t>Təhlükəsizdirmi?</a:t>
+                      </a:r>
+                    </a:p>
+                  </a:txBody>
+                  <a:tcPr anchor="ctr">
+                    <a:lnL w="12700" cap="flat" cmpd="sng" algn="ctr">
+                      <a:solidFill>
+                        <a:schemeClr val="tx1"/>
+                      </a:solidFill>
+                      <a:prstDash val="solid"/>
+                      <a:round/>
+                      <a:headEnd type="none" w="med" len="med"/>
+                      <a:tailEnd type="none" w="med" len="med"/>
+                    </a:lnL>
+                    <a:lnR w="12700" cap="flat" cmpd="sng" algn="ctr">
+                      <a:solidFill>
+                        <a:schemeClr val="tx1"/>
+                      </a:solidFill>
+                      <a:prstDash val="solid"/>
+                      <a:round/>
+                      <a:headEnd type="none" w="med" len="med"/>
+                      <a:tailEnd type="none" w="med" len="med"/>
+                    </a:lnR>
+                    <a:lnT w="12700" cap="flat" cmpd="sng" algn="ctr">
+                      <a:solidFill>
+                        <a:schemeClr val="tx1"/>
+                      </a:solidFill>
+                      <a:prstDash val="solid"/>
+                      <a:round/>
+                      <a:headEnd type="none" w="med" len="med"/>
+                      <a:tailEnd type="none" w="med" len="med"/>
+                    </a:lnT>
+                    <a:lnB w="12700" cap="flat" cmpd="sng" algn="ctr">
+                      <a:solidFill>
+                        <a:schemeClr val="tx1"/>
+                      </a:solidFill>
+                      <a:prstDash val="solid"/>
+                      <a:round/>
+                      <a:headEnd type="none" w="med" len="med"/>
+                      <a:tailEnd type="none" w="med" len="med"/>
+                    </a:lnB>
+                    <a:solidFill>
+                      <a:schemeClr val="accent2"/>
+                    </a:solidFill>
+                  </a:tcPr>
+                </a:tc>
+                <a:extLst>
+                  <a:ext uri="{0D108BD9-81ED-4DB2-BD59-A6C34878D82A}">
+                    <a16:rowId xmlns:a16="http://schemas.microsoft.com/office/drawing/2014/main" val="959350208"/>
+                  </a:ext>
+                </a:extLst>
+              </a:tr>
+              <a:tr h="577363">
+                <a:tc>
+                  <a:txBody>
+                    <a:bodyPr/>
+                    <a:lstStyle/>
+                    <a:p>
+                      <a:r>
+                        <a:rPr lang="en-US"/>
+                        <a:t>unlink()</a:t>
+                      </a:r>
+                    </a:p>
+                  </a:txBody>
+                  <a:tcPr anchor="ctr">
+                    <a:lnL w="12700" cap="flat" cmpd="sng" algn="ctr">
+                      <a:solidFill>
+                        <a:schemeClr val="tx1"/>
+                      </a:solidFill>
+                      <a:prstDash val="solid"/>
+                      <a:round/>
+                      <a:headEnd type="none" w="med" len="med"/>
+                      <a:tailEnd type="none" w="med" len="med"/>
+                    </a:lnL>
+                    <a:lnR w="12700" cap="flat" cmpd="sng" algn="ctr">
+                      <a:solidFill>
+                        <a:schemeClr val="tx1"/>
+                      </a:solidFill>
+                      <a:prstDash val="solid"/>
+                      <a:round/>
+                      <a:headEnd type="none" w="med" len="med"/>
+                      <a:tailEnd type="none" w="med" len="med"/>
+                    </a:lnR>
+                    <a:lnT w="12700" cap="flat" cmpd="sng" algn="ctr">
+                      <a:solidFill>
+                        <a:schemeClr val="tx1"/>
+                      </a:solidFill>
+                      <a:prstDash val="solid"/>
+                      <a:round/>
+                      <a:headEnd type="none" w="med" len="med"/>
+                      <a:tailEnd type="none" w="med" len="med"/>
+                    </a:lnT>
+                    <a:lnB w="12700" cap="flat" cmpd="sng" algn="ctr">
+                      <a:solidFill>
+                        <a:schemeClr val="tx1"/>
+                      </a:solidFill>
+                      <a:prstDash val="solid"/>
+                      <a:round/>
+                      <a:headEnd type="none" w="med" len="med"/>
+                      <a:tailEnd type="none" w="med" len="med"/>
+                    </a:lnB>
+                    <a:noFill/>
+                  </a:tcPr>
+                </a:tc>
+                <a:tc>
+                  <a:txBody>
+                    <a:bodyPr/>
+                    <a:lstStyle/>
+                    <a:p>
+                      <a:r>
+                        <a:rPr lang="en-US"/>
+                        <a:t>XƏTA atır (Warning)</a:t>
+                      </a:r>
+                    </a:p>
+                  </a:txBody>
+                  <a:tcPr anchor="ctr">
+                    <a:lnL w="12700" cap="flat" cmpd="sng" algn="ctr">
+                      <a:solidFill>
+                        <a:schemeClr val="tx1"/>
+                      </a:solidFill>
+                      <a:prstDash val="solid"/>
+                      <a:round/>
+                      <a:headEnd type="none" w="med" len="med"/>
+                      <a:tailEnd type="none" w="med" len="med"/>
+                    </a:lnL>
+                    <a:lnR w="12700" cap="flat" cmpd="sng" algn="ctr">
+                      <a:solidFill>
+                        <a:schemeClr val="tx1"/>
+                      </a:solidFill>
+                      <a:prstDash val="solid"/>
+                      <a:round/>
+                      <a:headEnd type="none" w="med" len="med"/>
+                      <a:tailEnd type="none" w="med" len="med"/>
+                    </a:lnR>
+                    <a:lnT w="12700" cap="flat" cmpd="sng" algn="ctr">
+                      <a:solidFill>
+                        <a:schemeClr val="tx1"/>
+                      </a:solidFill>
+                      <a:prstDash val="solid"/>
+                      <a:round/>
+                      <a:headEnd type="none" w="med" len="med"/>
+                      <a:tailEnd type="none" w="med" len="med"/>
+                    </a:lnT>
+                    <a:lnB w="12700" cap="flat" cmpd="sng" algn="ctr">
+                      <a:solidFill>
+                        <a:schemeClr val="tx1"/>
+                      </a:solidFill>
+                      <a:prstDash val="solid"/>
+                      <a:round/>
+                      <a:headEnd type="none" w="med" len="med"/>
+                      <a:tailEnd type="none" w="med" len="med"/>
+                    </a:lnB>
+                    <a:noFill/>
+                  </a:tcPr>
+                </a:tc>
+                <a:tc>
+                  <a:txBody>
+                    <a:bodyPr/>
+                    <a:lstStyle/>
+                    <a:p>
+                      <a:r>
+                        <a:rPr lang="en-US"/>
+                        <a:t>❌ Yox</a:t>
+                      </a:r>
+                    </a:p>
+                  </a:txBody>
+                  <a:tcPr anchor="ctr">
+                    <a:lnL w="12700" cap="flat" cmpd="sng" algn="ctr">
+                      <a:solidFill>
+                        <a:schemeClr val="tx1"/>
+                      </a:solidFill>
+                      <a:prstDash val="solid"/>
+                      <a:round/>
+                      <a:headEnd type="none" w="med" len="med"/>
+                      <a:tailEnd type="none" w="med" len="med"/>
+                    </a:lnL>
+                    <a:lnR w="12700" cap="flat" cmpd="sng" algn="ctr">
+                      <a:solidFill>
+                        <a:schemeClr val="tx1"/>
+                      </a:solidFill>
+                      <a:prstDash val="solid"/>
+                      <a:round/>
+                      <a:headEnd type="none" w="med" len="med"/>
+                      <a:tailEnd type="none" w="med" len="med"/>
+                    </a:lnR>
+                    <a:lnT w="12700" cap="flat" cmpd="sng" algn="ctr">
+                      <a:solidFill>
+                        <a:schemeClr val="tx1"/>
+                      </a:solidFill>
+                      <a:prstDash val="solid"/>
+                      <a:round/>
+                      <a:headEnd type="none" w="med" len="med"/>
+                      <a:tailEnd type="none" w="med" len="med"/>
+                    </a:lnT>
+                    <a:lnB w="12700" cap="flat" cmpd="sng" algn="ctr">
+                      <a:solidFill>
+                        <a:schemeClr val="tx1"/>
+                      </a:solidFill>
+                      <a:prstDash val="solid"/>
+                      <a:round/>
+                      <a:headEnd type="none" w="med" len="med"/>
+                      <a:tailEnd type="none" w="med" len="med"/>
+                    </a:lnB>
+                    <a:noFill/>
+                  </a:tcPr>
+                </a:tc>
+                <a:extLst>
+                  <a:ext uri="{0D108BD9-81ED-4DB2-BD59-A6C34878D82A}">
+                    <a16:rowId xmlns:a16="http://schemas.microsoft.com/office/drawing/2014/main" val="1488552525"/>
+                  </a:ext>
+                </a:extLst>
+              </a:tr>
+              <a:tr h="577363">
+                <a:tc>
+                  <a:txBody>
+                    <a:bodyPr/>
+                    <a:lstStyle/>
+                    <a:p>
+                      <a:r>
+                        <a:rPr lang="en-US"/>
+                        <a:t>File::delete()</a:t>
+                      </a:r>
+                    </a:p>
+                  </a:txBody>
+                  <a:tcPr anchor="ctr">
+                    <a:lnL w="12700" cap="flat" cmpd="sng" algn="ctr">
+                      <a:solidFill>
+                        <a:schemeClr val="tx1"/>
+                      </a:solidFill>
+                      <a:prstDash val="solid"/>
+                      <a:round/>
+                      <a:headEnd type="none" w="med" len="med"/>
+                      <a:tailEnd type="none" w="med" len="med"/>
+                    </a:lnL>
+                    <a:lnR w="12700" cap="flat" cmpd="sng" algn="ctr">
+                      <a:solidFill>
+                        <a:schemeClr val="tx1"/>
+                      </a:solidFill>
+                      <a:prstDash val="solid"/>
+                      <a:round/>
+                      <a:headEnd type="none" w="med" len="med"/>
+                      <a:tailEnd type="none" w="med" len="med"/>
+                    </a:lnR>
+                    <a:lnT w="12700" cap="flat" cmpd="sng" algn="ctr">
+                      <a:solidFill>
+                        <a:schemeClr val="tx1"/>
+                      </a:solidFill>
+                      <a:prstDash val="solid"/>
+                      <a:round/>
+                      <a:headEnd type="none" w="med" len="med"/>
+                      <a:tailEnd type="none" w="med" len="med"/>
+                    </a:lnT>
+                    <a:lnB w="12700" cap="flat" cmpd="sng" algn="ctr">
+                      <a:solidFill>
+                        <a:schemeClr val="tx1"/>
+                      </a:solidFill>
+                      <a:prstDash val="solid"/>
+                      <a:round/>
+                      <a:headEnd type="none" w="med" len="med"/>
+                      <a:tailEnd type="none" w="med" len="med"/>
+                    </a:lnB>
+                    <a:noFill/>
+                  </a:tcPr>
+                </a:tc>
+                <a:tc>
+                  <a:txBody>
+                    <a:bodyPr/>
+                    <a:lstStyle/>
+                    <a:p>
+                      <a:r>
+                        <a:rPr lang="en-US"/>
+                        <a:t>Səssizcə heç nə etmir</a:t>
+                      </a:r>
+                    </a:p>
+                  </a:txBody>
+                  <a:tcPr anchor="ctr">
+                    <a:lnL w="12700" cap="flat" cmpd="sng" algn="ctr">
+                      <a:solidFill>
+                        <a:schemeClr val="tx1"/>
+                      </a:solidFill>
+                      <a:prstDash val="solid"/>
+                      <a:round/>
+                      <a:headEnd type="none" w="med" len="med"/>
+                      <a:tailEnd type="none" w="med" len="med"/>
+                    </a:lnL>
+                    <a:lnR w="12700" cap="flat" cmpd="sng" algn="ctr">
+                      <a:solidFill>
+                        <a:schemeClr val="tx1"/>
+                      </a:solidFill>
+                      <a:prstDash val="solid"/>
+                      <a:round/>
+                      <a:headEnd type="none" w="med" len="med"/>
+                      <a:tailEnd type="none" w="med" len="med"/>
+                    </a:lnR>
+                    <a:lnT w="12700" cap="flat" cmpd="sng" algn="ctr">
+                      <a:solidFill>
+                        <a:schemeClr val="tx1"/>
+                      </a:solidFill>
+                      <a:prstDash val="solid"/>
+                      <a:round/>
+                      <a:headEnd type="none" w="med" len="med"/>
+                      <a:tailEnd type="none" w="med" len="med"/>
+                    </a:lnT>
+                    <a:lnB w="12700" cap="flat" cmpd="sng" algn="ctr">
+                      <a:solidFill>
+                        <a:schemeClr val="tx1"/>
+                      </a:solidFill>
+                      <a:prstDash val="solid"/>
+                      <a:round/>
+                      <a:headEnd type="none" w="med" len="med"/>
+                      <a:tailEnd type="none" w="med" len="med"/>
+                    </a:lnB>
+                    <a:noFill/>
+                  </a:tcPr>
+                </a:tc>
+                <a:tc>
+                  <a:txBody>
+                    <a:bodyPr/>
+                    <a:lstStyle/>
+                    <a:p>
+                      <a:r>
+                        <a:rPr lang="en-US"/>
+                        <a:t>✅ Bəli (safe wrapper)</a:t>
+                      </a:r>
+                    </a:p>
+                  </a:txBody>
+                  <a:tcPr anchor="ctr">
+                    <a:lnL w="12700" cap="flat" cmpd="sng" algn="ctr">
+                      <a:solidFill>
+                        <a:schemeClr val="tx1"/>
+                      </a:solidFill>
+                      <a:prstDash val="solid"/>
+                      <a:round/>
+                      <a:headEnd type="none" w="med" len="med"/>
+                      <a:tailEnd type="none" w="med" len="med"/>
+                    </a:lnL>
+                    <a:lnR w="12700" cap="flat" cmpd="sng" algn="ctr">
+                      <a:solidFill>
+                        <a:schemeClr val="tx1"/>
+                      </a:solidFill>
+                      <a:prstDash val="solid"/>
+                      <a:round/>
+                      <a:headEnd type="none" w="med" len="med"/>
+                      <a:tailEnd type="none" w="med" len="med"/>
+                    </a:lnR>
+                    <a:lnT w="12700" cap="flat" cmpd="sng" algn="ctr">
+                      <a:solidFill>
+                        <a:schemeClr val="tx1"/>
+                      </a:solidFill>
+                      <a:prstDash val="solid"/>
+                      <a:round/>
+                      <a:headEnd type="none" w="med" len="med"/>
+                      <a:tailEnd type="none" w="med" len="med"/>
+                    </a:lnT>
+                    <a:lnB w="12700" cap="flat" cmpd="sng" algn="ctr">
+                      <a:solidFill>
+                        <a:schemeClr val="tx1"/>
+                      </a:solidFill>
+                      <a:prstDash val="solid"/>
+                      <a:round/>
+                      <a:headEnd type="none" w="med" len="med"/>
+                      <a:tailEnd type="none" w="med" len="med"/>
+                    </a:lnB>
+                    <a:noFill/>
+                  </a:tcPr>
+                </a:tc>
+                <a:extLst>
+                  <a:ext uri="{0D108BD9-81ED-4DB2-BD59-A6C34878D82A}">
+                    <a16:rowId xmlns:a16="http://schemas.microsoft.com/office/drawing/2014/main" val="3338474632"/>
+                  </a:ext>
+                </a:extLst>
+              </a:tr>
+            </a:tbl>
+          </a:graphicData>
+        </a:graphic>
+      </p:graphicFrame>
+    </p:spTree>
+    <p:extLst>
+      <p:ext uri="{BB962C8B-B14F-4D97-AF65-F5344CB8AC3E}">
+        <p14:creationId xmlns:p14="http://schemas.microsoft.com/office/powerpoint/2010/main" val="3095838342"/>
+      </p:ext>
+    </p:extLst>
+  </p:cSld>
+  <p:clrMapOvr>
+    <a:masterClrMapping/>
+  </p:clrMapOvr>
+</p:sld>
+</file>
+
+<file path=ppt/slides/slide8.xml><?xml version="1.0" encoding="utf-8"?>
+<p:sld xmlns:a="http://schemas.openxmlformats.org/drawingml/2006/main" xmlns:r="http://schemas.openxmlformats.org/officeDocument/2006/relationships" xmlns:p="http://schemas.openxmlformats.org/presentationml/2006/main">
+  <p:cSld>
+    <p:spTree>
+      <p:nvGrpSpPr>
+        <p:cNvPr id="1" name="">
+          <a:extLst>
+            <a:ext uri="{FF2B5EF4-FFF2-40B4-BE49-F238E27FC236}">
+              <a16:creationId xmlns:a16="http://schemas.microsoft.com/office/drawing/2014/main" id="{D61F6DC9-EEE6-430C-EA74-6EEEF46D268C}"/>
+            </a:ext>
+          </a:extLst>
+        </p:cNvPr>
+        <p:cNvGrpSpPr/>
+        <p:nvPr/>
+      </p:nvGrpSpPr>
+      <p:grpSpPr>
+        <a:xfrm>
+          <a:off x="0" y="0"/>
+          <a:ext cx="0" cy="0"/>
+          <a:chOff x="0" y="0"/>
+          <a:chExt cx="0" cy="0"/>
+        </a:xfrm>
+      </p:grpSpPr>
+      <p:sp>
+        <p:nvSpPr>
+          <p:cNvPr id="3" name="TextBox 2">
+            <a:extLst>
+              <a:ext uri="{FF2B5EF4-FFF2-40B4-BE49-F238E27FC236}">
+                <a16:creationId xmlns:a16="http://schemas.microsoft.com/office/drawing/2014/main" id="{14CDD776-84B2-8439-DABC-EE788D11BD24}"/>
+              </a:ext>
+            </a:extLst>
+          </p:cNvPr>
+          <p:cNvSpPr txBox="1"/>
+          <p:nvPr/>
+        </p:nvSpPr>
+        <p:spPr>
+          <a:xfrm>
+            <a:off x="217714" y="255046"/>
+            <a:ext cx="11756571" cy="955518"/>
+          </a:xfrm>
+          <a:prstGeom prst="rect">
+            <a:avLst/>
+          </a:prstGeom>
+          <a:noFill/>
+        </p:spPr>
+        <p:txBody>
+          <a:bodyPr wrap="square">
+            <a:spAutoFit/>
+          </a:bodyPr>
+          <a:lstStyle/>
+          <a:p>
+            <a:pPr>
+              <a:lnSpc>
+                <a:spcPct val="150000"/>
+              </a:lnSpc>
+              <a:buNone/>
+            </a:pPr>
+            <a:r>
+              <a:rPr kumimoji="0" lang="en-US" altLang="en-US" sz="1300" b="1" i="0" u="none" strike="noStrike" cap="none" normalizeH="0" baseline="0">
+                <a:ln>
+                  <a:noFill/>
+                </a:ln>
+                <a:solidFill>
+                  <a:srgbClr val="00B050"/>
+                </a:solidFill>
+                <a:effectLst/>
+                <a:latin typeface="Arial" panose="020B0604020202020204" pitchFamily="34" charset="0"/>
+              </a:rPr>
+              <a:t>File::delete(...) </a:t>
+            </a:r>
+            <a:r>
+              <a:rPr kumimoji="0" lang="en-US" altLang="en-US" sz="1300" b="0" i="0" u="none" strike="noStrike" cap="none" normalizeH="0" baseline="0">
+                <a:ln>
+                  <a:noFill/>
+                </a:ln>
+                <a:solidFill>
+                  <a:schemeClr val="tx1"/>
+                </a:solidFill>
+                <a:effectLst/>
+                <a:latin typeface="Arial" panose="020B0604020202020204" pitchFamily="34" charset="0"/>
+              </a:rPr>
+              <a:t>və </a:t>
+            </a:r>
+            <a:r>
+              <a:rPr kumimoji="0" lang="en-US" altLang="en-US" sz="1300" b="1" i="0" u="none" strike="noStrike" cap="none" normalizeH="0" baseline="0">
+                <a:ln>
+                  <a:noFill/>
+                </a:ln>
+                <a:solidFill>
+                  <a:srgbClr val="0070C0"/>
+                </a:solidFill>
+                <a:effectLst/>
+                <a:latin typeface="Arial" panose="020B0604020202020204" pitchFamily="34" charset="0"/>
+              </a:rPr>
+              <a:t>Storage::delete(...) </a:t>
+            </a:r>
+            <a:r>
+              <a:rPr kumimoji="0" lang="en-US" altLang="en-US" sz="1300" b="0" i="0" u="none" strike="noStrike" cap="none" normalizeH="0" baseline="0">
+                <a:ln>
+                  <a:noFill/>
+                </a:ln>
+                <a:solidFill>
+                  <a:schemeClr val="tx1"/>
+                </a:solidFill>
+                <a:effectLst/>
+                <a:latin typeface="Arial" panose="020B0604020202020204" pitchFamily="34" charset="0"/>
+              </a:rPr>
+              <a:t>fayl yoxdursa nə edir?</a:t>
+            </a:r>
+            <a:endParaRPr kumimoji="0" lang="az-Latn-AZ" altLang="en-US" sz="1300" b="0" i="0" u="none" strike="noStrike" cap="none" normalizeH="0" baseline="0">
+              <a:ln>
+                <a:noFill/>
+              </a:ln>
+              <a:solidFill>
+                <a:schemeClr val="tx1"/>
+              </a:solidFill>
+              <a:effectLst/>
+              <a:latin typeface="Arial" panose="020B0604020202020204" pitchFamily="34" charset="0"/>
+            </a:endParaRPr>
+          </a:p>
+          <a:p>
+            <a:pPr>
+              <a:lnSpc>
+                <a:spcPct val="150000"/>
+              </a:lnSpc>
+              <a:buNone/>
+            </a:pPr>
+            <a:endParaRPr kumimoji="0" lang="en-US" altLang="en-US" sz="1300" b="0" i="0" u="none" strike="noStrike" cap="none" normalizeH="0" baseline="0">
+              <a:ln>
+                <a:noFill/>
+              </a:ln>
+              <a:solidFill>
+                <a:schemeClr val="tx1"/>
+              </a:solidFill>
+              <a:effectLst/>
+              <a:latin typeface="Arial" panose="020B0604020202020204" pitchFamily="34" charset="0"/>
+            </a:endParaRPr>
+          </a:p>
+          <a:p>
+            <a:pPr>
+              <a:lnSpc>
+                <a:spcPct val="150000"/>
+              </a:lnSpc>
+              <a:buNone/>
+            </a:pPr>
+            <a:r>
+              <a:rPr kumimoji="0" lang="en-US" altLang="en-US" sz="1300" b="0" i="0" u="none" strike="noStrike" cap="none" normalizeH="0" baseline="0">
+                <a:ln>
+                  <a:noFill/>
+                </a:ln>
+                <a:solidFill>
+                  <a:schemeClr val="tx1"/>
+                </a:solidFill>
+                <a:effectLst/>
+                <a:latin typeface="Arial" panose="020B0604020202020204" pitchFamily="34" charset="0"/>
+              </a:rPr>
+              <a:t>Hər ikisi də fayl mövcud deyilsə — sadəcə </a:t>
+            </a:r>
+            <a:r>
+              <a:rPr kumimoji="0" lang="en-US" altLang="en-US" sz="1300" b="1" i="0" u="none" strike="noStrike" cap="none" normalizeH="0" baseline="0">
+                <a:ln>
+                  <a:noFill/>
+                </a:ln>
+                <a:solidFill>
+                  <a:schemeClr val="tx1"/>
+                </a:solidFill>
+                <a:effectLst/>
+                <a:latin typeface="Arial" panose="020B0604020202020204" pitchFamily="34" charset="0"/>
+              </a:rPr>
+              <a:t>false</a:t>
+            </a:r>
+            <a:r>
+              <a:rPr kumimoji="0" lang="en-US" altLang="en-US" sz="1300" b="0" i="0" u="none" strike="noStrike" cap="none" normalizeH="0" baseline="0">
+                <a:ln>
+                  <a:noFill/>
+                </a:ln>
+                <a:solidFill>
+                  <a:schemeClr val="tx1"/>
+                </a:solidFill>
+                <a:effectLst/>
+                <a:latin typeface="Arial" panose="020B0604020202020204" pitchFamily="34" charset="0"/>
+              </a:rPr>
+              <a:t> qaytarır, amma xəta atmır.</a:t>
+            </a:r>
+          </a:p>
+        </p:txBody>
+      </p:sp>
+      <p:graphicFrame>
+        <p:nvGraphicFramePr>
+          <p:cNvPr id="4" name="Table 3">
+            <a:extLst>
+              <a:ext uri="{FF2B5EF4-FFF2-40B4-BE49-F238E27FC236}">
+                <a16:creationId xmlns:a16="http://schemas.microsoft.com/office/drawing/2014/main" id="{46F604BE-42EA-2F80-0861-BC9658249EA1}"/>
+              </a:ext>
+            </a:extLst>
+          </p:cNvPr>
+          <p:cNvGraphicFramePr>
+            <a:graphicFrameLocks noGrp="1"/>
+          </p:cNvGraphicFramePr>
+          <p:nvPr>
+            <p:extLst>
+              <p:ext uri="{D42A27DB-BD31-4B8C-83A1-F6EECF244321}">
+                <p14:modId xmlns:p14="http://schemas.microsoft.com/office/powerpoint/2010/main" val="3151994396"/>
+              </p:ext>
+            </p:extLst>
+          </p:nvPr>
+        </p:nvGraphicFramePr>
+        <p:xfrm>
+          <a:off x="217714" y="1539012"/>
+          <a:ext cx="10587087" cy="1666101"/>
+        </p:xfrm>
+        <a:graphic>
+          <a:graphicData uri="http://schemas.openxmlformats.org/drawingml/2006/table">
+            <a:tbl>
+              <a:tblPr/>
+              <a:tblGrid>
+                <a:gridCol w="3529029">
+                  <a:extLst>
+                    <a:ext uri="{9D8B030D-6E8A-4147-A177-3AD203B41FA5}">
+                      <a16:colId xmlns:a16="http://schemas.microsoft.com/office/drawing/2014/main" val="2820549521"/>
+                    </a:ext>
+                  </a:extLst>
+                </a:gridCol>
+                <a:gridCol w="3529029">
+                  <a:extLst>
+                    <a:ext uri="{9D8B030D-6E8A-4147-A177-3AD203B41FA5}">
+                      <a16:colId xmlns:a16="http://schemas.microsoft.com/office/drawing/2014/main" val="1378768818"/>
+                    </a:ext>
+                  </a:extLst>
+                </a:gridCol>
+                <a:gridCol w="3529029">
+                  <a:extLst>
+                    <a:ext uri="{9D8B030D-6E8A-4147-A177-3AD203B41FA5}">
+                      <a16:colId xmlns:a16="http://schemas.microsoft.com/office/drawing/2014/main" val="1191023449"/>
+                    </a:ext>
+                  </a:extLst>
+                </a:gridCol>
+              </a:tblGrid>
+              <a:tr h="555367">
+                <a:tc>
+                  <a:txBody>
+                    <a:bodyPr/>
+                    <a:lstStyle/>
+                    <a:p>
+                      <a:r>
+                        <a:rPr lang="en-US" b="1"/>
+                        <a:t>Metod</a:t>
+                      </a:r>
+                    </a:p>
+                  </a:txBody>
+                  <a:tcPr anchor="ctr">
+                    <a:lnL w="12700" cap="flat" cmpd="sng" algn="ctr">
+                      <a:solidFill>
+                        <a:schemeClr val="tx1"/>
+                      </a:solidFill>
+                      <a:prstDash val="solid"/>
+                      <a:round/>
+                      <a:headEnd type="none" w="med" len="med"/>
+                      <a:tailEnd type="none" w="med" len="med"/>
+                    </a:lnL>
+                    <a:lnR w="12700" cap="flat" cmpd="sng" algn="ctr">
+                      <a:solidFill>
+                        <a:schemeClr val="tx1"/>
+                      </a:solidFill>
+                      <a:prstDash val="solid"/>
+                      <a:round/>
+                      <a:headEnd type="none" w="med" len="med"/>
+                      <a:tailEnd type="none" w="med" len="med"/>
+                    </a:lnR>
+                    <a:lnT w="12700" cap="flat" cmpd="sng" algn="ctr">
+                      <a:solidFill>
+                        <a:schemeClr val="tx1"/>
+                      </a:solidFill>
+                      <a:prstDash val="solid"/>
+                      <a:round/>
+                      <a:headEnd type="none" w="med" len="med"/>
+                      <a:tailEnd type="none" w="med" len="med"/>
+                    </a:lnT>
+                    <a:lnB w="12700" cap="flat" cmpd="sng" algn="ctr">
+                      <a:solidFill>
+                        <a:schemeClr val="tx1"/>
+                      </a:solidFill>
+                      <a:prstDash val="solid"/>
+                      <a:round/>
+                      <a:headEnd type="none" w="med" len="med"/>
+                      <a:tailEnd type="none" w="med" len="med"/>
+                    </a:lnB>
+                    <a:solidFill>
+                      <a:schemeClr val="accent2"/>
+                    </a:solidFill>
+                  </a:tcPr>
+                </a:tc>
+                <a:tc>
+                  <a:txBody>
+                    <a:bodyPr/>
+                    <a:lstStyle/>
+                    <a:p>
+                      <a:r>
+                        <a:rPr lang="en-US" b="1"/>
+                        <a:t>Fayl yoxdursa nəticə</a:t>
+                      </a:r>
+                    </a:p>
+                  </a:txBody>
+                  <a:tcPr anchor="ctr">
+                    <a:lnL w="12700" cap="flat" cmpd="sng" algn="ctr">
+                      <a:solidFill>
+                        <a:schemeClr val="tx1"/>
+                      </a:solidFill>
+                      <a:prstDash val="solid"/>
+                      <a:round/>
+                      <a:headEnd type="none" w="med" len="med"/>
+                      <a:tailEnd type="none" w="med" len="med"/>
+                    </a:lnL>
+                    <a:lnR w="12700" cap="flat" cmpd="sng" algn="ctr">
+                      <a:solidFill>
+                        <a:schemeClr val="tx1"/>
+                      </a:solidFill>
+                      <a:prstDash val="solid"/>
+                      <a:round/>
+                      <a:headEnd type="none" w="med" len="med"/>
+                      <a:tailEnd type="none" w="med" len="med"/>
+                    </a:lnR>
+                    <a:lnT w="12700" cap="flat" cmpd="sng" algn="ctr">
+                      <a:solidFill>
+                        <a:schemeClr val="tx1"/>
+                      </a:solidFill>
+                      <a:prstDash val="solid"/>
+                      <a:round/>
+                      <a:headEnd type="none" w="med" len="med"/>
+                      <a:tailEnd type="none" w="med" len="med"/>
+                    </a:lnT>
+                    <a:lnB w="12700" cap="flat" cmpd="sng" algn="ctr">
+                      <a:solidFill>
+                        <a:schemeClr val="tx1"/>
+                      </a:solidFill>
+                      <a:prstDash val="solid"/>
+                      <a:round/>
+                      <a:headEnd type="none" w="med" len="med"/>
+                      <a:tailEnd type="none" w="med" len="med"/>
+                    </a:lnB>
+                    <a:solidFill>
+                      <a:schemeClr val="accent2"/>
+                    </a:solidFill>
+                  </a:tcPr>
+                </a:tc>
+                <a:tc>
+                  <a:txBody>
+                    <a:bodyPr/>
+                    <a:lstStyle/>
+                    <a:p>
+                      <a:r>
+                        <a:rPr lang="en-US" b="1"/>
+                        <a:t>Exception atır?</a:t>
+                      </a:r>
+                    </a:p>
+                  </a:txBody>
+                  <a:tcPr anchor="ctr">
+                    <a:lnL w="12700" cap="flat" cmpd="sng" algn="ctr">
+                      <a:solidFill>
+                        <a:schemeClr val="tx1"/>
+                      </a:solidFill>
+                      <a:prstDash val="solid"/>
+                      <a:round/>
+                      <a:headEnd type="none" w="med" len="med"/>
+                      <a:tailEnd type="none" w="med" len="med"/>
+                    </a:lnL>
+                    <a:lnR w="12700" cap="flat" cmpd="sng" algn="ctr">
+                      <a:solidFill>
+                        <a:schemeClr val="tx1"/>
+                      </a:solidFill>
+                      <a:prstDash val="solid"/>
+                      <a:round/>
+                      <a:headEnd type="none" w="med" len="med"/>
+                      <a:tailEnd type="none" w="med" len="med"/>
+                    </a:lnR>
+                    <a:lnT w="12700" cap="flat" cmpd="sng" algn="ctr">
+                      <a:solidFill>
+                        <a:schemeClr val="tx1"/>
+                      </a:solidFill>
+                      <a:prstDash val="solid"/>
+                      <a:round/>
+                      <a:headEnd type="none" w="med" len="med"/>
+                      <a:tailEnd type="none" w="med" len="med"/>
+                    </a:lnT>
+                    <a:lnB w="12700" cap="flat" cmpd="sng" algn="ctr">
+                      <a:solidFill>
+                        <a:schemeClr val="tx1"/>
+                      </a:solidFill>
+                      <a:prstDash val="solid"/>
+                      <a:round/>
+                      <a:headEnd type="none" w="med" len="med"/>
+                      <a:tailEnd type="none" w="med" len="med"/>
+                    </a:lnB>
+                    <a:solidFill>
+                      <a:schemeClr val="accent2"/>
+                    </a:solidFill>
+                  </a:tcPr>
+                </a:tc>
+                <a:extLst>
+                  <a:ext uri="{0D108BD9-81ED-4DB2-BD59-A6C34878D82A}">
+                    <a16:rowId xmlns:a16="http://schemas.microsoft.com/office/drawing/2014/main" val="596520735"/>
+                  </a:ext>
+                </a:extLst>
+              </a:tr>
+              <a:tr h="555367">
+                <a:tc>
+                  <a:txBody>
+                    <a:bodyPr/>
+                    <a:lstStyle/>
+                    <a:p>
+                      <a:r>
+                        <a:rPr lang="en-US"/>
+                        <a:t>File::delete($path)</a:t>
+                      </a:r>
+                    </a:p>
+                  </a:txBody>
+                  <a:tcPr anchor="ctr">
+                    <a:lnL w="12700" cap="flat" cmpd="sng" algn="ctr">
+                      <a:solidFill>
+                        <a:schemeClr val="tx1"/>
+                      </a:solidFill>
+                      <a:prstDash val="solid"/>
+                      <a:round/>
+                      <a:headEnd type="none" w="med" len="med"/>
+                      <a:tailEnd type="none" w="med" len="med"/>
+                    </a:lnL>
+                    <a:lnR w="12700" cap="flat" cmpd="sng" algn="ctr">
+                      <a:solidFill>
+                        <a:schemeClr val="tx1"/>
+                      </a:solidFill>
+                      <a:prstDash val="solid"/>
+                      <a:round/>
+                      <a:headEnd type="none" w="med" len="med"/>
+                      <a:tailEnd type="none" w="med" len="med"/>
+                    </a:lnR>
+                    <a:lnT w="12700" cap="flat" cmpd="sng" algn="ctr">
+                      <a:solidFill>
+                        <a:schemeClr val="tx1"/>
+                      </a:solidFill>
+                      <a:prstDash val="solid"/>
+                      <a:round/>
+                      <a:headEnd type="none" w="med" len="med"/>
+                      <a:tailEnd type="none" w="med" len="med"/>
+                    </a:lnT>
+                    <a:lnB w="12700" cap="flat" cmpd="sng" algn="ctr">
+                      <a:solidFill>
+                        <a:schemeClr val="tx1"/>
+                      </a:solidFill>
+                      <a:prstDash val="solid"/>
+                      <a:round/>
+                      <a:headEnd type="none" w="med" len="med"/>
+                      <a:tailEnd type="none" w="med" len="med"/>
+                    </a:lnB>
+                    <a:noFill/>
+                  </a:tcPr>
+                </a:tc>
+                <a:tc>
+                  <a:txBody>
+                    <a:bodyPr/>
+                    <a:lstStyle/>
+                    <a:p>
+                      <a:r>
+                        <a:rPr lang="en-US"/>
+                        <a:t>false</a:t>
+                      </a:r>
+                    </a:p>
+                  </a:txBody>
+                  <a:tcPr anchor="ctr">
+                    <a:lnL w="12700" cap="flat" cmpd="sng" algn="ctr">
+                      <a:solidFill>
+                        <a:schemeClr val="tx1"/>
+                      </a:solidFill>
+                      <a:prstDash val="solid"/>
+                      <a:round/>
+                      <a:headEnd type="none" w="med" len="med"/>
+                      <a:tailEnd type="none" w="med" len="med"/>
+                    </a:lnL>
+                    <a:lnR w="12700" cap="flat" cmpd="sng" algn="ctr">
+                      <a:solidFill>
+                        <a:schemeClr val="tx1"/>
+                      </a:solidFill>
+                      <a:prstDash val="solid"/>
+                      <a:round/>
+                      <a:headEnd type="none" w="med" len="med"/>
+                      <a:tailEnd type="none" w="med" len="med"/>
+                    </a:lnR>
+                    <a:lnT w="12700" cap="flat" cmpd="sng" algn="ctr">
+                      <a:solidFill>
+                        <a:schemeClr val="tx1"/>
+                      </a:solidFill>
+                      <a:prstDash val="solid"/>
+                      <a:round/>
+                      <a:headEnd type="none" w="med" len="med"/>
+                      <a:tailEnd type="none" w="med" len="med"/>
+                    </a:lnT>
+                    <a:lnB w="12700" cap="flat" cmpd="sng" algn="ctr">
+                      <a:solidFill>
+                        <a:schemeClr val="tx1"/>
+                      </a:solidFill>
+                      <a:prstDash val="solid"/>
+                      <a:round/>
+                      <a:headEnd type="none" w="med" len="med"/>
+                      <a:tailEnd type="none" w="med" len="med"/>
+                    </a:lnB>
+                    <a:noFill/>
+                  </a:tcPr>
+                </a:tc>
+                <a:tc>
+                  <a:txBody>
+                    <a:bodyPr/>
+                    <a:lstStyle/>
+                    <a:p>
+                      <a:r>
+                        <a:rPr lang="en-US"/>
+                        <a:t>❌ Xeyr</a:t>
+                      </a:r>
+                    </a:p>
+                  </a:txBody>
+                  <a:tcPr anchor="ctr">
+                    <a:lnL w="12700" cap="flat" cmpd="sng" algn="ctr">
+                      <a:solidFill>
+                        <a:schemeClr val="tx1"/>
+                      </a:solidFill>
+                      <a:prstDash val="solid"/>
+                      <a:round/>
+                      <a:headEnd type="none" w="med" len="med"/>
+                      <a:tailEnd type="none" w="med" len="med"/>
+                    </a:lnL>
+                    <a:lnR w="12700" cap="flat" cmpd="sng" algn="ctr">
+                      <a:solidFill>
+                        <a:schemeClr val="tx1"/>
+                      </a:solidFill>
+                      <a:prstDash val="solid"/>
+                      <a:round/>
+                      <a:headEnd type="none" w="med" len="med"/>
+                      <a:tailEnd type="none" w="med" len="med"/>
+                    </a:lnR>
+                    <a:lnT w="12700" cap="flat" cmpd="sng" algn="ctr">
+                      <a:solidFill>
+                        <a:schemeClr val="tx1"/>
+                      </a:solidFill>
+                      <a:prstDash val="solid"/>
+                      <a:round/>
+                      <a:headEnd type="none" w="med" len="med"/>
+                      <a:tailEnd type="none" w="med" len="med"/>
+                    </a:lnT>
+                    <a:lnB w="12700" cap="flat" cmpd="sng" algn="ctr">
+                      <a:solidFill>
+                        <a:schemeClr val="tx1"/>
+                      </a:solidFill>
+                      <a:prstDash val="solid"/>
+                      <a:round/>
+                      <a:headEnd type="none" w="med" len="med"/>
+                      <a:tailEnd type="none" w="med" len="med"/>
+                    </a:lnB>
+                    <a:noFill/>
+                  </a:tcPr>
+                </a:tc>
+                <a:extLst>
+                  <a:ext uri="{0D108BD9-81ED-4DB2-BD59-A6C34878D82A}">
+                    <a16:rowId xmlns:a16="http://schemas.microsoft.com/office/drawing/2014/main" val="2573689830"/>
+                  </a:ext>
+                </a:extLst>
+              </a:tr>
+              <a:tr h="555367">
+                <a:tc>
+                  <a:txBody>
+                    <a:bodyPr/>
+                    <a:lstStyle/>
+                    <a:p>
+                      <a:r>
+                        <a:rPr lang="en-US"/>
+                        <a:t>Storage::delete($path)</a:t>
+                      </a:r>
+                    </a:p>
+                  </a:txBody>
+                  <a:tcPr anchor="ctr">
+                    <a:lnL w="12700" cap="flat" cmpd="sng" algn="ctr">
+                      <a:solidFill>
+                        <a:schemeClr val="tx1"/>
+                      </a:solidFill>
+                      <a:prstDash val="solid"/>
+                      <a:round/>
+                      <a:headEnd type="none" w="med" len="med"/>
+                      <a:tailEnd type="none" w="med" len="med"/>
+                    </a:lnL>
+                    <a:lnR w="12700" cap="flat" cmpd="sng" algn="ctr">
+                      <a:solidFill>
+                        <a:schemeClr val="tx1"/>
+                      </a:solidFill>
+                      <a:prstDash val="solid"/>
+                      <a:round/>
+                      <a:headEnd type="none" w="med" len="med"/>
+                      <a:tailEnd type="none" w="med" len="med"/>
+                    </a:lnR>
+                    <a:lnT w="12700" cap="flat" cmpd="sng" algn="ctr">
+                      <a:solidFill>
+                        <a:schemeClr val="tx1"/>
+                      </a:solidFill>
+                      <a:prstDash val="solid"/>
+                      <a:round/>
+                      <a:headEnd type="none" w="med" len="med"/>
+                      <a:tailEnd type="none" w="med" len="med"/>
+                    </a:lnT>
+                    <a:lnB w="12700" cap="flat" cmpd="sng" algn="ctr">
+                      <a:solidFill>
+                        <a:schemeClr val="tx1"/>
+                      </a:solidFill>
+                      <a:prstDash val="solid"/>
+                      <a:round/>
+                      <a:headEnd type="none" w="med" len="med"/>
+                      <a:tailEnd type="none" w="med" len="med"/>
+                    </a:lnB>
+                    <a:noFill/>
+                  </a:tcPr>
+                </a:tc>
+                <a:tc>
+                  <a:txBody>
+                    <a:bodyPr/>
+                    <a:lstStyle/>
+                    <a:p>
+                      <a:r>
+                        <a:rPr lang="en-US"/>
+                        <a:t>false</a:t>
+                      </a:r>
+                    </a:p>
+                  </a:txBody>
+                  <a:tcPr anchor="ctr">
+                    <a:lnL w="12700" cap="flat" cmpd="sng" algn="ctr">
+                      <a:solidFill>
+                        <a:schemeClr val="tx1"/>
+                      </a:solidFill>
+                      <a:prstDash val="solid"/>
+                      <a:round/>
+                      <a:headEnd type="none" w="med" len="med"/>
+                      <a:tailEnd type="none" w="med" len="med"/>
+                    </a:lnL>
+                    <a:lnR w="12700" cap="flat" cmpd="sng" algn="ctr">
+                      <a:solidFill>
+                        <a:schemeClr val="tx1"/>
+                      </a:solidFill>
+                      <a:prstDash val="solid"/>
+                      <a:round/>
+                      <a:headEnd type="none" w="med" len="med"/>
+                      <a:tailEnd type="none" w="med" len="med"/>
+                    </a:lnR>
+                    <a:lnT w="12700" cap="flat" cmpd="sng" algn="ctr">
+                      <a:solidFill>
+                        <a:schemeClr val="tx1"/>
+                      </a:solidFill>
+                      <a:prstDash val="solid"/>
+                      <a:round/>
+                      <a:headEnd type="none" w="med" len="med"/>
+                      <a:tailEnd type="none" w="med" len="med"/>
+                    </a:lnT>
+                    <a:lnB w="12700" cap="flat" cmpd="sng" algn="ctr">
+                      <a:solidFill>
+                        <a:schemeClr val="tx1"/>
+                      </a:solidFill>
+                      <a:prstDash val="solid"/>
+                      <a:round/>
+                      <a:headEnd type="none" w="med" len="med"/>
+                      <a:tailEnd type="none" w="med" len="med"/>
+                    </a:lnB>
+                    <a:noFill/>
+                  </a:tcPr>
+                </a:tc>
+                <a:tc>
+                  <a:txBody>
+                    <a:bodyPr/>
+                    <a:lstStyle/>
+                    <a:p>
+                      <a:r>
+                        <a:rPr lang="en-US"/>
+                        <a:t>❌ Xeyr</a:t>
+                      </a:r>
+                    </a:p>
+                  </a:txBody>
+                  <a:tcPr anchor="ctr">
+                    <a:lnL w="12700" cap="flat" cmpd="sng" algn="ctr">
+                      <a:solidFill>
+                        <a:schemeClr val="tx1"/>
+                      </a:solidFill>
+                      <a:prstDash val="solid"/>
+                      <a:round/>
+                      <a:headEnd type="none" w="med" len="med"/>
+                      <a:tailEnd type="none" w="med" len="med"/>
+                    </a:lnL>
+                    <a:lnR w="12700" cap="flat" cmpd="sng" algn="ctr">
+                      <a:solidFill>
+                        <a:schemeClr val="tx1"/>
+                      </a:solidFill>
+                      <a:prstDash val="solid"/>
+                      <a:round/>
+                      <a:headEnd type="none" w="med" len="med"/>
+                      <a:tailEnd type="none" w="med" len="med"/>
+                    </a:lnR>
+                    <a:lnT w="12700" cap="flat" cmpd="sng" algn="ctr">
+                      <a:solidFill>
+                        <a:schemeClr val="tx1"/>
+                      </a:solidFill>
+                      <a:prstDash val="solid"/>
+                      <a:round/>
+                      <a:headEnd type="none" w="med" len="med"/>
+                      <a:tailEnd type="none" w="med" len="med"/>
+                    </a:lnT>
+                    <a:lnB w="12700" cap="flat" cmpd="sng" algn="ctr">
+                      <a:solidFill>
+                        <a:schemeClr val="tx1"/>
+                      </a:solidFill>
+                      <a:prstDash val="solid"/>
+                      <a:round/>
+                      <a:headEnd type="none" w="med" len="med"/>
+                      <a:tailEnd type="none" w="med" len="med"/>
+                    </a:lnB>
+                    <a:noFill/>
+                  </a:tcPr>
+                </a:tc>
+                <a:extLst>
+                  <a:ext uri="{0D108BD9-81ED-4DB2-BD59-A6C34878D82A}">
+                    <a16:rowId xmlns:a16="http://schemas.microsoft.com/office/drawing/2014/main" val="2022718497"/>
+                  </a:ext>
+                </a:extLst>
+              </a:tr>
+            </a:tbl>
+          </a:graphicData>
+        </a:graphic>
+      </p:graphicFrame>
+    </p:spTree>
+    <p:extLst>
+      <p:ext uri="{BB962C8B-B14F-4D97-AF65-F5344CB8AC3E}">
+        <p14:creationId xmlns:p14="http://schemas.microsoft.com/office/powerpoint/2010/main" val="122852217"/>
+      </p:ext>
+    </p:extLst>
+  </p:cSld>
+  <p:clrMapOvr>
+    <a:masterClrMapping/>
+  </p:clrMapOvr>
+</p:sld>
+</file>
+
+<file path=ppt/slides/slide9.xml><?xml version="1.0" encoding="utf-8"?>
+<p:sld xmlns:a="http://schemas.openxmlformats.org/drawingml/2006/main" xmlns:r="http://schemas.openxmlformats.org/officeDocument/2006/relationships" xmlns:p="http://schemas.openxmlformats.org/presentationml/2006/main">
+  <p:cSld>
+    <p:spTree>
+      <p:nvGrpSpPr>
+        <p:cNvPr id="1" name="">
+          <a:extLst>
+            <a:ext uri="{FF2B5EF4-FFF2-40B4-BE49-F238E27FC236}">
+              <a16:creationId xmlns:a16="http://schemas.microsoft.com/office/drawing/2014/main" id="{04251F09-C9BD-4E74-9D0F-E199839F0AFB}"/>
+            </a:ext>
+          </a:extLst>
+        </p:cNvPr>
+        <p:cNvGrpSpPr/>
+        <p:nvPr/>
+      </p:nvGrpSpPr>
+      <p:grpSpPr>
+        <a:xfrm>
+          <a:off x="0" y="0"/>
+          <a:ext cx="0" cy="0"/>
+          <a:chOff x="0" y="0"/>
+          <a:chExt cx="0" cy="0"/>
+        </a:xfrm>
+      </p:grpSpPr>
+      <p:sp>
+        <p:nvSpPr>
+          <p:cNvPr id="3" name="TextBox 2">
+            <a:extLst>
+              <a:ext uri="{FF2B5EF4-FFF2-40B4-BE49-F238E27FC236}">
+                <a16:creationId xmlns:a16="http://schemas.microsoft.com/office/drawing/2014/main" id="{02CEDAAF-2DDD-9A43-F58B-9A494C792DDC}"/>
+              </a:ext>
+            </a:extLst>
+          </p:cNvPr>
+          <p:cNvSpPr txBox="1"/>
+          <p:nvPr/>
+        </p:nvSpPr>
+        <p:spPr>
+          <a:xfrm>
+            <a:off x="217714" y="255046"/>
             <a:ext cx="11756571" cy="355354"/>
           </a:xfrm>
           <a:prstGeom prst="rect">
@@ -3628,25 +9554,111 @@
               <a:buNone/>
             </a:pPr>
             <a:r>
-              <a:rPr kumimoji="0" lang="en-US" altLang="en-US" sz="1300" b="0" i="0" u="none" strike="noStrike" cap="none" normalizeH="0" baseline="0">
-                <a:ln>
-                  <a:noFill/>
-                </a:ln>
+              <a:rPr lang="en-US" altLang="en-US" sz="1300">
+                <a:latin typeface="Arial" panose="020B0604020202020204" pitchFamily="34" charset="0"/>
+              </a:rPr>
+              <a:t>Bu slaydda is</a:t>
+            </a:r>
+            <a:r>
+              <a:rPr lang="az-Latn-AZ" altLang="en-US" sz="1300">
+                <a:latin typeface="Arial" panose="020B0604020202020204" pitchFamily="34" charset="0"/>
+              </a:rPr>
+              <a:t>ə </a:t>
+            </a:r>
+            <a:r>
+              <a:rPr lang="az-Latn-AZ" altLang="en-US" sz="1300" b="1">
+                <a:latin typeface="Arial" panose="020B0604020202020204" pitchFamily="34" charset="0"/>
+              </a:rPr>
+              <a:t>unlink() </a:t>
+            </a:r>
+            <a:r>
+              <a:rPr lang="az-Latn-AZ" altLang="en-US" sz="1300">
+                <a:latin typeface="Arial" panose="020B0604020202020204" pitchFamily="34" charset="0"/>
+              </a:rPr>
+              <a:t>funksiyası ilə faylı silirik ancaq olmuyan faylı silmək istədikdə `</a:t>
+            </a:r>
+            <a:r>
+              <a:rPr lang="az-Latn-AZ" altLang="en-US" sz="1300" b="1">
                 <a:solidFill>
-                  <a:schemeClr val="tx1"/>
+                  <a:srgbClr val="FF0000"/>
                 </a:solidFill>
-                <a:effectLst/>
-                <a:latin typeface="Arial" panose="020B0604020202020204" pitchFamily="34" charset="0"/>
-              </a:rPr>
-              <a:t>.</a:t>
-            </a:r>
+                <a:latin typeface="Arial" panose="020B0604020202020204" pitchFamily="34" charset="0"/>
+              </a:rPr>
+              <a:t>ErrorException</a:t>
+            </a:r>
+            <a:r>
+              <a:rPr lang="az-Latn-AZ" altLang="en-US" sz="1300">
+                <a:latin typeface="Arial" panose="020B0604020202020204" pitchFamily="34" charset="0"/>
+              </a:rPr>
+              <a:t>` xətası alırıq.</a:t>
+            </a:r>
+            <a:endParaRPr kumimoji="0" lang="en-US" altLang="en-US" sz="1300" b="0" i="0" u="none" strike="noStrike" cap="none" normalizeH="0" baseline="0">
+              <a:ln>
+                <a:noFill/>
+              </a:ln>
+              <a:solidFill>
+                <a:schemeClr val="tx1"/>
+              </a:solidFill>
+              <a:effectLst/>
+              <a:latin typeface="Arial" panose="020B0604020202020204" pitchFamily="34" charset="0"/>
+            </a:endParaRPr>
           </a:p>
         </p:txBody>
       </p:sp>
+      <p:pic>
+        <p:nvPicPr>
+          <p:cNvPr id="4" name="Picture 3">
+            <a:extLst>
+              <a:ext uri="{FF2B5EF4-FFF2-40B4-BE49-F238E27FC236}">
+                <a16:creationId xmlns:a16="http://schemas.microsoft.com/office/drawing/2014/main" id="{C242F715-C5DB-CAF3-EE7C-C67CFA7026C2}"/>
+              </a:ext>
+            </a:extLst>
+          </p:cNvPr>
+          <p:cNvPicPr>
+            <a:picLocks noChangeAspect="1"/>
+          </p:cNvPicPr>
+          <p:nvPr/>
+        </p:nvPicPr>
+        <p:blipFill>
+          <a:blip r:embed="rId2">
+            <a:extLst>
+              <a:ext uri="{28A0092B-C50C-407E-A947-70E740481C1C}">
+                <a14:useLocalDpi xmlns:a14="http://schemas.microsoft.com/office/drawing/2010/main" val="0"/>
+              </a:ext>
+            </a:extLst>
+          </a:blip>
+          <a:stretch>
+            <a:fillRect/>
+          </a:stretch>
+        </p:blipFill>
+        <p:spPr>
+          <a:xfrm>
+            <a:off x="2488676" y="1725354"/>
+            <a:ext cx="9703324" cy="5132646"/>
+          </a:xfrm>
+          <a:prstGeom prst="rect">
+            <a:avLst/>
+          </a:prstGeom>
+          <a:ln w="38100" cap="sq">
+            <a:solidFill>
+              <a:srgbClr val="000000"/>
+            </a:solidFill>
+            <a:prstDash val="solid"/>
+            <a:miter lim="800000"/>
+          </a:ln>
+          <a:effectLst>
+            <a:outerShdw blurRad="50800" dist="38100" dir="2700000" algn="tl" rotWithShape="0">
+              <a:srgbClr val="000000">
+                <a:alpha val="43000"/>
+              </a:srgbClr>
+            </a:outerShdw>
+          </a:effectLst>
+        </p:spPr>
+      </p:pic>
     </p:spTree>
     <p:extLst>
       <p:ext uri="{BB962C8B-B14F-4D97-AF65-F5344CB8AC3E}">
-        <p14:creationId xmlns:p14="http://schemas.microsoft.com/office/powerpoint/2010/main" val="3095838342"/>
+        <p14:creationId xmlns:p14="http://schemas.microsoft.com/office/powerpoint/2010/main" val="249288442"/>
       </p:ext>
     </p:extLst>
   </p:cSld>
